--- a/docs/slides/pitch.pptx
+++ b/docs/slides/pitch.pptx
@@ -11,6 +11,7 @@
     <p:sldId id="259" r:id="rId11"/>
     <p:sldId id="260" r:id="rId12"/>
     <p:sldId id="261" r:id="rId13"/>
+    <p:sldId id="262" r:id="rId14"/>
   </p:sldIdLst>
   <p:sldSz cx="12191695" cy="6858000" type="screen4x3"/>
   <p:notesSz cx="6858000" cy="9144000"/>
@@ -647,7 +648,7 @@
           <a:lstStyle/>
           <a:p>
             <a:r>
-              <a:t>A request in any EU language is translated once. An AI picks the matching rule from the actual law text and quotes it. Prohibited purposes are rejected with the quote. Approved requests are parsed by rules into SQL; statistics go through the small-cell rule, record requests are copied into a secure room with no download. Anyone flooding the service is blocked. (≈20 s)</a:t>
+              <a:t>So what did we do about it? Researchers write the request in plain words, in any EU language, and if they cannot phrase the definitions, one click drafts them. Engineers are out of the loop: fixed rules turn the definitions into SQL, and an AI only steps in where the rules give up, under the same checks. And the access body gets a decision that quotes the article from the regulation, with the privacy rules enforced inside the query and records locked in a secure room. Seconds instead of weeks, and the same answer every time. (≈25 s)</a:t>
             </a:r>
           </a:p>
         </p:txBody>
@@ -717,7 +718,7 @@
           <a:lstStyle/>
           <a:p>
             <a:r>
-              <a:t>Why is this better than a black box? There is no technical burden: the applicant writes in plain words and the AI even drafts the definitions. Every decision quotes the article verbatim, so it is explainable. The numbers come from code, not from the AI, so they are the same every run. Privacy rules are enforced inside the query, and everything is logged. (≈20 s)</a:t>
+              <a:t>A request in any EU language is translated once. An AI picks the matching rule from the actual law text and quotes it. Prohibited purposes are rejected with the quote. Approved requests are parsed by rules into SQL; statistics go through the small-cell rule, record requests are copied into a secure room with no download. Anyone flooding the service is blocked. (≈20 s)</a:t>
             </a:r>
           </a:p>
         </p:txBody>
@@ -787,32 +788,7 @@
           <a:lstStyle/>
           <a:p>
             <a:r>
-              <a:t>Now the demo, in four steps and one attack. (switch to screen capture; ≈50 s)</a:t>
-            </a:r>
-          </a:p>
-          <a:p>
-            <a:r>
-              <a:t>R02: the insurer. Submit. Rejected, Art. 54(b), quoted.</a:t>
-            </a:r>
-          </a:p>
-          <a:p>
-            <a:r>
-              <a:t>R01: diabetes by region. Submit. The table, with the small-cell note.</a:t>
-            </a:r>
-          </a:p>
-          <a:p>
-            <a:r>
-              <a:t>R11: the same request in German. The decision shows the English text next to it.</a:t>
-            </a:r>
-          </a:p>
-          <a:p>
-            <a:r>
-              <a:t>R12: records for a prediction model. Approved into the secure room; open it, browse; click Download: 403, logged.</a:t>
-            </a:r>
-          </a:p>
-          <a:p>
-            <a:r>
-              <a:t>Finally run flood.py in a terminal: 20 served, then 429 with Retry-After.</a:t>
+              <a:t>Why is this better than a black box? There is no technical burden: the applicant writes in plain words and the AI even drafts the definitions. Every decision quotes the article verbatim, so it is explainable. The numbers come from code, not from the AI, so they are the same every run. Privacy rules are enforced inside the query, and everything is logged. (≈20 s)</a:t>
             </a:r>
           </a:p>
         </p:txBody>
@@ -838,6 +814,101 @@
 </file>
 
 <file path=ppt/notesSlides/notesSlide6.xml><?xml version="1.0" encoding="utf-8"?>
+<p:notes xmlns:a="http://schemas.openxmlformats.org/drawingml/2006/main" xmlns:p="http://schemas.openxmlformats.org/presentationml/2006/main" xmlns:r="http://schemas.openxmlformats.org/officeDocument/2006/relationships">
+  <p:cSld>
+    <p:spTree>
+      <p:nvGrpSpPr>
+        <p:cNvPr id="1" name=""/>
+        <p:cNvGrpSpPr/>
+        <p:nvPr/>
+      </p:nvGrpSpPr>
+      <p:grpSpPr>
+        <a:xfrm>
+          <a:off x="0" y="0"/>
+          <a:ext cx="0" cy="0"/>
+          <a:chOff x="0" y="0"/>
+          <a:chExt cx="0" cy="0"/>
+        </a:xfrm>
+      </p:grpSpPr>
+      <p:sp>
+        <p:nvSpPr>
+          <p:cNvPr id="2" name="Slide Image Placeholder 1"/>
+          <p:cNvSpPr>
+            <a:spLocks noGrp="1"/>
+          </p:cNvSpPr>
+          <p:nvPr>
+            <p:ph type="sldImg" idx="2"/>
+          </p:nvPr>
+        </p:nvSpPr>
+        <p:spPr/>
+      </p:sp>
+      <p:sp>
+        <p:nvSpPr>
+          <p:cNvPr id="3" name="Notes Placeholder 2"/>
+          <p:cNvSpPr>
+            <a:spLocks noGrp="1"/>
+          </p:cNvSpPr>
+          <p:nvPr>
+            <p:ph type="body" idx="3" sz="quarter"/>
+          </p:nvPr>
+        </p:nvSpPr>
+        <p:spPr/>
+        <p:txBody>
+          <a:bodyPr/>
+          <a:lstStyle/>
+          <a:p>
+            <a:r>
+              <a:t>Now the demo, in four steps and one attack. (switch to screen capture; ≈50 s)</a:t>
+            </a:r>
+          </a:p>
+          <a:p>
+            <a:r>
+              <a:t>R02: the insurer. Submit. Rejected, Art. 54(b), quoted.</a:t>
+            </a:r>
+          </a:p>
+          <a:p>
+            <a:r>
+              <a:t>R01: diabetes by region. Submit. The table, with the small-cell note.</a:t>
+            </a:r>
+          </a:p>
+          <a:p>
+            <a:r>
+              <a:t>R11: the same request in German. The decision shows the English text next to it.</a:t>
+            </a:r>
+          </a:p>
+          <a:p>
+            <a:r>
+              <a:t>R12: records for a prediction model. Approved into the secure room; open it, browse; click Download: 403, logged.</a:t>
+            </a:r>
+          </a:p>
+          <a:p>
+            <a:r>
+              <a:t>Finally run flood.py in a terminal: 20 served, then 429 with Retry-After.</a:t>
+            </a:r>
+          </a:p>
+        </p:txBody>
+      </p:sp>
+      <p:sp>
+        <p:nvSpPr>
+          <p:cNvPr id="4" name="Slide Number Placeholder 3"/>
+          <p:cNvSpPr>
+            <a:spLocks noGrp="1"/>
+          </p:cNvSpPr>
+          <p:nvPr>
+            <p:ph type="sldNum" idx="5" sz="quarter"/>
+          </p:nvPr>
+        </p:nvSpPr>
+        <p:spPr/>
+      </p:sp>
+    </p:spTree>
+  </p:cSld>
+  <p:clrMapOvr>
+    <a:masterClrMapping/>
+  </p:clrMapOvr>
+</p:notes>
+</file>
+
+<file path=ppt/notesSlides/notesSlide7.xml><?xml version="1.0" encoding="utf-8"?>
 <p:notes xmlns:a="http://schemas.openxmlformats.org/drawingml/2006/main" xmlns:p="http://schemas.openxmlformats.org/presentationml/2006/main" xmlns:r="http://schemas.openxmlformats.org/officeDocument/2006/relationships">
   <p:cSld>
     <p:spTree>
@@ -4874,7 +4945,7 @@
                 </a:solidFill>
                 <a:latin typeface="Inter"/>
               </a:rPr>
-              <a:t>What we built: one pipeline, three outcomes</a:t>
+              <a:t>What we did about it</a:t>
             </a:r>
           </a:p>
         </p:txBody>
@@ -4909,7 +4980,7 @@
                 </a:solidFill>
                 <a:latin typeface="Inter"/>
               </a:rPr>
-              <a:t>request → law check → statistics or secure room; attackers blocked</a:t>
+              <a:t>the same three people, one app</a:t>
             </a:r>
           </a:p>
         </p:txBody>
@@ -4949,33 +5020,552 @@
           </a:p>
         </p:txBody>
       </p:sp>
-      <p:pic>
-        <p:nvPicPr>
-          <p:cNvPr id="6" name="Picture 5" descr="how-it-works.png"/>
-          <p:cNvPicPr>
-            <a:picLocks noChangeAspect="1"/>
-          </p:cNvPicPr>
-          <p:nvPr/>
-        </p:nvPicPr>
-        <p:blipFill>
-          <a:blip r:embed="rId2"/>
-          <a:stretch>
-            <a:fillRect/>
-          </a:stretch>
-        </p:blipFill>
-        <p:spPr>
-          <a:xfrm>
-            <a:off x="365760" y="1218111"/>
-            <a:ext cx="11430000" cy="5061857"/>
+      <p:sp>
+        <p:nvSpPr>
+          <p:cNvPr id="6" name="Rounded Rectangle 5"/>
+          <p:cNvSpPr/>
+          <p:nvPr/>
+        </p:nvSpPr>
+        <p:spPr>
+          <a:xfrm>
+            <a:off x="548640" y="1371600"/>
+            <a:ext cx="3474720" cy="3566160"/>
+          </a:xfrm>
+          <a:prstGeom prst="roundRect">
+            <a:avLst>
+              <a:gd name="adj" fmla="val 8000"/>
+            </a:avLst>
+          </a:prstGeom>
+          <a:solidFill>
+            <a:srgbClr val="F6F7F9"/>
+          </a:solidFill>
+          <a:ln w="19050">
+            <a:solidFill>
+              <a:srgbClr val="1565C0"/>
+            </a:solidFill>
+          </a:ln>
+          <a:effectLst/>
+        </p:spPr>
+        <p:style>
+          <a:lnRef idx="1">
+            <a:schemeClr val="accent1"/>
+          </a:lnRef>
+          <a:fillRef idx="3">
+            <a:schemeClr val="accent1"/>
+          </a:fillRef>
+          <a:effectRef idx="2">
+            <a:schemeClr val="accent1"/>
+          </a:effectRef>
+          <a:fontRef idx="minor">
+            <a:schemeClr val="lt1"/>
+          </a:fontRef>
+        </p:style>
+        <p:txBody>
+          <a:bodyPr rtlCol="0" anchor="ctr"/>
+          <a:lstStyle/>
+          <a:p>
+            <a:pPr algn="ctr"/>
+          </a:p>
+        </p:txBody>
+      </p:sp>
+      <p:sp>
+        <p:nvSpPr>
+          <p:cNvPr id="7" name="TextBox 6"/>
+          <p:cNvSpPr txBox="1"/>
+          <p:nvPr/>
+        </p:nvSpPr>
+        <p:spPr>
+          <a:xfrm>
+            <a:off x="777240" y="1554480"/>
+            <a:ext cx="3017520" cy="457200"/>
           </a:xfrm>
           <a:prstGeom prst="rect">
             <a:avLst/>
           </a:prstGeom>
-        </p:spPr>
-      </p:pic>
-      <p:sp>
-        <p:nvSpPr>
-          <p:cNvPr id="7" name="TextBox 6"/>
+          <a:noFill/>
+        </p:spPr>
+        <p:txBody>
+          <a:bodyPr wrap="square" anchor="t" lIns="45720" rIns="45720">
+            <a:spAutoFit/>
+          </a:bodyPr>
+          <a:lstStyle/>
+          <a:p>
+            <a:pPr algn="l"/>
+            <a:r>
+              <a:rPr sz="2000" b="1">
+                <a:solidFill>
+                  <a:srgbClr val="1565C0"/>
+                </a:solidFill>
+                <a:latin typeface="Inter"/>
+              </a:rPr>
+              <a:t>Researchers</a:t>
+            </a:r>
+          </a:p>
+        </p:txBody>
+      </p:sp>
+      <p:sp>
+        <p:nvSpPr>
+          <p:cNvPr id="8" name="TextBox 7"/>
+          <p:cNvSpPr txBox="1"/>
+          <p:nvPr/>
+        </p:nvSpPr>
+        <p:spPr>
+          <a:xfrm>
+            <a:off x="777240" y="2103120"/>
+            <a:ext cx="3017520" cy="2651760"/>
+          </a:xfrm>
+          <a:prstGeom prst="rect">
+            <a:avLst/>
+          </a:prstGeom>
+          <a:noFill/>
+        </p:spPr>
+        <p:txBody>
+          <a:bodyPr wrap="square">
+            <a:spAutoFit/>
+          </a:bodyPr>
+          <a:lstStyle/>
+          <a:p>
+            <a:pPr>
+              <a:spcAft>
+                <a:spcPts val="800"/>
+              </a:spcAft>
+            </a:pPr>
+            <a:r>
+              <a:rPr sz="1500" b="1">
+                <a:solidFill>
+                  <a:srgbClr val="1F2A37"/>
+                </a:solidFill>
+                <a:latin typeface="Inter"/>
+              </a:rPr>
+              <a:t>•  write the request in plain words, in any EU language</a:t>
+            </a:r>
+          </a:p>
+          <a:p>
+            <a:pPr>
+              <a:spcAft>
+                <a:spcPts val="800"/>
+              </a:spcAft>
+            </a:pPr>
+            <a:r>
+              <a:rPr sz="1500" b="1">
+                <a:solidFill>
+                  <a:srgbClr val="1F2A37"/>
+                </a:solidFill>
+                <a:latin typeface="Inter"/>
+              </a:rPr>
+              <a:t>•  one click: the AI drafts the definitions they could not phrase</a:t>
+            </a:r>
+          </a:p>
+          <a:p>
+            <a:pPr>
+              <a:spcAft>
+                <a:spcPts val="800"/>
+              </a:spcAft>
+            </a:pPr>
+            <a:r>
+              <a:rPr sz="1500" b="1">
+                <a:solidFill>
+                  <a:srgbClr val="1F2A37"/>
+                </a:solidFill>
+                <a:latin typeface="Inter"/>
+              </a:rPr>
+              <a:t>•  the answer comes back in seconds, with the reason</a:t>
+            </a:r>
+          </a:p>
+        </p:txBody>
+      </p:sp>
+      <p:sp>
+        <p:nvSpPr>
+          <p:cNvPr id="9" name="Rounded Rectangle 8"/>
+          <p:cNvSpPr/>
+          <p:nvPr/>
+        </p:nvSpPr>
+        <p:spPr>
+          <a:xfrm>
+            <a:off x="4343400" y="1371600"/>
+            <a:ext cx="3474720" cy="3566160"/>
+          </a:xfrm>
+          <a:prstGeom prst="roundRect">
+            <a:avLst>
+              <a:gd name="adj" fmla="val 8000"/>
+            </a:avLst>
+          </a:prstGeom>
+          <a:solidFill>
+            <a:srgbClr val="F6F7F9"/>
+          </a:solidFill>
+          <a:ln w="19050">
+            <a:solidFill>
+              <a:srgbClr val="F0B429"/>
+            </a:solidFill>
+          </a:ln>
+          <a:effectLst/>
+        </p:spPr>
+        <p:style>
+          <a:lnRef idx="1">
+            <a:schemeClr val="accent1"/>
+          </a:lnRef>
+          <a:fillRef idx="3">
+            <a:schemeClr val="accent1"/>
+          </a:fillRef>
+          <a:effectRef idx="2">
+            <a:schemeClr val="accent1"/>
+          </a:effectRef>
+          <a:fontRef idx="minor">
+            <a:schemeClr val="lt1"/>
+          </a:fontRef>
+        </p:style>
+        <p:txBody>
+          <a:bodyPr rtlCol="0" anchor="ctr"/>
+          <a:lstStyle/>
+          <a:p>
+            <a:pPr algn="ctr"/>
+          </a:p>
+        </p:txBody>
+      </p:sp>
+      <p:sp>
+        <p:nvSpPr>
+          <p:cNvPr id="10" name="TextBox 9"/>
+          <p:cNvSpPr txBox="1"/>
+          <p:nvPr/>
+        </p:nvSpPr>
+        <p:spPr>
+          <a:xfrm>
+            <a:off x="4572000" y="1554480"/>
+            <a:ext cx="3017520" cy="457200"/>
+          </a:xfrm>
+          <a:prstGeom prst="rect">
+            <a:avLst/>
+          </a:prstGeom>
+          <a:noFill/>
+        </p:spPr>
+        <p:txBody>
+          <a:bodyPr wrap="square" anchor="t" lIns="45720" rIns="45720">
+            <a:spAutoFit/>
+          </a:bodyPr>
+          <a:lstStyle/>
+          <a:p>
+            <a:pPr algn="l"/>
+            <a:r>
+              <a:rPr sz="2000" b="1">
+                <a:solidFill>
+                  <a:srgbClr val="F0B429"/>
+                </a:solidFill>
+                <a:latin typeface="Inter"/>
+              </a:rPr>
+              <a:t>Engineers</a:t>
+            </a:r>
+          </a:p>
+        </p:txBody>
+      </p:sp>
+      <p:sp>
+        <p:nvSpPr>
+          <p:cNvPr id="11" name="TextBox 10"/>
+          <p:cNvSpPr txBox="1"/>
+          <p:nvPr/>
+        </p:nvSpPr>
+        <p:spPr>
+          <a:xfrm>
+            <a:off x="4572000" y="2103120"/>
+            <a:ext cx="3017520" cy="2651760"/>
+          </a:xfrm>
+          <a:prstGeom prst="rect">
+            <a:avLst/>
+          </a:prstGeom>
+          <a:noFill/>
+        </p:spPr>
+        <p:txBody>
+          <a:bodyPr wrap="square">
+            <a:spAutoFit/>
+          </a:bodyPr>
+          <a:lstStyle/>
+          <a:p>
+            <a:pPr>
+              <a:spcAft>
+                <a:spcPts val="800"/>
+              </a:spcAft>
+            </a:pPr>
+            <a:r>
+              <a:rPr sz="1500" b="1">
+                <a:solidFill>
+                  <a:srgbClr val="1F2A37"/>
+                </a:solidFill>
+                <a:latin typeface="Inter"/>
+              </a:rPr>
+              <a:t>•  no one writes a query per request</a:t>
+            </a:r>
+          </a:p>
+          <a:p>
+            <a:pPr>
+              <a:spcAft>
+                <a:spcPts val="800"/>
+              </a:spcAft>
+            </a:pPr>
+            <a:r>
+              <a:rPr sz="1500" b="1">
+                <a:solidFill>
+                  <a:srgbClr val="1F2A37"/>
+                </a:solidFill>
+                <a:latin typeface="Inter"/>
+              </a:rPr>
+              <a:t>•  fixed rules turn the definitions into SQL; codes come from the request</a:t>
+            </a:r>
+          </a:p>
+          <a:p>
+            <a:pPr>
+              <a:spcAft>
+                <a:spcPts val="800"/>
+              </a:spcAft>
+            </a:pPr>
+            <a:r>
+              <a:rPr sz="1500" b="1">
+                <a:solidFill>
+                  <a:srgbClr val="1F2A37"/>
+                </a:solidFill>
+                <a:latin typeface="Inter"/>
+              </a:rPr>
+              <a:t>•  an LLM steps in only where the rules give up, under the same checks</a:t>
+            </a:r>
+          </a:p>
+        </p:txBody>
+      </p:sp>
+      <p:sp>
+        <p:nvSpPr>
+          <p:cNvPr id="12" name="Rounded Rectangle 11"/>
+          <p:cNvSpPr/>
+          <p:nvPr/>
+        </p:nvSpPr>
+        <p:spPr>
+          <a:xfrm>
+            <a:off x="8138160" y="1371600"/>
+            <a:ext cx="3474720" cy="3566160"/>
+          </a:xfrm>
+          <a:prstGeom prst="roundRect">
+            <a:avLst>
+              <a:gd name="adj" fmla="val 8000"/>
+            </a:avLst>
+          </a:prstGeom>
+          <a:solidFill>
+            <a:srgbClr val="F6F7F9"/>
+          </a:solidFill>
+          <a:ln w="19050">
+            <a:solidFill>
+              <a:srgbClr val="C62828"/>
+            </a:solidFill>
+          </a:ln>
+          <a:effectLst/>
+        </p:spPr>
+        <p:style>
+          <a:lnRef idx="1">
+            <a:schemeClr val="accent1"/>
+          </a:lnRef>
+          <a:fillRef idx="3">
+            <a:schemeClr val="accent1"/>
+          </a:fillRef>
+          <a:effectRef idx="2">
+            <a:schemeClr val="accent1"/>
+          </a:effectRef>
+          <a:fontRef idx="minor">
+            <a:schemeClr val="lt1"/>
+          </a:fontRef>
+        </p:style>
+        <p:txBody>
+          <a:bodyPr rtlCol="0" anchor="ctr"/>
+          <a:lstStyle/>
+          <a:p>
+            <a:pPr algn="ctr"/>
+          </a:p>
+        </p:txBody>
+      </p:sp>
+      <p:sp>
+        <p:nvSpPr>
+          <p:cNvPr id="13" name="TextBox 12"/>
+          <p:cNvSpPr txBox="1"/>
+          <p:nvPr/>
+        </p:nvSpPr>
+        <p:spPr>
+          <a:xfrm>
+            <a:off x="8366760" y="1554480"/>
+            <a:ext cx="3017520" cy="457200"/>
+          </a:xfrm>
+          <a:prstGeom prst="rect">
+            <a:avLst/>
+          </a:prstGeom>
+          <a:noFill/>
+        </p:spPr>
+        <p:txBody>
+          <a:bodyPr wrap="square" anchor="t" lIns="45720" rIns="45720">
+            <a:spAutoFit/>
+          </a:bodyPr>
+          <a:lstStyle/>
+          <a:p>
+            <a:pPr algn="l"/>
+            <a:r>
+              <a:rPr sz="2000" b="1">
+                <a:solidFill>
+                  <a:srgbClr val="C62828"/>
+                </a:solidFill>
+                <a:latin typeface="Inter"/>
+              </a:rPr>
+              <a:t>The access body</a:t>
+            </a:r>
+          </a:p>
+        </p:txBody>
+      </p:sp>
+      <p:sp>
+        <p:nvSpPr>
+          <p:cNvPr id="14" name="TextBox 13"/>
+          <p:cNvSpPr txBox="1"/>
+          <p:nvPr/>
+        </p:nvSpPr>
+        <p:spPr>
+          <a:xfrm>
+            <a:off x="8366760" y="2103120"/>
+            <a:ext cx="3017520" cy="2651760"/>
+          </a:xfrm>
+          <a:prstGeom prst="rect">
+            <a:avLst/>
+          </a:prstGeom>
+          <a:noFill/>
+        </p:spPr>
+        <p:txBody>
+          <a:bodyPr wrap="square">
+            <a:spAutoFit/>
+          </a:bodyPr>
+          <a:lstStyle/>
+          <a:p>
+            <a:pPr>
+              <a:spcAft>
+                <a:spcPts val="800"/>
+              </a:spcAft>
+            </a:pPr>
+            <a:r>
+              <a:rPr sz="1500" b="1">
+                <a:solidFill>
+                  <a:srgbClr val="1F2A37"/>
+                </a:solidFill>
+                <a:latin typeface="Inter"/>
+              </a:rPr>
+              <a:t>•  the law check quotes the article, verbatim from the regulation</a:t>
+            </a:r>
+          </a:p>
+          <a:p>
+            <a:pPr>
+              <a:spcAft>
+                <a:spcPts val="800"/>
+              </a:spcAft>
+            </a:pPr>
+            <a:r>
+              <a:rPr sz="1500" b="1">
+                <a:solidFill>
+                  <a:srgbClr val="1F2A37"/>
+                </a:solidFill>
+                <a:latin typeface="Inter"/>
+              </a:rPr>
+              <a:t>•  small-cell rule and opt-outs enforced inside the query</a:t>
+            </a:r>
+          </a:p>
+          <a:p>
+            <a:pPr>
+              <a:spcAft>
+                <a:spcPts val="800"/>
+              </a:spcAft>
+            </a:pPr>
+            <a:r>
+              <a:rPr sz="1500" b="1">
+                <a:solidFill>
+                  <a:srgbClr val="1F2A37"/>
+                </a:solidFill>
+                <a:latin typeface="Inter"/>
+              </a:rPr>
+              <a:t>•  records only in a secure room: images, no download, audit log</a:t>
+            </a:r>
+          </a:p>
+        </p:txBody>
+      </p:sp>
+      <p:sp>
+        <p:nvSpPr>
+          <p:cNvPr id="15" name="Rounded Rectangle 14"/>
+          <p:cNvSpPr/>
+          <p:nvPr/>
+        </p:nvSpPr>
+        <p:spPr>
+          <a:xfrm>
+            <a:off x="548640" y="5212080"/>
+            <a:ext cx="11064240" cy="914400"/>
+          </a:xfrm>
+          <a:prstGeom prst="roundRect">
+            <a:avLst>
+              <a:gd name="adj" fmla="val 8000"/>
+            </a:avLst>
+          </a:prstGeom>
+          <a:solidFill>
+            <a:srgbClr val="1F3A5F"/>
+          </a:solidFill>
+          <a:ln>
+            <a:noFill/>
+          </a:ln>
+          <a:effectLst/>
+        </p:spPr>
+        <p:style>
+          <a:lnRef idx="1">
+            <a:schemeClr val="accent1"/>
+          </a:lnRef>
+          <a:fillRef idx="3">
+            <a:schemeClr val="accent1"/>
+          </a:fillRef>
+          <a:effectRef idx="2">
+            <a:schemeClr val="accent1"/>
+          </a:effectRef>
+          <a:fontRef idx="minor">
+            <a:schemeClr val="lt1"/>
+          </a:fontRef>
+        </p:style>
+        <p:txBody>
+          <a:bodyPr rtlCol="0" anchor="ctr"/>
+          <a:lstStyle/>
+          <a:p>
+            <a:pPr algn="ctr"/>
+          </a:p>
+        </p:txBody>
+      </p:sp>
+      <p:sp>
+        <p:nvSpPr>
+          <p:cNvPr id="16" name="TextBox 15"/>
+          <p:cNvSpPr txBox="1"/>
+          <p:nvPr/>
+        </p:nvSpPr>
+        <p:spPr>
+          <a:xfrm>
+            <a:off x="822960" y="5212080"/>
+            <a:ext cx="10515600" cy="914400"/>
+          </a:xfrm>
+          <a:prstGeom prst="rect">
+            <a:avLst/>
+          </a:prstGeom>
+          <a:noFill/>
+        </p:spPr>
+        <p:txBody>
+          <a:bodyPr wrap="square" anchor="ctr" lIns="45720" rIns="45720">
+            <a:spAutoFit/>
+          </a:bodyPr>
+          <a:lstStyle/>
+          <a:p>
+            <a:pPr algn="l"/>
+            <a:r>
+              <a:rPr sz="1800" b="1">
+                <a:solidFill>
+                  <a:srgbClr val="FFFFFF"/>
+                </a:solidFill>
+                <a:latin typeface="Inter"/>
+              </a:rPr>
+              <a:t>Decisions in seconds instead of weeks — every one of them explained, and identical on every run.</a:t>
+            </a:r>
+          </a:p>
+        </p:txBody>
+      </p:sp>
+      <p:sp>
+        <p:nvSpPr>
+          <p:cNvPr id="17" name="TextBox 16"/>
           <p:cNvSpPr txBox="1"/>
           <p:nvPr/>
         </p:nvSpPr>
@@ -5100,7 +5690,7 @@
                 </a:solidFill>
                 <a:latin typeface="Inter"/>
               </a:rPr>
-              <a:t>Why this is better than a black box</a:t>
+              <a:t>What we built: one pipeline, three outcomes</a:t>
             </a:r>
           </a:p>
         </p:txBody>
@@ -5135,7 +5725,7 @@
                 </a:solidFill>
                 <a:latin typeface="Inter"/>
               </a:rPr>
-              <a:t>grounded, fast, consistent, safe</a:t>
+              <a:t>request → law check → statistics or secure room; attackers blocked</a:t>
             </a:r>
           </a:p>
         </p:txBody>
@@ -5175,182 +5765,9 @@
           </a:p>
         </p:txBody>
       </p:sp>
-      <p:sp>
-        <p:nvSpPr>
-          <p:cNvPr id="6" name="TextBox 5"/>
-          <p:cNvSpPr txBox="1"/>
-          <p:nvPr/>
-        </p:nvSpPr>
-        <p:spPr>
-          <a:xfrm>
-            <a:off x="548640" y="1371600"/>
-            <a:ext cx="5760720" cy="4572000"/>
-          </a:xfrm>
-          <a:prstGeom prst="rect">
-            <a:avLst/>
-          </a:prstGeom>
-          <a:noFill/>
-        </p:spPr>
-        <p:txBody>
-          <a:bodyPr wrap="square">
-            <a:spAutoFit/>
-          </a:bodyPr>
-          <a:lstStyle/>
-          <a:p>
-            <a:pPr>
-              <a:spcAft>
-                <a:spcPts val="1000"/>
-              </a:spcAft>
-            </a:pPr>
-            <a:r>
-              <a:rPr sz="1700" b="1">
-                <a:solidFill>
-                  <a:srgbClr val="1F2A37"/>
-                </a:solidFill>
-                <a:latin typeface="Inter"/>
-              </a:rPr>
-              <a:t>•  No technical burden.</a:t>
-            </a:r>
-            <a:r>
-              <a:rPr sz="1700">
-                <a:solidFill>
-                  <a:srgbClr val="5B6472"/>
-                </a:solidFill>
-                <a:latin typeface="Inter"/>
-              </a:rPr>
-              <a:t> Plain words in; the AI drafts the definitions the access body can compute.</a:t>
-            </a:r>
-          </a:p>
-          <a:p>
-            <a:pPr>
-              <a:spcAft>
-                <a:spcPts val="1000"/>
-              </a:spcAft>
-            </a:pPr>
-            <a:r>
-              <a:rPr sz="1700" b="1">
-                <a:solidFill>
-                  <a:srgbClr val="1F2A37"/>
-                </a:solidFill>
-                <a:latin typeface="Inter"/>
-              </a:rPr>
-              <a:t>•  Explainable, not a verdict.</a:t>
-            </a:r>
-            <a:r>
-              <a:rPr sz="1700">
-                <a:solidFill>
-                  <a:srgbClr val="5B6472"/>
-                </a:solidFill>
-                <a:latin typeface="Inter"/>
-              </a:rPr>
-              <a:t> Every decision quotes the article, verbatim from the law text.</a:t>
-            </a:r>
-          </a:p>
-          <a:p>
-            <a:pPr>
-              <a:spcAft>
-                <a:spcPts val="1000"/>
-              </a:spcAft>
-            </a:pPr>
-            <a:r>
-              <a:rPr sz="1700" b="1">
-                <a:solidFill>
-                  <a:srgbClr val="1F2A37"/>
-                </a:solidFill>
-                <a:latin typeface="Inter"/>
-              </a:rPr>
-              <a:t>•  Numbers from code, not from the AI.</a:t>
-            </a:r>
-            <a:r>
-              <a:rPr sz="1700">
-                <a:solidFill>
-                  <a:srgbClr val="5B6472"/>
-                </a:solidFill>
-                <a:latin typeface="Inter"/>
-              </a:rPr>
-              <a:t> Same answer on every run; 10/10 consistent across 3 runs.</a:t>
-            </a:r>
-          </a:p>
-          <a:p>
-            <a:pPr>
-              <a:spcAft>
-                <a:spcPts val="1000"/>
-              </a:spcAft>
-            </a:pPr>
-            <a:r>
-              <a:rPr sz="1700" b="1">
-                <a:solidFill>
-                  <a:srgbClr val="1F2A37"/>
-                </a:solidFill>
-                <a:latin typeface="Inter"/>
-              </a:rPr>
-              <a:t>•  Privacy enforced in the query.</a:t>
-            </a:r>
-            <a:r>
-              <a:rPr sz="1700">
-                <a:solidFill>
-                  <a:srgbClr val="5B6472"/>
-                </a:solidFill>
-                <a:latin typeface="Inter"/>
-              </a:rPr>
-              <a:t> &lt;10, suppressed, opt-outs out — no answer can bypass it.</a:t>
-            </a:r>
-          </a:p>
-          <a:p>
-            <a:pPr>
-              <a:spcAft>
-                <a:spcPts val="1000"/>
-              </a:spcAft>
-            </a:pPr>
-            <a:r>
-              <a:rPr sz="1700" b="1">
-                <a:solidFill>
-                  <a:srgbClr val="1F2A37"/>
-                </a:solidFill>
-                <a:latin typeface="Inter"/>
-              </a:rPr>
-              <a:t>•  Any EU language, one rulebook.</a:t>
-            </a:r>
-            <a:r>
-              <a:rPr sz="1700">
-                <a:solidFill>
-                  <a:srgbClr val="5B6472"/>
-                </a:solidFill>
-                <a:latin typeface="Inter"/>
-              </a:rPr>
-              <a:t> German, Swedish, Greek → English once, then the same checks.</a:t>
-            </a:r>
-          </a:p>
-          <a:p>
-            <a:pPr>
-              <a:spcAft>
-                <a:spcPts val="1000"/>
-              </a:spcAft>
-            </a:pPr>
-            <a:r>
-              <a:rPr sz="1700" b="1">
-                <a:solidFill>
-                  <a:srgbClr val="1F2A37"/>
-                </a:solidFill>
-                <a:latin typeface="Inter"/>
-              </a:rPr>
-              <a:t>•  Audit and abuse control.</a:t>
-            </a:r>
-            <a:r>
-              <a:rPr sz="1700">
-                <a:solidFill>
-                  <a:srgbClr val="5B6472"/>
-                </a:solidFill>
-                <a:latin typeface="Inter"/>
-              </a:rPr>
-              <a:t> Every SPE action logged; flooding addresses blocked (429).</a:t>
-            </a:r>
-          </a:p>
-        </p:txBody>
-      </p:sp>
       <p:pic>
         <p:nvPicPr>
-          <p:cNvPr id="7" name="Picture 6" descr="ui-reject.png"/>
+          <p:cNvPr id="6" name="Picture 5" descr="how-it-works.png"/>
           <p:cNvPicPr>
             <a:picLocks noChangeAspect="1"/>
           </p:cNvPicPr>
@@ -5364,8 +5781,8 @@
         </p:blipFill>
         <p:spPr>
           <a:xfrm>
-            <a:off x="6583680" y="1505402"/>
-            <a:ext cx="5212080" cy="4487275"/>
+            <a:off x="365760" y="1218111"/>
+            <a:ext cx="11430000" cy="5061857"/>
           </a:xfrm>
           <a:prstGeom prst="rect">
             <a:avLst/>
@@ -5374,7 +5791,7 @@
       </p:pic>
       <p:sp>
         <p:nvSpPr>
-          <p:cNvPr id="8" name="TextBox 7"/>
+          <p:cNvPr id="7" name="TextBox 6"/>
           <p:cNvSpPr txBox="1"/>
           <p:nvPr/>
         </p:nvSpPr>
@@ -5434,7 +5851,7 @@
         <p:spPr>
           <a:xfrm>
             <a:off x="0" y="0"/>
-            <a:ext cx="12191695" cy="6858000"/>
+            <a:ext cx="12191695" cy="1051560"/>
           </a:xfrm>
           <a:prstGeom prst="rect">
             <a:avLst/>
@@ -5477,8 +5894,8 @@
         </p:nvSpPr>
         <p:spPr>
           <a:xfrm>
-            <a:off x="822960" y="1097280"/>
-            <a:ext cx="10515600" cy="914400"/>
+            <a:off x="548640" y="182880"/>
+            <a:ext cx="8412480" cy="548640"/>
           </a:xfrm>
           <a:prstGeom prst="rect">
             <a:avLst/>
@@ -5493,35 +5910,353 @@
           <a:p>
             <a:pPr algn="l"/>
             <a:r>
-              <a:rPr sz="4400" b="1">
+              <a:rPr sz="2600" b="1">
                 <a:solidFill>
                   <a:srgbClr val="FFFFFF"/>
                 </a:solidFill>
                 <a:latin typeface="Inter"/>
               </a:rPr>
-              <a:t>Demo</a:t>
-            </a:r>
-          </a:p>
-        </p:txBody>
-      </p:sp>
-      <p:sp>
-        <p:nvSpPr>
-          <p:cNvPr id="4" name="Rounded Rectangle 3"/>
+              <a:t>Why this is better than a black box</a:t>
+            </a:r>
+          </a:p>
+        </p:txBody>
+      </p:sp>
+      <p:sp>
+        <p:nvSpPr>
+          <p:cNvPr id="4" name="TextBox 3"/>
+          <p:cNvSpPr txBox="1"/>
+          <p:nvPr/>
+        </p:nvSpPr>
+        <p:spPr>
+          <a:xfrm>
+            <a:off x="548640" y="658368"/>
+            <a:ext cx="8412480" cy="365760"/>
+          </a:xfrm>
+          <a:prstGeom prst="rect">
+            <a:avLst/>
+          </a:prstGeom>
+          <a:noFill/>
+        </p:spPr>
+        <p:txBody>
+          <a:bodyPr wrap="square" anchor="t" lIns="45720" rIns="45720">
+            <a:spAutoFit/>
+          </a:bodyPr>
+          <a:lstStyle/>
+          <a:p>
+            <a:pPr algn="l"/>
+            <a:r>
+              <a:rPr sz="1300" b="0">
+                <a:solidFill>
+                  <a:srgbClr val="DBE6F3"/>
+                </a:solidFill>
+                <a:latin typeface="Inter"/>
+              </a:rPr>
+              <a:t>grounded, fast, consistent, safe</a:t>
+            </a:r>
+          </a:p>
+        </p:txBody>
+      </p:sp>
+      <p:sp>
+        <p:nvSpPr>
+          <p:cNvPr id="5" name="TextBox 4"/>
+          <p:cNvSpPr txBox="1"/>
+          <p:nvPr/>
+        </p:nvSpPr>
+        <p:spPr>
+          <a:xfrm>
+            <a:off x="8503920" y="320040"/>
+            <a:ext cx="3200400" cy="457200"/>
+          </a:xfrm>
+          <a:prstGeom prst="rect">
+            <a:avLst/>
+          </a:prstGeom>
+          <a:noFill/>
+        </p:spPr>
+        <p:txBody>
+          <a:bodyPr wrap="square" anchor="t" lIns="45720" rIns="45720">
+            <a:spAutoFit/>
+          </a:bodyPr>
+          <a:lstStyle/>
+          <a:p>
+            <a:pPr algn="r"/>
+            <a:r>
+              <a:rPr sz="1200" b="0">
+                <a:solidFill>
+                  <a:srgbClr val="DBE6F3"/>
+                </a:solidFill>
+                <a:latin typeface="Inter"/>
+              </a:rPr>
+              <a:t>HalfSecuredTeam · Track 3</a:t>
+            </a:r>
+          </a:p>
+        </p:txBody>
+      </p:sp>
+      <p:sp>
+        <p:nvSpPr>
+          <p:cNvPr id="6" name="TextBox 5"/>
+          <p:cNvSpPr txBox="1"/>
+          <p:nvPr/>
+        </p:nvSpPr>
+        <p:spPr>
+          <a:xfrm>
+            <a:off x="548640" y="1371600"/>
+            <a:ext cx="5760720" cy="4572000"/>
+          </a:xfrm>
+          <a:prstGeom prst="rect">
+            <a:avLst/>
+          </a:prstGeom>
+          <a:noFill/>
+        </p:spPr>
+        <p:txBody>
+          <a:bodyPr wrap="square">
+            <a:spAutoFit/>
+          </a:bodyPr>
+          <a:lstStyle/>
+          <a:p>
+            <a:pPr>
+              <a:spcAft>
+                <a:spcPts val="1000"/>
+              </a:spcAft>
+            </a:pPr>
+            <a:r>
+              <a:rPr sz="1700" b="1">
+                <a:solidFill>
+                  <a:srgbClr val="1F2A37"/>
+                </a:solidFill>
+                <a:latin typeface="Inter"/>
+              </a:rPr>
+              <a:t>•  No technical burden.</a:t>
+            </a:r>
+            <a:r>
+              <a:rPr sz="1700">
+                <a:solidFill>
+                  <a:srgbClr val="5B6472"/>
+                </a:solidFill>
+                <a:latin typeface="Inter"/>
+              </a:rPr>
+              <a:t> Plain words in; the AI drafts the definitions the access body can compute.</a:t>
+            </a:r>
+          </a:p>
+          <a:p>
+            <a:pPr>
+              <a:spcAft>
+                <a:spcPts val="1000"/>
+              </a:spcAft>
+            </a:pPr>
+            <a:r>
+              <a:rPr sz="1700" b="1">
+                <a:solidFill>
+                  <a:srgbClr val="1F2A37"/>
+                </a:solidFill>
+                <a:latin typeface="Inter"/>
+              </a:rPr>
+              <a:t>•  Explainable, not a verdict.</a:t>
+            </a:r>
+            <a:r>
+              <a:rPr sz="1700">
+                <a:solidFill>
+                  <a:srgbClr val="5B6472"/>
+                </a:solidFill>
+                <a:latin typeface="Inter"/>
+              </a:rPr>
+              <a:t> Every decision quotes the article, verbatim from the law text.</a:t>
+            </a:r>
+          </a:p>
+          <a:p>
+            <a:pPr>
+              <a:spcAft>
+                <a:spcPts val="1000"/>
+              </a:spcAft>
+            </a:pPr>
+            <a:r>
+              <a:rPr sz="1700" b="1">
+                <a:solidFill>
+                  <a:srgbClr val="1F2A37"/>
+                </a:solidFill>
+                <a:latin typeface="Inter"/>
+              </a:rPr>
+              <a:t>•  Numbers from code, not from the AI.</a:t>
+            </a:r>
+            <a:r>
+              <a:rPr sz="1700">
+                <a:solidFill>
+                  <a:srgbClr val="5B6472"/>
+                </a:solidFill>
+                <a:latin typeface="Inter"/>
+              </a:rPr>
+              <a:t> Same answer on every run; 10/10 consistent across 3 runs.</a:t>
+            </a:r>
+          </a:p>
+          <a:p>
+            <a:pPr>
+              <a:spcAft>
+                <a:spcPts val="1000"/>
+              </a:spcAft>
+            </a:pPr>
+            <a:r>
+              <a:rPr sz="1700" b="1">
+                <a:solidFill>
+                  <a:srgbClr val="1F2A37"/>
+                </a:solidFill>
+                <a:latin typeface="Inter"/>
+              </a:rPr>
+              <a:t>•  Privacy enforced in the query.</a:t>
+            </a:r>
+            <a:r>
+              <a:rPr sz="1700">
+                <a:solidFill>
+                  <a:srgbClr val="5B6472"/>
+                </a:solidFill>
+                <a:latin typeface="Inter"/>
+              </a:rPr>
+              <a:t> &lt;10, suppressed, opt-outs out — no answer can bypass it.</a:t>
+            </a:r>
+          </a:p>
+          <a:p>
+            <a:pPr>
+              <a:spcAft>
+                <a:spcPts val="1000"/>
+              </a:spcAft>
+            </a:pPr>
+            <a:r>
+              <a:rPr sz="1700" b="1">
+                <a:solidFill>
+                  <a:srgbClr val="1F2A37"/>
+                </a:solidFill>
+                <a:latin typeface="Inter"/>
+              </a:rPr>
+              <a:t>•  Any EU language, one rulebook.</a:t>
+            </a:r>
+            <a:r>
+              <a:rPr sz="1700">
+                <a:solidFill>
+                  <a:srgbClr val="5B6472"/>
+                </a:solidFill>
+                <a:latin typeface="Inter"/>
+              </a:rPr>
+              <a:t> German, Swedish, Greek → English once, then the same checks.</a:t>
+            </a:r>
+          </a:p>
+          <a:p>
+            <a:pPr>
+              <a:spcAft>
+                <a:spcPts val="1000"/>
+              </a:spcAft>
+            </a:pPr>
+            <a:r>
+              <a:rPr sz="1700" b="1">
+                <a:solidFill>
+                  <a:srgbClr val="1F2A37"/>
+                </a:solidFill>
+                <a:latin typeface="Inter"/>
+              </a:rPr>
+              <a:t>•  Audit and abuse control.</a:t>
+            </a:r>
+            <a:r>
+              <a:rPr sz="1700">
+                <a:solidFill>
+                  <a:srgbClr val="5B6472"/>
+                </a:solidFill>
+                <a:latin typeface="Inter"/>
+              </a:rPr>
+              <a:t> Every SPE action logged; flooding addresses blocked (429).</a:t>
+            </a:r>
+          </a:p>
+        </p:txBody>
+      </p:sp>
+      <p:pic>
+        <p:nvPicPr>
+          <p:cNvPr id="7" name="Picture 6" descr="ui-reject.png"/>
+          <p:cNvPicPr>
+            <a:picLocks noChangeAspect="1"/>
+          </p:cNvPicPr>
+          <p:nvPr/>
+        </p:nvPicPr>
+        <p:blipFill>
+          <a:blip r:embed="rId2"/>
+          <a:stretch>
+            <a:fillRect/>
+          </a:stretch>
+        </p:blipFill>
+        <p:spPr>
+          <a:xfrm>
+            <a:off x="6583680" y="1505402"/>
+            <a:ext cx="5212080" cy="4487275"/>
+          </a:xfrm>
+          <a:prstGeom prst="rect">
+            <a:avLst/>
+          </a:prstGeom>
+        </p:spPr>
+      </p:pic>
+      <p:sp>
+        <p:nvSpPr>
+          <p:cNvPr id="8" name="TextBox 7"/>
+          <p:cNvSpPr txBox="1"/>
+          <p:nvPr/>
+        </p:nvSpPr>
+        <p:spPr>
+          <a:xfrm>
+            <a:off x="548640" y="6446520"/>
+            <a:ext cx="10972800" cy="274320"/>
+          </a:xfrm>
+          <a:prstGeom prst="rect">
+            <a:avLst/>
+          </a:prstGeom>
+          <a:noFill/>
+        </p:spPr>
+        <p:txBody>
+          <a:bodyPr wrap="square" anchor="t" lIns="45720" rIns="45720">
+            <a:spAutoFit/>
+          </a:bodyPr>
+          <a:lstStyle/>
+          <a:p>
+            <a:pPr algn="l"/>
+            <a:r>
+              <a:rPr sz="1000" b="0">
+                <a:solidFill>
+                  <a:srgbClr val="5B6472"/>
+                </a:solidFill>
+                <a:latin typeface="Inter"/>
+              </a:rPr>
+              <a:t>EHDS · Regulation (EU) 2025/327 · synthetic data only</a:t>
+            </a:r>
+          </a:p>
+        </p:txBody>
+      </p:sp>
+    </p:spTree>
+  </p:cSld>
+  <p:clrMapOvr>
+    <a:masterClrMapping/>
+  </p:clrMapOvr>
+</p:sld>
+</file>
+
+<file path=ppt/slides/slide6.xml><?xml version="1.0" encoding="utf-8"?>
+<p:sld xmlns:a="http://schemas.openxmlformats.org/drawingml/2006/main" xmlns:p="http://schemas.openxmlformats.org/presentationml/2006/main" xmlns:r="http://schemas.openxmlformats.org/officeDocument/2006/relationships">
+  <p:cSld>
+    <p:spTree>
+      <p:nvGrpSpPr>
+        <p:cNvPr id="1" name=""/>
+        <p:cNvGrpSpPr/>
+        <p:nvPr/>
+      </p:nvGrpSpPr>
+      <p:grpSpPr/>
+      <p:sp>
+        <p:nvSpPr>
+          <p:cNvPr id="2" name="Rectangle 1"/>
           <p:cNvSpPr/>
           <p:nvPr/>
         </p:nvSpPr>
         <p:spPr>
           <a:xfrm>
-            <a:off x="822960" y="2377440"/>
-            <a:ext cx="2103120" cy="2926080"/>
-          </a:xfrm>
-          <a:prstGeom prst="roundRect">
-            <a:avLst>
-              <a:gd name="adj" fmla="val 8000"/>
-            </a:avLst>
+            <a:off x="0" y="0"/>
+            <a:ext cx="12191695" cy="6858000"/>
+          </a:xfrm>
+          <a:prstGeom prst="rect">
+            <a:avLst/>
           </a:prstGeom>
           <a:solidFill>
-            <a:srgbClr val="FFFFFF"/>
+            <a:srgbClr val="1F3A5F"/>
           </a:solidFill>
           <a:ln>
             <a:noFill/>
@@ -5552,14 +6287,49 @@
       </p:sp>
       <p:sp>
         <p:nvSpPr>
-          <p:cNvPr id="5" name="Rounded Rectangle 4"/>
+          <p:cNvPr id="3" name="TextBox 2"/>
+          <p:cNvSpPr txBox="1"/>
+          <p:nvPr/>
+        </p:nvSpPr>
+        <p:spPr>
+          <a:xfrm>
+            <a:off x="822960" y="1097280"/>
+            <a:ext cx="10515600" cy="914400"/>
+          </a:xfrm>
+          <a:prstGeom prst="rect">
+            <a:avLst/>
+          </a:prstGeom>
+          <a:noFill/>
+        </p:spPr>
+        <p:txBody>
+          <a:bodyPr wrap="square" anchor="t" lIns="45720" rIns="45720">
+            <a:spAutoFit/>
+          </a:bodyPr>
+          <a:lstStyle/>
+          <a:p>
+            <a:pPr algn="l"/>
+            <a:r>
+              <a:rPr sz="4400" b="1">
+                <a:solidFill>
+                  <a:srgbClr val="FFFFFF"/>
+                </a:solidFill>
+                <a:latin typeface="Inter"/>
+              </a:rPr>
+              <a:t>Demo</a:t>
+            </a:r>
+          </a:p>
+        </p:txBody>
+      </p:sp>
+      <p:sp>
+        <p:nvSpPr>
+          <p:cNvPr id="4" name="Rounded Rectangle 3"/>
           <p:cNvSpPr/>
           <p:nvPr/>
         </p:nvSpPr>
         <p:spPr>
           <a:xfrm>
             <a:off x="822960" y="2377440"/>
-            <a:ext cx="2103120" cy="640080"/>
+            <a:ext cx="2103120" cy="2926080"/>
           </a:xfrm>
           <a:prstGeom prst="roundRect">
             <a:avLst>
@@ -5567,7 +6337,7 @@
             </a:avLst>
           </a:prstGeom>
           <a:solidFill>
-            <a:srgbClr val="C62828"/>
+            <a:srgbClr val="FFFFFF"/>
           </a:solidFill>
           <a:ln>
             <a:noFill/>
@@ -5598,119 +6368,14 @@
       </p:sp>
       <p:sp>
         <p:nvSpPr>
-          <p:cNvPr id="6" name="TextBox 5"/>
-          <p:cNvSpPr txBox="1"/>
+          <p:cNvPr id="5" name="Rounded Rectangle 4"/>
+          <p:cNvSpPr/>
           <p:nvPr/>
         </p:nvSpPr>
         <p:spPr>
           <a:xfrm>
             <a:off x="822960" y="2377440"/>
             <a:ext cx="2103120" cy="640080"/>
-          </a:xfrm>
-          <a:prstGeom prst="rect">
-            <a:avLst/>
-          </a:prstGeom>
-          <a:noFill/>
-        </p:spPr>
-        <p:txBody>
-          <a:bodyPr wrap="square" anchor="ctr" lIns="45720" rIns="45720">
-            <a:spAutoFit/>
-          </a:bodyPr>
-          <a:lstStyle/>
-          <a:p>
-            <a:pPr algn="ctr"/>
-            <a:r>
-              <a:rPr sz="2000" b="1">
-                <a:solidFill>
-                  <a:srgbClr val="FFFFFF"/>
-                </a:solidFill>
-                <a:latin typeface="Inter"/>
-              </a:rPr>
-              <a:t>R02</a:t>
-            </a:r>
-          </a:p>
-        </p:txBody>
-      </p:sp>
-      <p:sp>
-        <p:nvSpPr>
-          <p:cNvPr id="7" name="TextBox 6"/>
-          <p:cNvSpPr txBox="1"/>
-          <p:nvPr/>
-        </p:nvSpPr>
-        <p:spPr>
-          <a:xfrm>
-            <a:off x="960120" y="3154680"/>
-            <a:ext cx="1828800" cy="1097280"/>
-          </a:xfrm>
-          <a:prstGeom prst="rect">
-            <a:avLst/>
-          </a:prstGeom>
-          <a:noFill/>
-        </p:spPr>
-        <p:txBody>
-          <a:bodyPr wrap="square" anchor="t" lIns="45720" rIns="45720">
-            <a:spAutoFit/>
-          </a:bodyPr>
-          <a:lstStyle/>
-          <a:p>
-            <a:pPr algn="ctr"/>
-            <a:r>
-              <a:rPr sz="1500" b="0">
-                <a:solidFill>
-                  <a:srgbClr val="1F2A37"/>
-                </a:solidFill>
-                <a:latin typeface="Inter"/>
-              </a:rPr>
-              <a:t>Insurer wants to price premiums</a:t>
-            </a:r>
-          </a:p>
-        </p:txBody>
-      </p:sp>
-      <p:sp>
-        <p:nvSpPr>
-          <p:cNvPr id="8" name="TextBox 7"/>
-          <p:cNvSpPr txBox="1"/>
-          <p:nvPr/>
-        </p:nvSpPr>
-        <p:spPr>
-          <a:xfrm>
-            <a:off x="960120" y="4206240"/>
-            <a:ext cx="1828800" cy="1005840"/>
-          </a:xfrm>
-          <a:prstGeom prst="rect">
-            <a:avLst/>
-          </a:prstGeom>
-          <a:noFill/>
-        </p:spPr>
-        <p:txBody>
-          <a:bodyPr wrap="square" anchor="t" lIns="45720" rIns="45720">
-            <a:spAutoFit/>
-          </a:bodyPr>
-          <a:lstStyle/>
-          <a:p>
-            <a:pPr algn="ctr"/>
-            <a:r>
-              <a:rPr sz="1500" b="1">
-                <a:solidFill>
-                  <a:srgbClr val="C62828"/>
-                </a:solidFill>
-                <a:latin typeface="Inter"/>
-              </a:rPr>
-              <a:t>Rejected — Art. 54(b) quoted</a:t>
-            </a:r>
-          </a:p>
-        </p:txBody>
-      </p:sp>
-      <p:sp>
-        <p:nvSpPr>
-          <p:cNvPr id="9" name="Rounded Rectangle 8"/>
-          <p:cNvSpPr/>
-          <p:nvPr/>
-        </p:nvSpPr>
-        <p:spPr>
-          <a:xfrm>
-            <a:off x="3063240" y="2377440"/>
-            <a:ext cx="2103120" cy="2926080"/>
           </a:xfrm>
           <a:prstGeom prst="roundRect">
             <a:avLst>
@@ -5718,7 +6383,7 @@
             </a:avLst>
           </a:prstGeom>
           <a:solidFill>
-            <a:srgbClr val="FFFFFF"/>
+            <a:srgbClr val="C62828"/>
           </a:solidFill>
           <a:ln>
             <a:noFill/>
@@ -5749,14 +6414,119 @@
       </p:sp>
       <p:sp>
         <p:nvSpPr>
-          <p:cNvPr id="10" name="Rounded Rectangle 9"/>
+          <p:cNvPr id="6" name="TextBox 5"/>
+          <p:cNvSpPr txBox="1"/>
+          <p:nvPr/>
+        </p:nvSpPr>
+        <p:spPr>
+          <a:xfrm>
+            <a:off x="822960" y="2377440"/>
+            <a:ext cx="2103120" cy="640080"/>
+          </a:xfrm>
+          <a:prstGeom prst="rect">
+            <a:avLst/>
+          </a:prstGeom>
+          <a:noFill/>
+        </p:spPr>
+        <p:txBody>
+          <a:bodyPr wrap="square" anchor="ctr" lIns="45720" rIns="45720">
+            <a:spAutoFit/>
+          </a:bodyPr>
+          <a:lstStyle/>
+          <a:p>
+            <a:pPr algn="ctr"/>
+            <a:r>
+              <a:rPr sz="2000" b="1">
+                <a:solidFill>
+                  <a:srgbClr val="FFFFFF"/>
+                </a:solidFill>
+                <a:latin typeface="Inter"/>
+              </a:rPr>
+              <a:t>R02</a:t>
+            </a:r>
+          </a:p>
+        </p:txBody>
+      </p:sp>
+      <p:sp>
+        <p:nvSpPr>
+          <p:cNvPr id="7" name="TextBox 6"/>
+          <p:cNvSpPr txBox="1"/>
+          <p:nvPr/>
+        </p:nvSpPr>
+        <p:spPr>
+          <a:xfrm>
+            <a:off x="960120" y="3154680"/>
+            <a:ext cx="1828800" cy="1097280"/>
+          </a:xfrm>
+          <a:prstGeom prst="rect">
+            <a:avLst/>
+          </a:prstGeom>
+          <a:noFill/>
+        </p:spPr>
+        <p:txBody>
+          <a:bodyPr wrap="square" anchor="t" lIns="45720" rIns="45720">
+            <a:spAutoFit/>
+          </a:bodyPr>
+          <a:lstStyle/>
+          <a:p>
+            <a:pPr algn="ctr"/>
+            <a:r>
+              <a:rPr sz="1500" b="0">
+                <a:solidFill>
+                  <a:srgbClr val="1F2A37"/>
+                </a:solidFill>
+                <a:latin typeface="Inter"/>
+              </a:rPr>
+              <a:t>Insurer wants to price premiums</a:t>
+            </a:r>
+          </a:p>
+        </p:txBody>
+      </p:sp>
+      <p:sp>
+        <p:nvSpPr>
+          <p:cNvPr id="8" name="TextBox 7"/>
+          <p:cNvSpPr txBox="1"/>
+          <p:nvPr/>
+        </p:nvSpPr>
+        <p:spPr>
+          <a:xfrm>
+            <a:off x="960120" y="4206240"/>
+            <a:ext cx="1828800" cy="1005840"/>
+          </a:xfrm>
+          <a:prstGeom prst="rect">
+            <a:avLst/>
+          </a:prstGeom>
+          <a:noFill/>
+        </p:spPr>
+        <p:txBody>
+          <a:bodyPr wrap="square" anchor="t" lIns="45720" rIns="45720">
+            <a:spAutoFit/>
+          </a:bodyPr>
+          <a:lstStyle/>
+          <a:p>
+            <a:pPr algn="ctr"/>
+            <a:r>
+              <a:rPr sz="1500" b="1">
+                <a:solidFill>
+                  <a:srgbClr val="C62828"/>
+                </a:solidFill>
+                <a:latin typeface="Inter"/>
+              </a:rPr>
+              <a:t>Rejected — Art. 54(b) quoted</a:t>
+            </a:r>
+          </a:p>
+        </p:txBody>
+      </p:sp>
+      <p:sp>
+        <p:nvSpPr>
+          <p:cNvPr id="9" name="Rounded Rectangle 8"/>
           <p:cNvSpPr/>
           <p:nvPr/>
         </p:nvSpPr>
         <p:spPr>
           <a:xfrm>
             <a:off x="3063240" y="2377440"/>
-            <a:ext cx="2103120" cy="640080"/>
+            <a:ext cx="2103120" cy="2926080"/>
           </a:xfrm>
           <a:prstGeom prst="roundRect">
             <a:avLst>
@@ -5764,7 +6534,7 @@
             </a:avLst>
           </a:prstGeom>
           <a:solidFill>
-            <a:srgbClr val="2E7D32"/>
+            <a:srgbClr val="FFFFFF"/>
           </a:solidFill>
           <a:ln>
             <a:noFill/>
@@ -5795,119 +6565,14 @@
       </p:sp>
       <p:sp>
         <p:nvSpPr>
-          <p:cNvPr id="11" name="TextBox 10"/>
-          <p:cNvSpPr txBox="1"/>
+          <p:cNvPr id="10" name="Rounded Rectangle 9"/>
+          <p:cNvSpPr/>
           <p:nvPr/>
         </p:nvSpPr>
         <p:spPr>
           <a:xfrm>
             <a:off x="3063240" y="2377440"/>
             <a:ext cx="2103120" cy="640080"/>
-          </a:xfrm>
-          <a:prstGeom prst="rect">
-            <a:avLst/>
-          </a:prstGeom>
-          <a:noFill/>
-        </p:spPr>
-        <p:txBody>
-          <a:bodyPr wrap="square" anchor="ctr" lIns="45720" rIns="45720">
-            <a:spAutoFit/>
-          </a:bodyPr>
-          <a:lstStyle/>
-          <a:p>
-            <a:pPr algn="ctr"/>
-            <a:r>
-              <a:rPr sz="2000" b="1">
-                <a:solidFill>
-                  <a:srgbClr val="FFFFFF"/>
-                </a:solidFill>
-                <a:latin typeface="Inter"/>
-              </a:rPr>
-              <a:t>R01</a:t>
-            </a:r>
-          </a:p>
-        </p:txBody>
-      </p:sp>
-      <p:sp>
-        <p:nvSpPr>
-          <p:cNvPr id="12" name="TextBox 11"/>
-          <p:cNvSpPr txBox="1"/>
-          <p:nvPr/>
-        </p:nvSpPr>
-        <p:spPr>
-          <a:xfrm>
-            <a:off x="3200400" y="3154680"/>
-            <a:ext cx="1828800" cy="1097280"/>
-          </a:xfrm>
-          <a:prstGeom prst="rect">
-            <a:avLst/>
-          </a:prstGeom>
-          <a:noFill/>
-        </p:spPr>
-        <p:txBody>
-          <a:bodyPr wrap="square" anchor="t" lIns="45720" rIns="45720">
-            <a:spAutoFit/>
-          </a:bodyPr>
-          <a:lstStyle/>
-          <a:p>
-            <a:pPr algn="ctr"/>
-            <a:r>
-              <a:rPr sz="1500" b="0">
-                <a:solidFill>
-                  <a:srgbClr val="1F2A37"/>
-                </a:solidFill>
-                <a:latin typeface="Inter"/>
-              </a:rPr>
-              <a:t>Diabetes prevalence by region</a:t>
-            </a:r>
-          </a:p>
-        </p:txBody>
-      </p:sp>
-      <p:sp>
-        <p:nvSpPr>
-          <p:cNvPr id="13" name="TextBox 12"/>
-          <p:cNvSpPr txBox="1"/>
-          <p:nvPr/>
-        </p:nvSpPr>
-        <p:spPr>
-          <a:xfrm>
-            <a:off x="3200400" y="4206240"/>
-            <a:ext cx="1828800" cy="1005840"/>
-          </a:xfrm>
-          <a:prstGeom prst="rect">
-            <a:avLst/>
-          </a:prstGeom>
-          <a:noFill/>
-        </p:spPr>
-        <p:txBody>
-          <a:bodyPr wrap="square" anchor="t" lIns="45720" rIns="45720">
-            <a:spAutoFit/>
-          </a:bodyPr>
-          <a:lstStyle/>
-          <a:p>
-            <a:pPr algn="ctr"/>
-            <a:r>
-              <a:rPr sz="1500" b="1">
-                <a:solidFill>
-                  <a:srgbClr val="2E7D32"/>
-                </a:solidFill>
-                <a:latin typeface="Inter"/>
-              </a:rPr>
-              <a:t>Statistics, small cells hidden</a:t>
-            </a:r>
-          </a:p>
-        </p:txBody>
-      </p:sp>
-      <p:sp>
-        <p:nvSpPr>
-          <p:cNvPr id="14" name="Rounded Rectangle 13"/>
-          <p:cNvSpPr/>
-          <p:nvPr/>
-        </p:nvSpPr>
-        <p:spPr>
-          <a:xfrm>
-            <a:off x="5303520" y="2377440"/>
-            <a:ext cx="2103120" cy="2926080"/>
           </a:xfrm>
           <a:prstGeom prst="roundRect">
             <a:avLst>
@@ -5915,7 +6580,7 @@
             </a:avLst>
           </a:prstGeom>
           <a:solidFill>
-            <a:srgbClr val="FFFFFF"/>
+            <a:srgbClr val="2E7D32"/>
           </a:solidFill>
           <a:ln>
             <a:noFill/>
@@ -5946,14 +6611,119 @@
       </p:sp>
       <p:sp>
         <p:nvSpPr>
-          <p:cNvPr id="15" name="Rounded Rectangle 14"/>
+          <p:cNvPr id="11" name="TextBox 10"/>
+          <p:cNvSpPr txBox="1"/>
+          <p:nvPr/>
+        </p:nvSpPr>
+        <p:spPr>
+          <a:xfrm>
+            <a:off x="3063240" y="2377440"/>
+            <a:ext cx="2103120" cy="640080"/>
+          </a:xfrm>
+          <a:prstGeom prst="rect">
+            <a:avLst/>
+          </a:prstGeom>
+          <a:noFill/>
+        </p:spPr>
+        <p:txBody>
+          <a:bodyPr wrap="square" anchor="ctr" lIns="45720" rIns="45720">
+            <a:spAutoFit/>
+          </a:bodyPr>
+          <a:lstStyle/>
+          <a:p>
+            <a:pPr algn="ctr"/>
+            <a:r>
+              <a:rPr sz="2000" b="1">
+                <a:solidFill>
+                  <a:srgbClr val="FFFFFF"/>
+                </a:solidFill>
+                <a:latin typeface="Inter"/>
+              </a:rPr>
+              <a:t>R01</a:t>
+            </a:r>
+          </a:p>
+        </p:txBody>
+      </p:sp>
+      <p:sp>
+        <p:nvSpPr>
+          <p:cNvPr id="12" name="TextBox 11"/>
+          <p:cNvSpPr txBox="1"/>
+          <p:nvPr/>
+        </p:nvSpPr>
+        <p:spPr>
+          <a:xfrm>
+            <a:off x="3200400" y="3154680"/>
+            <a:ext cx="1828800" cy="1097280"/>
+          </a:xfrm>
+          <a:prstGeom prst="rect">
+            <a:avLst/>
+          </a:prstGeom>
+          <a:noFill/>
+        </p:spPr>
+        <p:txBody>
+          <a:bodyPr wrap="square" anchor="t" lIns="45720" rIns="45720">
+            <a:spAutoFit/>
+          </a:bodyPr>
+          <a:lstStyle/>
+          <a:p>
+            <a:pPr algn="ctr"/>
+            <a:r>
+              <a:rPr sz="1500" b="0">
+                <a:solidFill>
+                  <a:srgbClr val="1F2A37"/>
+                </a:solidFill>
+                <a:latin typeface="Inter"/>
+              </a:rPr>
+              <a:t>Diabetes prevalence by region</a:t>
+            </a:r>
+          </a:p>
+        </p:txBody>
+      </p:sp>
+      <p:sp>
+        <p:nvSpPr>
+          <p:cNvPr id="13" name="TextBox 12"/>
+          <p:cNvSpPr txBox="1"/>
+          <p:nvPr/>
+        </p:nvSpPr>
+        <p:spPr>
+          <a:xfrm>
+            <a:off x="3200400" y="4206240"/>
+            <a:ext cx="1828800" cy="1005840"/>
+          </a:xfrm>
+          <a:prstGeom prst="rect">
+            <a:avLst/>
+          </a:prstGeom>
+          <a:noFill/>
+        </p:spPr>
+        <p:txBody>
+          <a:bodyPr wrap="square" anchor="t" lIns="45720" rIns="45720">
+            <a:spAutoFit/>
+          </a:bodyPr>
+          <a:lstStyle/>
+          <a:p>
+            <a:pPr algn="ctr"/>
+            <a:r>
+              <a:rPr sz="1500" b="1">
+                <a:solidFill>
+                  <a:srgbClr val="2E7D32"/>
+                </a:solidFill>
+                <a:latin typeface="Inter"/>
+              </a:rPr>
+              <a:t>Statistics, small cells hidden</a:t>
+            </a:r>
+          </a:p>
+        </p:txBody>
+      </p:sp>
+      <p:sp>
+        <p:nvSpPr>
+          <p:cNvPr id="14" name="Rounded Rectangle 13"/>
           <p:cNvSpPr/>
           <p:nvPr/>
         </p:nvSpPr>
         <p:spPr>
           <a:xfrm>
             <a:off x="5303520" y="2377440"/>
-            <a:ext cx="2103120" cy="640080"/>
+            <a:ext cx="2103120" cy="2926080"/>
           </a:xfrm>
           <a:prstGeom prst="roundRect">
             <a:avLst>
@@ -5961,7 +6731,7 @@
             </a:avLst>
           </a:prstGeom>
           <a:solidFill>
-            <a:srgbClr val="F0B429"/>
+            <a:srgbClr val="FFFFFF"/>
           </a:solidFill>
           <a:ln>
             <a:noFill/>
@@ -5992,119 +6762,14 @@
       </p:sp>
       <p:sp>
         <p:nvSpPr>
-          <p:cNvPr id="16" name="TextBox 15"/>
-          <p:cNvSpPr txBox="1"/>
+          <p:cNvPr id="15" name="Rounded Rectangle 14"/>
+          <p:cNvSpPr/>
           <p:nvPr/>
         </p:nvSpPr>
         <p:spPr>
           <a:xfrm>
             <a:off x="5303520" y="2377440"/>
             <a:ext cx="2103120" cy="640080"/>
-          </a:xfrm>
-          <a:prstGeom prst="rect">
-            <a:avLst/>
-          </a:prstGeom>
-          <a:noFill/>
-        </p:spPr>
-        <p:txBody>
-          <a:bodyPr wrap="square" anchor="ctr" lIns="45720" rIns="45720">
-            <a:spAutoFit/>
-          </a:bodyPr>
-          <a:lstStyle/>
-          <a:p>
-            <a:pPr algn="ctr"/>
-            <a:r>
-              <a:rPr sz="2000" b="1">
-                <a:solidFill>
-                  <a:srgbClr val="FFFFFF"/>
-                </a:solidFill>
-                <a:latin typeface="Inter"/>
-              </a:rPr>
-              <a:t>R11</a:t>
-            </a:r>
-          </a:p>
-        </p:txBody>
-      </p:sp>
-      <p:sp>
-        <p:nvSpPr>
-          <p:cNvPr id="17" name="TextBox 16"/>
-          <p:cNvSpPr txBox="1"/>
-          <p:nvPr/>
-        </p:nvSpPr>
-        <p:spPr>
-          <a:xfrm>
-            <a:off x="5440680" y="3154680"/>
-            <a:ext cx="1828800" cy="1097280"/>
-          </a:xfrm>
-          <a:prstGeom prst="rect">
-            <a:avLst/>
-          </a:prstGeom>
-          <a:noFill/>
-        </p:spPr>
-        <p:txBody>
-          <a:bodyPr wrap="square" anchor="t" lIns="45720" rIns="45720">
-            <a:spAutoFit/>
-          </a:bodyPr>
-          <a:lstStyle/>
-          <a:p>
-            <a:pPr algn="ctr"/>
-            <a:r>
-              <a:rPr sz="1500" b="0">
-                <a:solidFill>
-                  <a:srgbClr val="1F2A37"/>
-                </a:solidFill>
-                <a:latin typeface="Inter"/>
-              </a:rPr>
-              <a:t>Same, written in German</a:t>
-            </a:r>
-          </a:p>
-        </p:txBody>
-      </p:sp>
-      <p:sp>
-        <p:nvSpPr>
-          <p:cNvPr id="18" name="TextBox 17"/>
-          <p:cNvSpPr txBox="1"/>
-          <p:nvPr/>
-        </p:nvSpPr>
-        <p:spPr>
-          <a:xfrm>
-            <a:off x="5440680" y="4206240"/>
-            <a:ext cx="1828800" cy="1005840"/>
-          </a:xfrm>
-          <a:prstGeom prst="rect">
-            <a:avLst/>
-          </a:prstGeom>
-          <a:noFill/>
-        </p:spPr>
-        <p:txBody>
-          <a:bodyPr wrap="square" anchor="t" lIns="45720" rIns="45720">
-            <a:spAutoFit/>
-          </a:bodyPr>
-          <a:lstStyle/>
-          <a:p>
-            <a:pPr algn="ctr"/>
-            <a:r>
-              <a:rPr sz="1500" b="1">
-                <a:solidFill>
-                  <a:srgbClr val="F0B429"/>
-                </a:solidFill>
-                <a:latin typeface="Inter"/>
-              </a:rPr>
-              <a:t>Translated once, same rulebook</a:t>
-            </a:r>
-          </a:p>
-        </p:txBody>
-      </p:sp>
-      <p:sp>
-        <p:nvSpPr>
-          <p:cNvPr id="19" name="Rounded Rectangle 18"/>
-          <p:cNvSpPr/>
-          <p:nvPr/>
-        </p:nvSpPr>
-        <p:spPr>
-          <a:xfrm>
-            <a:off x="7543800" y="2377440"/>
-            <a:ext cx="2103120" cy="2926080"/>
           </a:xfrm>
           <a:prstGeom prst="roundRect">
             <a:avLst>
@@ -6112,7 +6777,7 @@
             </a:avLst>
           </a:prstGeom>
           <a:solidFill>
-            <a:srgbClr val="FFFFFF"/>
+            <a:srgbClr val="F0B429"/>
           </a:solidFill>
           <a:ln>
             <a:noFill/>
@@ -6143,14 +6808,119 @@
       </p:sp>
       <p:sp>
         <p:nvSpPr>
-          <p:cNvPr id="20" name="Rounded Rectangle 19"/>
+          <p:cNvPr id="16" name="TextBox 15"/>
+          <p:cNvSpPr txBox="1"/>
+          <p:nvPr/>
+        </p:nvSpPr>
+        <p:spPr>
+          <a:xfrm>
+            <a:off x="5303520" y="2377440"/>
+            <a:ext cx="2103120" cy="640080"/>
+          </a:xfrm>
+          <a:prstGeom prst="rect">
+            <a:avLst/>
+          </a:prstGeom>
+          <a:noFill/>
+        </p:spPr>
+        <p:txBody>
+          <a:bodyPr wrap="square" anchor="ctr" lIns="45720" rIns="45720">
+            <a:spAutoFit/>
+          </a:bodyPr>
+          <a:lstStyle/>
+          <a:p>
+            <a:pPr algn="ctr"/>
+            <a:r>
+              <a:rPr sz="2000" b="1">
+                <a:solidFill>
+                  <a:srgbClr val="FFFFFF"/>
+                </a:solidFill>
+                <a:latin typeface="Inter"/>
+              </a:rPr>
+              <a:t>R11</a:t>
+            </a:r>
+          </a:p>
+        </p:txBody>
+      </p:sp>
+      <p:sp>
+        <p:nvSpPr>
+          <p:cNvPr id="17" name="TextBox 16"/>
+          <p:cNvSpPr txBox="1"/>
+          <p:nvPr/>
+        </p:nvSpPr>
+        <p:spPr>
+          <a:xfrm>
+            <a:off x="5440680" y="3154680"/>
+            <a:ext cx="1828800" cy="1097280"/>
+          </a:xfrm>
+          <a:prstGeom prst="rect">
+            <a:avLst/>
+          </a:prstGeom>
+          <a:noFill/>
+        </p:spPr>
+        <p:txBody>
+          <a:bodyPr wrap="square" anchor="t" lIns="45720" rIns="45720">
+            <a:spAutoFit/>
+          </a:bodyPr>
+          <a:lstStyle/>
+          <a:p>
+            <a:pPr algn="ctr"/>
+            <a:r>
+              <a:rPr sz="1500" b="0">
+                <a:solidFill>
+                  <a:srgbClr val="1F2A37"/>
+                </a:solidFill>
+                <a:latin typeface="Inter"/>
+              </a:rPr>
+              <a:t>Same, written in German</a:t>
+            </a:r>
+          </a:p>
+        </p:txBody>
+      </p:sp>
+      <p:sp>
+        <p:nvSpPr>
+          <p:cNvPr id="18" name="TextBox 17"/>
+          <p:cNvSpPr txBox="1"/>
+          <p:nvPr/>
+        </p:nvSpPr>
+        <p:spPr>
+          <a:xfrm>
+            <a:off x="5440680" y="4206240"/>
+            <a:ext cx="1828800" cy="1005840"/>
+          </a:xfrm>
+          <a:prstGeom prst="rect">
+            <a:avLst/>
+          </a:prstGeom>
+          <a:noFill/>
+        </p:spPr>
+        <p:txBody>
+          <a:bodyPr wrap="square" anchor="t" lIns="45720" rIns="45720">
+            <a:spAutoFit/>
+          </a:bodyPr>
+          <a:lstStyle/>
+          <a:p>
+            <a:pPr algn="ctr"/>
+            <a:r>
+              <a:rPr sz="1500" b="1">
+                <a:solidFill>
+                  <a:srgbClr val="F0B429"/>
+                </a:solidFill>
+                <a:latin typeface="Inter"/>
+              </a:rPr>
+              <a:t>Translated once, same rulebook</a:t>
+            </a:r>
+          </a:p>
+        </p:txBody>
+      </p:sp>
+      <p:sp>
+        <p:nvSpPr>
+          <p:cNvPr id="19" name="Rounded Rectangle 18"/>
           <p:cNvSpPr/>
           <p:nvPr/>
         </p:nvSpPr>
         <p:spPr>
           <a:xfrm>
             <a:off x="7543800" y="2377440"/>
-            <a:ext cx="2103120" cy="640080"/>
+            <a:ext cx="2103120" cy="2926080"/>
           </a:xfrm>
           <a:prstGeom prst="roundRect">
             <a:avLst>
@@ -6158,7 +6928,7 @@
             </a:avLst>
           </a:prstGeom>
           <a:solidFill>
-            <a:srgbClr val="1565C0"/>
+            <a:srgbClr val="FFFFFF"/>
           </a:solidFill>
           <a:ln>
             <a:noFill/>
@@ -6189,119 +6959,14 @@
       </p:sp>
       <p:sp>
         <p:nvSpPr>
-          <p:cNvPr id="21" name="TextBox 20"/>
-          <p:cNvSpPr txBox="1"/>
+          <p:cNvPr id="20" name="Rounded Rectangle 19"/>
+          <p:cNvSpPr/>
           <p:nvPr/>
         </p:nvSpPr>
         <p:spPr>
           <a:xfrm>
             <a:off x="7543800" y="2377440"/>
             <a:ext cx="2103120" cy="640080"/>
-          </a:xfrm>
-          <a:prstGeom prst="rect">
-            <a:avLst/>
-          </a:prstGeom>
-          <a:noFill/>
-        </p:spPr>
-        <p:txBody>
-          <a:bodyPr wrap="square" anchor="ctr" lIns="45720" rIns="45720">
-            <a:spAutoFit/>
-          </a:bodyPr>
-          <a:lstStyle/>
-          <a:p>
-            <a:pPr algn="ctr"/>
-            <a:r>
-              <a:rPr sz="2000" b="1">
-                <a:solidFill>
-                  <a:srgbClr val="FFFFFF"/>
-                </a:solidFill>
-                <a:latin typeface="Inter"/>
-              </a:rPr>
-              <a:t>R12</a:t>
-            </a:r>
-          </a:p>
-        </p:txBody>
-      </p:sp>
-      <p:sp>
-        <p:nvSpPr>
-          <p:cNvPr id="22" name="TextBox 21"/>
-          <p:cNvSpPr txBox="1"/>
-          <p:nvPr/>
-        </p:nvSpPr>
-        <p:spPr>
-          <a:xfrm>
-            <a:off x="7680960" y="3154680"/>
-            <a:ext cx="1828800" cy="1097280"/>
-          </a:xfrm>
-          <a:prstGeom prst="rect">
-            <a:avLst/>
-          </a:prstGeom>
-          <a:noFill/>
-        </p:spPr>
-        <p:txBody>
-          <a:bodyPr wrap="square" anchor="t" lIns="45720" rIns="45720">
-            <a:spAutoFit/>
-          </a:bodyPr>
-          <a:lstStyle/>
-          <a:p>
-            <a:pPr algn="ctr"/>
-            <a:r>
-              <a:rPr sz="1500" b="0">
-                <a:solidFill>
-                  <a:srgbClr val="1F2A37"/>
-                </a:solidFill>
-                <a:latin typeface="Inter"/>
-              </a:rPr>
-              <a:t>Heart-failure records for a model</a:t>
-            </a:r>
-          </a:p>
-        </p:txBody>
-      </p:sp>
-      <p:sp>
-        <p:nvSpPr>
-          <p:cNvPr id="23" name="TextBox 22"/>
-          <p:cNvSpPr txBox="1"/>
-          <p:nvPr/>
-        </p:nvSpPr>
-        <p:spPr>
-          <a:xfrm>
-            <a:off x="7680960" y="4206240"/>
-            <a:ext cx="1828800" cy="1005840"/>
-          </a:xfrm>
-          <a:prstGeom prst="rect">
-            <a:avLst/>
-          </a:prstGeom>
-          <a:noFill/>
-        </p:spPr>
-        <p:txBody>
-          <a:bodyPr wrap="square" anchor="t" lIns="45720" rIns="45720">
-            <a:spAutoFit/>
-          </a:bodyPr>
-          <a:lstStyle/>
-          <a:p>
-            <a:pPr algn="ctr"/>
-            <a:r>
-              <a:rPr sz="1500" b="1">
-                <a:solidFill>
-                  <a:srgbClr val="1565C0"/>
-                </a:solidFill>
-                <a:latin typeface="Inter"/>
-              </a:rPr>
-              <a:t>Secure room, download → 403</a:t>
-            </a:r>
-          </a:p>
-        </p:txBody>
-      </p:sp>
-      <p:sp>
-        <p:nvSpPr>
-          <p:cNvPr id="24" name="Rounded Rectangle 23"/>
-          <p:cNvSpPr/>
-          <p:nvPr/>
-        </p:nvSpPr>
-        <p:spPr>
-          <a:xfrm>
-            <a:off x="9784080" y="2377440"/>
-            <a:ext cx="2103120" cy="2926080"/>
           </a:xfrm>
           <a:prstGeom prst="roundRect">
             <a:avLst>
@@ -6309,7 +6974,7 @@
             </a:avLst>
           </a:prstGeom>
           <a:solidFill>
-            <a:srgbClr val="FFFFFF"/>
+            <a:srgbClr val="1565C0"/>
           </a:solidFill>
           <a:ln>
             <a:noFill/>
@@ -6340,14 +7005,119 @@
       </p:sp>
       <p:sp>
         <p:nvSpPr>
-          <p:cNvPr id="25" name="Rounded Rectangle 24"/>
+          <p:cNvPr id="21" name="TextBox 20"/>
+          <p:cNvSpPr txBox="1"/>
+          <p:nvPr/>
+        </p:nvSpPr>
+        <p:spPr>
+          <a:xfrm>
+            <a:off x="7543800" y="2377440"/>
+            <a:ext cx="2103120" cy="640080"/>
+          </a:xfrm>
+          <a:prstGeom prst="rect">
+            <a:avLst/>
+          </a:prstGeom>
+          <a:noFill/>
+        </p:spPr>
+        <p:txBody>
+          <a:bodyPr wrap="square" anchor="ctr" lIns="45720" rIns="45720">
+            <a:spAutoFit/>
+          </a:bodyPr>
+          <a:lstStyle/>
+          <a:p>
+            <a:pPr algn="ctr"/>
+            <a:r>
+              <a:rPr sz="2000" b="1">
+                <a:solidFill>
+                  <a:srgbClr val="FFFFFF"/>
+                </a:solidFill>
+                <a:latin typeface="Inter"/>
+              </a:rPr>
+              <a:t>R12</a:t>
+            </a:r>
+          </a:p>
+        </p:txBody>
+      </p:sp>
+      <p:sp>
+        <p:nvSpPr>
+          <p:cNvPr id="22" name="TextBox 21"/>
+          <p:cNvSpPr txBox="1"/>
+          <p:nvPr/>
+        </p:nvSpPr>
+        <p:spPr>
+          <a:xfrm>
+            <a:off x="7680960" y="3154680"/>
+            <a:ext cx="1828800" cy="1097280"/>
+          </a:xfrm>
+          <a:prstGeom prst="rect">
+            <a:avLst/>
+          </a:prstGeom>
+          <a:noFill/>
+        </p:spPr>
+        <p:txBody>
+          <a:bodyPr wrap="square" anchor="t" lIns="45720" rIns="45720">
+            <a:spAutoFit/>
+          </a:bodyPr>
+          <a:lstStyle/>
+          <a:p>
+            <a:pPr algn="ctr"/>
+            <a:r>
+              <a:rPr sz="1500" b="0">
+                <a:solidFill>
+                  <a:srgbClr val="1F2A37"/>
+                </a:solidFill>
+                <a:latin typeface="Inter"/>
+              </a:rPr>
+              <a:t>Heart-failure records for a model</a:t>
+            </a:r>
+          </a:p>
+        </p:txBody>
+      </p:sp>
+      <p:sp>
+        <p:nvSpPr>
+          <p:cNvPr id="23" name="TextBox 22"/>
+          <p:cNvSpPr txBox="1"/>
+          <p:nvPr/>
+        </p:nvSpPr>
+        <p:spPr>
+          <a:xfrm>
+            <a:off x="7680960" y="4206240"/>
+            <a:ext cx="1828800" cy="1005840"/>
+          </a:xfrm>
+          <a:prstGeom prst="rect">
+            <a:avLst/>
+          </a:prstGeom>
+          <a:noFill/>
+        </p:spPr>
+        <p:txBody>
+          <a:bodyPr wrap="square" anchor="t" lIns="45720" rIns="45720">
+            <a:spAutoFit/>
+          </a:bodyPr>
+          <a:lstStyle/>
+          <a:p>
+            <a:pPr algn="ctr"/>
+            <a:r>
+              <a:rPr sz="1500" b="1">
+                <a:solidFill>
+                  <a:srgbClr val="1565C0"/>
+                </a:solidFill>
+                <a:latin typeface="Inter"/>
+              </a:rPr>
+              <a:t>Secure room, download → 403</a:t>
+            </a:r>
+          </a:p>
+        </p:txBody>
+      </p:sp>
+      <p:sp>
+        <p:nvSpPr>
+          <p:cNvPr id="24" name="Rounded Rectangle 23"/>
           <p:cNvSpPr/>
           <p:nvPr/>
         </p:nvSpPr>
         <p:spPr>
           <a:xfrm>
             <a:off x="9784080" y="2377440"/>
-            <a:ext cx="2103120" cy="640080"/>
+            <a:ext cx="2103120" cy="2926080"/>
           </a:xfrm>
           <a:prstGeom prst="roundRect">
             <a:avLst>
@@ -6355,7 +7125,7 @@
             </a:avLst>
           </a:prstGeom>
           <a:solidFill>
-            <a:srgbClr val="C62828"/>
+            <a:srgbClr val="FFFFFF"/>
           </a:solidFill>
           <a:ln>
             <a:noFill/>
@@ -6386,6 +7156,52 @@
       </p:sp>
       <p:sp>
         <p:nvSpPr>
+          <p:cNvPr id="25" name="Rounded Rectangle 24"/>
+          <p:cNvSpPr/>
+          <p:nvPr/>
+        </p:nvSpPr>
+        <p:spPr>
+          <a:xfrm>
+            <a:off x="9784080" y="2377440"/>
+            <a:ext cx="2103120" cy="640080"/>
+          </a:xfrm>
+          <a:prstGeom prst="roundRect">
+            <a:avLst>
+              <a:gd name="adj" fmla="val 8000"/>
+            </a:avLst>
+          </a:prstGeom>
+          <a:solidFill>
+            <a:srgbClr val="C62828"/>
+          </a:solidFill>
+          <a:ln>
+            <a:noFill/>
+          </a:ln>
+          <a:effectLst/>
+        </p:spPr>
+        <p:style>
+          <a:lnRef idx="1">
+            <a:schemeClr val="accent1"/>
+          </a:lnRef>
+          <a:fillRef idx="3">
+            <a:schemeClr val="accent1"/>
+          </a:fillRef>
+          <a:effectRef idx="2">
+            <a:schemeClr val="accent1"/>
+          </a:effectRef>
+          <a:fontRef idx="minor">
+            <a:schemeClr val="lt1"/>
+          </a:fontRef>
+        </p:style>
+        <p:txBody>
+          <a:bodyPr rtlCol="0" anchor="ctr"/>
+          <a:lstStyle/>
+          <a:p>
+            <a:pPr algn="ctr"/>
+          </a:p>
+        </p:txBody>
+      </p:sp>
+      <p:sp>
+        <p:nvSpPr>
           <p:cNvPr id="26" name="TextBox 25"/>
           <p:cNvSpPr txBox="1"/>
           <p:nvPr/>
@@ -6532,7 +7348,7 @@
 </p:sld>
 </file>
 
-<file path=ppt/slides/slide6.xml><?xml version="1.0" encoding="utf-8"?>
+<file path=ppt/slides/slide7.xml><?xml version="1.0" encoding="utf-8"?>
 <p:sld xmlns:a="http://schemas.openxmlformats.org/drawingml/2006/main" xmlns:p="http://schemas.openxmlformats.org/presentationml/2006/main" xmlns:r="http://schemas.openxmlformats.org/officeDocument/2006/relationships">
   <p:cSld>
     <p:spTree>

--- a/docs/slides/pitch.pptx
+++ b/docs/slides/pitch.pptx
@@ -648,7 +648,7 @@
           <a:lstStyle/>
           <a:p>
             <a:r>
-              <a:t>So what did we do about it? Researchers write the request in plain words, in any EU language, and if they cannot phrase the definitions, one click drafts them. Engineers are out of the loop: fixed rules turn the definitions into SQL, and an AI only steps in where the rules give up, under the same checks. And the access body gets a decision that quotes the article from the regulation, with the privacy rules enforced inside the query and records locked in a secure room. Seconds instead of weeks, and the same answer every time. (≈25 s)</a:t>
+              <a:t>Four ideas. The AI does not decide on its own: it picks the article from the regulation and has to quote it. Definitions become SQL through fixed rules, so no one writes a query per request and the numbers are the same every run. Privacy lives inside the query: small cells and opt-outs cannot leak. And records never leave the secure room: viewed as images, never downloaded. (≈20 s)</a:t>
             </a:r>
           </a:p>
         </p:txBody>
@@ -4945,7 +4945,7 @@
                 </a:solidFill>
                 <a:latin typeface="Inter"/>
               </a:rPr>
-              <a:t>What we did about it</a:t>
+              <a:t>Our approach</a:t>
             </a:r>
           </a:p>
         </p:txBody>
@@ -4980,7 +4980,7 @@
                 </a:solidFill>
                 <a:latin typeface="Inter"/>
               </a:rPr>
-              <a:t>the same three people, one app</a:t>
+              <a:t>four ideas</a:t>
             </a:r>
           </a:p>
         </p:txBody>
@@ -5028,8 +5028,336 @@
         </p:nvSpPr>
         <p:spPr>
           <a:xfrm>
-            <a:off x="548640" y="1371600"/>
-            <a:ext cx="3474720" cy="3566160"/>
+            <a:off x="548640" y="1417320"/>
+            <a:ext cx="5394960" cy="2103120"/>
+          </a:xfrm>
+          <a:prstGeom prst="roundRect">
+            <a:avLst>
+              <a:gd name="adj" fmla="val 8000"/>
+            </a:avLst>
+          </a:prstGeom>
+          <a:solidFill>
+            <a:srgbClr val="F6F7F9"/>
+          </a:solidFill>
+          <a:ln w="19050">
+            <a:solidFill>
+              <a:srgbClr val="F0B429"/>
+            </a:solidFill>
+          </a:ln>
+          <a:effectLst/>
+        </p:spPr>
+        <p:style>
+          <a:lnRef idx="1">
+            <a:schemeClr val="accent1"/>
+          </a:lnRef>
+          <a:fillRef idx="3">
+            <a:schemeClr val="accent1"/>
+          </a:fillRef>
+          <a:effectRef idx="2">
+            <a:schemeClr val="accent1"/>
+          </a:effectRef>
+          <a:fontRef idx="minor">
+            <a:schemeClr val="lt1"/>
+          </a:fontRef>
+        </p:style>
+        <p:txBody>
+          <a:bodyPr rtlCol="0" anchor="ctr"/>
+          <a:lstStyle/>
+          <a:p>
+            <a:pPr algn="ctr"/>
+          </a:p>
+        </p:txBody>
+      </p:sp>
+      <p:sp>
+        <p:nvSpPr>
+          <p:cNvPr id="7" name="Rounded Rectangle 6"/>
+          <p:cNvSpPr/>
+          <p:nvPr/>
+        </p:nvSpPr>
+        <p:spPr>
+          <a:xfrm>
+            <a:off x="548640" y="1417320"/>
+            <a:ext cx="164592" cy="2103120"/>
+          </a:xfrm>
+          <a:prstGeom prst="roundRect">
+            <a:avLst>
+              <a:gd name="adj" fmla="val 8000"/>
+            </a:avLst>
+          </a:prstGeom>
+          <a:solidFill>
+            <a:srgbClr val="F0B429"/>
+          </a:solidFill>
+          <a:ln>
+            <a:noFill/>
+          </a:ln>
+          <a:effectLst/>
+        </p:spPr>
+        <p:style>
+          <a:lnRef idx="1">
+            <a:schemeClr val="accent1"/>
+          </a:lnRef>
+          <a:fillRef idx="3">
+            <a:schemeClr val="accent1"/>
+          </a:fillRef>
+          <a:effectRef idx="2">
+            <a:schemeClr val="accent1"/>
+          </a:effectRef>
+          <a:fontRef idx="minor">
+            <a:schemeClr val="lt1"/>
+          </a:fontRef>
+        </p:style>
+        <p:txBody>
+          <a:bodyPr rtlCol="0" anchor="ctr"/>
+          <a:lstStyle/>
+          <a:p>
+            <a:pPr algn="ctr"/>
+          </a:p>
+        </p:txBody>
+      </p:sp>
+      <p:sp>
+        <p:nvSpPr>
+          <p:cNvPr id="8" name="TextBox 7"/>
+          <p:cNvSpPr txBox="1"/>
+          <p:nvPr/>
+        </p:nvSpPr>
+        <p:spPr>
+          <a:xfrm>
+            <a:off x="1005840" y="1828800"/>
+            <a:ext cx="4663440" cy="731520"/>
+          </a:xfrm>
+          <a:prstGeom prst="rect">
+            <a:avLst/>
+          </a:prstGeom>
+          <a:noFill/>
+        </p:spPr>
+        <p:txBody>
+          <a:bodyPr wrap="square" anchor="t" lIns="45720" rIns="45720">
+            <a:spAutoFit/>
+          </a:bodyPr>
+          <a:lstStyle/>
+          <a:p>
+            <a:pPr algn="l"/>
+            <a:r>
+              <a:rPr sz="2800" b="1">
+                <a:solidFill>
+                  <a:srgbClr val="F0B429"/>
+                </a:solidFill>
+                <a:latin typeface="Inter"/>
+              </a:rPr>
+              <a:t>Law-grounded AI</a:t>
+            </a:r>
+          </a:p>
+        </p:txBody>
+      </p:sp>
+      <p:sp>
+        <p:nvSpPr>
+          <p:cNvPr id="9" name="TextBox 8"/>
+          <p:cNvSpPr txBox="1"/>
+          <p:nvPr/>
+        </p:nvSpPr>
+        <p:spPr>
+          <a:xfrm>
+            <a:off x="1005840" y="2606040"/>
+            <a:ext cx="4663440" cy="548640"/>
+          </a:xfrm>
+          <a:prstGeom prst="rect">
+            <a:avLst/>
+          </a:prstGeom>
+          <a:noFill/>
+        </p:spPr>
+        <p:txBody>
+          <a:bodyPr wrap="square" anchor="t" lIns="45720" rIns="45720">
+            <a:spAutoFit/>
+          </a:bodyPr>
+          <a:lstStyle/>
+          <a:p>
+            <a:pPr algn="l"/>
+            <a:r>
+              <a:rPr sz="1700" b="0">
+                <a:solidFill>
+                  <a:srgbClr val="5B6472"/>
+                </a:solidFill>
+                <a:latin typeface="Inter"/>
+              </a:rPr>
+              <a:t>picks the article and quotes it</a:t>
+            </a:r>
+          </a:p>
+        </p:txBody>
+      </p:sp>
+      <p:sp>
+        <p:nvSpPr>
+          <p:cNvPr id="10" name="Rounded Rectangle 9"/>
+          <p:cNvSpPr/>
+          <p:nvPr/>
+        </p:nvSpPr>
+        <p:spPr>
+          <a:xfrm>
+            <a:off x="6263640" y="1417320"/>
+            <a:ext cx="5394960" cy="2103120"/>
+          </a:xfrm>
+          <a:prstGeom prst="roundRect">
+            <a:avLst>
+              <a:gd name="adj" fmla="val 8000"/>
+            </a:avLst>
+          </a:prstGeom>
+          <a:solidFill>
+            <a:srgbClr val="F6F7F9"/>
+          </a:solidFill>
+          <a:ln w="19050">
+            <a:solidFill>
+              <a:srgbClr val="2E7D32"/>
+            </a:solidFill>
+          </a:ln>
+          <a:effectLst/>
+        </p:spPr>
+        <p:style>
+          <a:lnRef idx="1">
+            <a:schemeClr val="accent1"/>
+          </a:lnRef>
+          <a:fillRef idx="3">
+            <a:schemeClr val="accent1"/>
+          </a:fillRef>
+          <a:effectRef idx="2">
+            <a:schemeClr val="accent1"/>
+          </a:effectRef>
+          <a:fontRef idx="minor">
+            <a:schemeClr val="lt1"/>
+          </a:fontRef>
+        </p:style>
+        <p:txBody>
+          <a:bodyPr rtlCol="0" anchor="ctr"/>
+          <a:lstStyle/>
+          <a:p>
+            <a:pPr algn="ctr"/>
+          </a:p>
+        </p:txBody>
+      </p:sp>
+      <p:sp>
+        <p:nvSpPr>
+          <p:cNvPr id="11" name="Rounded Rectangle 10"/>
+          <p:cNvSpPr/>
+          <p:nvPr/>
+        </p:nvSpPr>
+        <p:spPr>
+          <a:xfrm>
+            <a:off x="6263640" y="1417320"/>
+            <a:ext cx="164592" cy="2103120"/>
+          </a:xfrm>
+          <a:prstGeom prst="roundRect">
+            <a:avLst>
+              <a:gd name="adj" fmla="val 8000"/>
+            </a:avLst>
+          </a:prstGeom>
+          <a:solidFill>
+            <a:srgbClr val="2E7D32"/>
+          </a:solidFill>
+          <a:ln>
+            <a:noFill/>
+          </a:ln>
+          <a:effectLst/>
+        </p:spPr>
+        <p:style>
+          <a:lnRef idx="1">
+            <a:schemeClr val="accent1"/>
+          </a:lnRef>
+          <a:fillRef idx="3">
+            <a:schemeClr val="accent1"/>
+          </a:fillRef>
+          <a:effectRef idx="2">
+            <a:schemeClr val="accent1"/>
+          </a:effectRef>
+          <a:fontRef idx="minor">
+            <a:schemeClr val="lt1"/>
+          </a:fontRef>
+        </p:style>
+        <p:txBody>
+          <a:bodyPr rtlCol="0" anchor="ctr"/>
+          <a:lstStyle/>
+          <a:p>
+            <a:pPr algn="ctr"/>
+          </a:p>
+        </p:txBody>
+      </p:sp>
+      <p:sp>
+        <p:nvSpPr>
+          <p:cNvPr id="12" name="TextBox 11"/>
+          <p:cNvSpPr txBox="1"/>
+          <p:nvPr/>
+        </p:nvSpPr>
+        <p:spPr>
+          <a:xfrm>
+            <a:off x="6720840" y="1828800"/>
+            <a:ext cx="4663440" cy="731520"/>
+          </a:xfrm>
+          <a:prstGeom prst="rect">
+            <a:avLst/>
+          </a:prstGeom>
+          <a:noFill/>
+        </p:spPr>
+        <p:txBody>
+          <a:bodyPr wrap="square" anchor="t" lIns="45720" rIns="45720">
+            <a:spAutoFit/>
+          </a:bodyPr>
+          <a:lstStyle/>
+          <a:p>
+            <a:pPr algn="l"/>
+            <a:r>
+              <a:rPr sz="2800" b="1">
+                <a:solidFill>
+                  <a:srgbClr val="2E7D32"/>
+                </a:solidFill>
+                <a:latin typeface="Inter"/>
+              </a:rPr>
+              <a:t>Words → SQL by rules</a:t>
+            </a:r>
+          </a:p>
+        </p:txBody>
+      </p:sp>
+      <p:sp>
+        <p:nvSpPr>
+          <p:cNvPr id="13" name="TextBox 12"/>
+          <p:cNvSpPr txBox="1"/>
+          <p:nvPr/>
+        </p:nvSpPr>
+        <p:spPr>
+          <a:xfrm>
+            <a:off x="6720840" y="2606040"/>
+            <a:ext cx="4663440" cy="548640"/>
+          </a:xfrm>
+          <a:prstGeom prst="rect">
+            <a:avLst/>
+          </a:prstGeom>
+          <a:noFill/>
+        </p:spPr>
+        <p:txBody>
+          <a:bodyPr wrap="square" anchor="t" lIns="45720" rIns="45720">
+            <a:spAutoFit/>
+          </a:bodyPr>
+          <a:lstStyle/>
+          <a:p>
+            <a:pPr algn="l"/>
+            <a:r>
+              <a:rPr sz="1700" b="0">
+                <a:solidFill>
+                  <a:srgbClr val="5B6472"/>
+                </a:solidFill>
+                <a:latin typeface="Inter"/>
+              </a:rPr>
+              <a:t>no query written per request</a:t>
+            </a:r>
+          </a:p>
+        </p:txBody>
+      </p:sp>
+      <p:sp>
+        <p:nvSpPr>
+          <p:cNvPr id="14" name="Rounded Rectangle 13"/>
+          <p:cNvSpPr/>
+          <p:nvPr/>
+        </p:nvSpPr>
+        <p:spPr>
+          <a:xfrm>
+            <a:off x="548640" y="3794760"/>
+            <a:ext cx="5394960" cy="2103120"/>
           </a:xfrm>
           <a:prstGeom prst="roundRect">
             <a:avLst>
@@ -5070,120 +5398,14 @@
       </p:sp>
       <p:sp>
         <p:nvSpPr>
-          <p:cNvPr id="7" name="TextBox 6"/>
-          <p:cNvSpPr txBox="1"/>
-          <p:nvPr/>
-        </p:nvSpPr>
-        <p:spPr>
-          <a:xfrm>
-            <a:off x="777240" y="1554480"/>
-            <a:ext cx="3017520" cy="457200"/>
-          </a:xfrm>
-          <a:prstGeom prst="rect">
-            <a:avLst/>
-          </a:prstGeom>
-          <a:noFill/>
-        </p:spPr>
-        <p:txBody>
-          <a:bodyPr wrap="square" anchor="t" lIns="45720" rIns="45720">
-            <a:spAutoFit/>
-          </a:bodyPr>
-          <a:lstStyle/>
-          <a:p>
-            <a:pPr algn="l"/>
-            <a:r>
-              <a:rPr sz="2000" b="1">
-                <a:solidFill>
-                  <a:srgbClr val="1565C0"/>
-                </a:solidFill>
-                <a:latin typeface="Inter"/>
-              </a:rPr>
-              <a:t>Researchers</a:t>
-            </a:r>
-          </a:p>
-        </p:txBody>
-      </p:sp>
-      <p:sp>
-        <p:nvSpPr>
-          <p:cNvPr id="8" name="TextBox 7"/>
-          <p:cNvSpPr txBox="1"/>
-          <p:nvPr/>
-        </p:nvSpPr>
-        <p:spPr>
-          <a:xfrm>
-            <a:off x="777240" y="2103120"/>
-            <a:ext cx="3017520" cy="2651760"/>
-          </a:xfrm>
-          <a:prstGeom prst="rect">
-            <a:avLst/>
-          </a:prstGeom>
-          <a:noFill/>
-        </p:spPr>
-        <p:txBody>
-          <a:bodyPr wrap="square">
-            <a:spAutoFit/>
-          </a:bodyPr>
-          <a:lstStyle/>
-          <a:p>
-            <a:pPr>
-              <a:spcAft>
-                <a:spcPts val="800"/>
-              </a:spcAft>
-            </a:pPr>
-            <a:r>
-              <a:rPr sz="1500" b="1">
-                <a:solidFill>
-                  <a:srgbClr val="1F2A37"/>
-                </a:solidFill>
-                <a:latin typeface="Inter"/>
-              </a:rPr>
-              <a:t>•  write the request in plain words, in any EU language</a:t>
-            </a:r>
-          </a:p>
-          <a:p>
-            <a:pPr>
-              <a:spcAft>
-                <a:spcPts val="800"/>
-              </a:spcAft>
-            </a:pPr>
-            <a:r>
-              <a:rPr sz="1500" b="1">
-                <a:solidFill>
-                  <a:srgbClr val="1F2A37"/>
-                </a:solidFill>
-                <a:latin typeface="Inter"/>
-              </a:rPr>
-              <a:t>•  one click: the AI drafts the definitions they could not phrase</a:t>
-            </a:r>
-          </a:p>
-          <a:p>
-            <a:pPr>
-              <a:spcAft>
-                <a:spcPts val="800"/>
-              </a:spcAft>
-            </a:pPr>
-            <a:r>
-              <a:rPr sz="1500" b="1">
-                <a:solidFill>
-                  <a:srgbClr val="1F2A37"/>
-                </a:solidFill>
-                <a:latin typeface="Inter"/>
-              </a:rPr>
-              <a:t>•  the answer comes back in seconds, with the reason</a:t>
-            </a:r>
-          </a:p>
-        </p:txBody>
-      </p:sp>
-      <p:sp>
-        <p:nvSpPr>
-          <p:cNvPr id="9" name="Rounded Rectangle 8"/>
+          <p:cNvPr id="15" name="Rounded Rectangle 14"/>
           <p:cNvSpPr/>
           <p:nvPr/>
         </p:nvSpPr>
         <p:spPr>
           <a:xfrm>
-            <a:off x="4343400" y="1371600"/>
-            <a:ext cx="3474720" cy="3566160"/>
+            <a:off x="548640" y="3794760"/>
+            <a:ext cx="164592" cy="2103120"/>
           </a:xfrm>
           <a:prstGeom prst="roundRect">
             <a:avLst>
@@ -5191,12 +5413,10 @@
             </a:avLst>
           </a:prstGeom>
           <a:solidFill>
-            <a:srgbClr val="F6F7F9"/>
+            <a:srgbClr val="1565C0"/>
           </a:solidFill>
-          <a:ln w="19050">
-            <a:solidFill>
-              <a:srgbClr val="F0B429"/>
-            </a:solidFill>
+          <a:ln>
+            <a:noFill/>
           </a:ln>
           <a:effectLst/>
         </p:spPr>
@@ -5224,14 +5444,14 @@
       </p:sp>
       <p:sp>
         <p:nvSpPr>
-          <p:cNvPr id="10" name="TextBox 9"/>
+          <p:cNvPr id="16" name="TextBox 15"/>
           <p:cNvSpPr txBox="1"/>
           <p:nvPr/>
         </p:nvSpPr>
         <p:spPr>
           <a:xfrm>
-            <a:off x="4572000" y="1554480"/>
-            <a:ext cx="3017520" cy="457200"/>
+            <a:off x="1005840" y="4206240"/>
+            <a:ext cx="4663440" cy="731520"/>
           </a:xfrm>
           <a:prstGeom prst="rect">
             <a:avLst/>
@@ -5246,27 +5466,27 @@
           <a:p>
             <a:pPr algn="l"/>
             <a:r>
-              <a:rPr sz="2000" b="1">
-                <a:solidFill>
-                  <a:srgbClr val="F0B429"/>
-                </a:solidFill>
-                <a:latin typeface="Inter"/>
-              </a:rPr>
-              <a:t>Engineers</a:t>
-            </a:r>
-          </a:p>
-        </p:txBody>
-      </p:sp>
-      <p:sp>
-        <p:nvSpPr>
-          <p:cNvPr id="11" name="TextBox 10"/>
+              <a:rPr sz="2800" b="1">
+                <a:solidFill>
+                  <a:srgbClr val="1565C0"/>
+                </a:solidFill>
+                <a:latin typeface="Inter"/>
+              </a:rPr>
+              <a:t>Privacy inside the query</a:t>
+            </a:r>
+          </a:p>
+        </p:txBody>
+      </p:sp>
+      <p:sp>
+        <p:nvSpPr>
+          <p:cNvPr id="17" name="TextBox 16"/>
           <p:cNvSpPr txBox="1"/>
           <p:nvPr/>
         </p:nvSpPr>
         <p:spPr>
           <a:xfrm>
-            <a:off x="4572000" y="2103120"/>
-            <a:ext cx="3017520" cy="2651760"/>
+            <a:off x="1005840" y="4983480"/>
+            <a:ext cx="4663440" cy="548640"/>
           </a:xfrm>
           <a:prstGeom prst="rect">
             <a:avLst/>
@@ -5274,70 +5494,34 @@
           <a:noFill/>
         </p:spPr>
         <p:txBody>
-          <a:bodyPr wrap="square">
+          <a:bodyPr wrap="square" anchor="t" lIns="45720" rIns="45720">
             <a:spAutoFit/>
           </a:bodyPr>
           <a:lstStyle/>
           <a:p>
-            <a:pPr>
-              <a:spcAft>
-                <a:spcPts val="800"/>
-              </a:spcAft>
-            </a:pPr>
-            <a:r>
-              <a:rPr sz="1500" b="1">
-                <a:solidFill>
-                  <a:srgbClr val="1F2A37"/>
-                </a:solidFill>
-                <a:latin typeface="Inter"/>
-              </a:rPr>
-              <a:t>•  no one writes a query per request</a:t>
-            </a:r>
-          </a:p>
-          <a:p>
-            <a:pPr>
-              <a:spcAft>
-                <a:spcPts val="800"/>
-              </a:spcAft>
-            </a:pPr>
-            <a:r>
-              <a:rPr sz="1500" b="1">
-                <a:solidFill>
-                  <a:srgbClr val="1F2A37"/>
-                </a:solidFill>
-                <a:latin typeface="Inter"/>
-              </a:rPr>
-              <a:t>•  fixed rules turn the definitions into SQL; codes come from the request</a:t>
-            </a:r>
-          </a:p>
-          <a:p>
-            <a:pPr>
-              <a:spcAft>
-                <a:spcPts val="800"/>
-              </a:spcAft>
-            </a:pPr>
-            <a:r>
-              <a:rPr sz="1500" b="1">
-                <a:solidFill>
-                  <a:srgbClr val="1F2A37"/>
-                </a:solidFill>
-                <a:latin typeface="Inter"/>
-              </a:rPr>
-              <a:t>•  an LLM steps in only where the rules give up, under the same checks</a:t>
-            </a:r>
-          </a:p>
-        </p:txBody>
-      </p:sp>
-      <p:sp>
-        <p:nvSpPr>
-          <p:cNvPr id="12" name="Rounded Rectangle 11"/>
+            <a:pPr algn="l"/>
+            <a:r>
+              <a:rPr sz="1700" b="0">
+                <a:solidFill>
+                  <a:srgbClr val="5B6472"/>
+                </a:solidFill>
+                <a:latin typeface="Inter"/>
+              </a:rPr>
+              <a:t>small cells and opt-outs cannot leak</a:t>
+            </a:r>
+          </a:p>
+        </p:txBody>
+      </p:sp>
+      <p:sp>
+        <p:nvSpPr>
+          <p:cNvPr id="18" name="Rounded Rectangle 17"/>
           <p:cNvSpPr/>
           <p:nvPr/>
         </p:nvSpPr>
         <p:spPr>
           <a:xfrm>
-            <a:off x="8138160" y="1371600"/>
-            <a:ext cx="3474720" cy="3566160"/>
+            <a:off x="6263640" y="3794760"/>
+            <a:ext cx="5394960" cy="2103120"/>
           </a:xfrm>
           <a:prstGeom prst="roundRect">
             <a:avLst>
@@ -5378,120 +5562,14 @@
       </p:sp>
       <p:sp>
         <p:nvSpPr>
-          <p:cNvPr id="13" name="TextBox 12"/>
-          <p:cNvSpPr txBox="1"/>
-          <p:nvPr/>
-        </p:nvSpPr>
-        <p:spPr>
-          <a:xfrm>
-            <a:off x="8366760" y="1554480"/>
-            <a:ext cx="3017520" cy="457200"/>
-          </a:xfrm>
-          <a:prstGeom prst="rect">
-            <a:avLst/>
-          </a:prstGeom>
-          <a:noFill/>
-        </p:spPr>
-        <p:txBody>
-          <a:bodyPr wrap="square" anchor="t" lIns="45720" rIns="45720">
-            <a:spAutoFit/>
-          </a:bodyPr>
-          <a:lstStyle/>
-          <a:p>
-            <a:pPr algn="l"/>
-            <a:r>
-              <a:rPr sz="2000" b="1">
-                <a:solidFill>
-                  <a:srgbClr val="C62828"/>
-                </a:solidFill>
-                <a:latin typeface="Inter"/>
-              </a:rPr>
-              <a:t>The access body</a:t>
-            </a:r>
-          </a:p>
-        </p:txBody>
-      </p:sp>
-      <p:sp>
-        <p:nvSpPr>
-          <p:cNvPr id="14" name="TextBox 13"/>
-          <p:cNvSpPr txBox="1"/>
-          <p:nvPr/>
-        </p:nvSpPr>
-        <p:spPr>
-          <a:xfrm>
-            <a:off x="8366760" y="2103120"/>
-            <a:ext cx="3017520" cy="2651760"/>
-          </a:xfrm>
-          <a:prstGeom prst="rect">
-            <a:avLst/>
-          </a:prstGeom>
-          <a:noFill/>
-        </p:spPr>
-        <p:txBody>
-          <a:bodyPr wrap="square">
-            <a:spAutoFit/>
-          </a:bodyPr>
-          <a:lstStyle/>
-          <a:p>
-            <a:pPr>
-              <a:spcAft>
-                <a:spcPts val="800"/>
-              </a:spcAft>
-            </a:pPr>
-            <a:r>
-              <a:rPr sz="1500" b="1">
-                <a:solidFill>
-                  <a:srgbClr val="1F2A37"/>
-                </a:solidFill>
-                <a:latin typeface="Inter"/>
-              </a:rPr>
-              <a:t>•  the law check quotes the article, verbatim from the regulation</a:t>
-            </a:r>
-          </a:p>
-          <a:p>
-            <a:pPr>
-              <a:spcAft>
-                <a:spcPts val="800"/>
-              </a:spcAft>
-            </a:pPr>
-            <a:r>
-              <a:rPr sz="1500" b="1">
-                <a:solidFill>
-                  <a:srgbClr val="1F2A37"/>
-                </a:solidFill>
-                <a:latin typeface="Inter"/>
-              </a:rPr>
-              <a:t>•  small-cell rule and opt-outs enforced inside the query</a:t>
-            </a:r>
-          </a:p>
-          <a:p>
-            <a:pPr>
-              <a:spcAft>
-                <a:spcPts val="800"/>
-              </a:spcAft>
-            </a:pPr>
-            <a:r>
-              <a:rPr sz="1500" b="1">
-                <a:solidFill>
-                  <a:srgbClr val="1F2A37"/>
-                </a:solidFill>
-                <a:latin typeface="Inter"/>
-              </a:rPr>
-              <a:t>•  records only in a secure room: images, no download, audit log</a:t>
-            </a:r>
-          </a:p>
-        </p:txBody>
-      </p:sp>
-      <p:sp>
-        <p:nvSpPr>
-          <p:cNvPr id="15" name="Rounded Rectangle 14"/>
+          <p:cNvPr id="19" name="Rounded Rectangle 18"/>
           <p:cNvSpPr/>
           <p:nvPr/>
         </p:nvSpPr>
         <p:spPr>
           <a:xfrm>
-            <a:off x="548640" y="5212080"/>
-            <a:ext cx="11064240" cy="914400"/>
+            <a:off x="6263640" y="3794760"/>
+            <a:ext cx="164592" cy="2103120"/>
           </a:xfrm>
           <a:prstGeom prst="roundRect">
             <a:avLst>
@@ -5499,7 +5577,7 @@
             </a:avLst>
           </a:prstGeom>
           <a:solidFill>
-            <a:srgbClr val="1F3A5F"/>
+            <a:srgbClr val="C62828"/>
           </a:solidFill>
           <a:ln>
             <a:noFill/>
@@ -5530,14 +5608,14 @@
       </p:sp>
       <p:sp>
         <p:nvSpPr>
-          <p:cNvPr id="16" name="TextBox 15"/>
+          <p:cNvPr id="20" name="TextBox 19"/>
           <p:cNvSpPr txBox="1"/>
           <p:nvPr/>
         </p:nvSpPr>
         <p:spPr>
           <a:xfrm>
-            <a:off x="822960" y="5212080"/>
-            <a:ext cx="10515600" cy="914400"/>
+            <a:off x="6720840" y="4206240"/>
+            <a:ext cx="4663440" cy="731520"/>
           </a:xfrm>
           <a:prstGeom prst="rect">
             <a:avLst/>
@@ -5545,27 +5623,62 @@
           <a:noFill/>
         </p:spPr>
         <p:txBody>
-          <a:bodyPr wrap="square" anchor="ctr" lIns="45720" rIns="45720">
+          <a:bodyPr wrap="square" anchor="t" lIns="45720" rIns="45720">
             <a:spAutoFit/>
           </a:bodyPr>
           <a:lstStyle/>
           <a:p>
             <a:pPr algn="l"/>
             <a:r>
-              <a:rPr sz="1800" b="1">
-                <a:solidFill>
-                  <a:srgbClr val="FFFFFF"/>
-                </a:solidFill>
-                <a:latin typeface="Inter"/>
-              </a:rPr>
-              <a:t>Decisions in seconds instead of weeks — every one of them explained, and identical on every run.</a:t>
-            </a:r>
-          </a:p>
-        </p:txBody>
-      </p:sp>
-      <p:sp>
-        <p:nvSpPr>
-          <p:cNvPr id="17" name="TextBox 16"/>
+              <a:rPr sz="2800" b="1">
+                <a:solidFill>
+                  <a:srgbClr val="C62828"/>
+                </a:solidFill>
+                <a:latin typeface="Inter"/>
+              </a:rPr>
+              <a:t>Secure room, no exit</a:t>
+            </a:r>
+          </a:p>
+        </p:txBody>
+      </p:sp>
+      <p:sp>
+        <p:nvSpPr>
+          <p:cNvPr id="21" name="TextBox 20"/>
+          <p:cNvSpPr txBox="1"/>
+          <p:nvPr/>
+        </p:nvSpPr>
+        <p:spPr>
+          <a:xfrm>
+            <a:off x="6720840" y="4983480"/>
+            <a:ext cx="4663440" cy="548640"/>
+          </a:xfrm>
+          <a:prstGeom prst="rect">
+            <a:avLst/>
+          </a:prstGeom>
+          <a:noFill/>
+        </p:spPr>
+        <p:txBody>
+          <a:bodyPr wrap="square" anchor="t" lIns="45720" rIns="45720">
+            <a:spAutoFit/>
+          </a:bodyPr>
+          <a:lstStyle/>
+          <a:p>
+            <a:pPr algn="l"/>
+            <a:r>
+              <a:rPr sz="1700" b="0">
+                <a:solidFill>
+                  <a:srgbClr val="5B6472"/>
+                </a:solidFill>
+                <a:latin typeface="Inter"/>
+              </a:rPr>
+              <a:t>records viewed as images, never downloaded</a:t>
+            </a:r>
+          </a:p>
+        </p:txBody>
+      </p:sp>
+      <p:sp>
+        <p:nvSpPr>
+          <p:cNvPr id="22" name="TextBox 21"/>
           <p:cNvSpPr txBox="1"/>
           <p:nvPr/>
         </p:nvSpPr>

--- a/docs/slides/pitch.pptx
+++ b/docs/slides/pitch.pptx
@@ -12,6 +12,10 @@
     <p:sldId id="260" r:id="rId12"/>
     <p:sldId id="261" r:id="rId13"/>
     <p:sldId id="262" r:id="rId14"/>
+    <p:sldId id="263" r:id="rId15"/>
+    <p:sldId id="264" r:id="rId16"/>
+    <p:sldId id="265" r:id="rId17"/>
+    <p:sldId id="266" r:id="rId18"/>
   </p:sldIdLst>
   <p:sldSz cx="12191695" cy="6858000" type="screen4x3"/>
   <p:notesSz cx="6858000" cy="9144000"/>
@@ -508,7 +512,7 @@
           <a:lstStyle/>
           <a:p>
             <a:r>
-              <a:t>Hi everyone. We are HalfSecuredTeam and we built an automated Health Data Access Body for the European Health Data Space: an app that decides health-data requests the way the law requires, and shows exactly why. (≈10 s)</a:t>
+              <a:t>Hi everyone. We are HalfSecuredTeam and we built an automated Health Data Access Body for the European Health Data Space: an app that decides health-data requests the way the law requires, and shows exactly why.</a:t>
             </a:r>
           </a:p>
         </p:txBody>
@@ -578,7 +582,7 @@
           <a:lstStyle/>
           <a:p>
             <a:r>
-              <a:t>Researchers know the medicine and what they want to find out, but not how to query a database. Engineers can write the query but do not know the medical codes or whether the purpose is even allowed. And the access body in between has to check every request against the regulation and protect patients. Today that takes weeks. We sit at the intersection of all three. (≈20 s)</a:t>
+              <a:t>Researchers know the medicine and what they want to find out, but not how to query a database. Engineers can write the query but do not know the codes or whether the purpose is allowed. And the access body in between has to check every request against the regulation and protect patients. Today that takes weeks. We sit at the intersection.</a:t>
             </a:r>
           </a:p>
         </p:txBody>
@@ -648,7 +652,7 @@
           <a:lstStyle/>
           <a:p>
             <a:r>
-              <a:t>Four ideas. The AI does not decide on its own: it picks the article from the regulation and has to quote it. Definitions become SQL through fixed rules, so no one writes a query per request and the numbers are the same every run. Privacy lives inside the query: small cells and opt-outs cannot leak. And records never leave the secure room: viewed as images, never downloaded. (≈20 s)</a:t>
+              <a:t>Four ideas. The AI does not decide on its own: it picks the article from the regulation and has to quote it. Definitions become SQL through fixed rules, so no one writes a query per request and the numbers are the same every run. Privacy lives inside the query: small cells and opt-outs cannot leak. And records never leave the secure room: viewed as images, never downloaded.</a:t>
             </a:r>
           </a:p>
         </p:txBody>
@@ -718,7 +722,7 @@
           <a:lstStyle/>
           <a:p>
             <a:r>
-              <a:t>A request in any EU language is translated once. An AI picks the matching rule from the actual law text and quotes it. Prohibited purposes are rejected with the quote. Approved requests are parsed by rules into SQL; statistics go through the small-cell rule, record requests are copied into a secure room with no download. Anyone flooding the service is blocked. (≈20 s)</a:t>
+              <a:t>A request in any EU language is translated once. The AI picks the rule from the law text and quotes it. Approved requests are parsed by rules into SQL; statistics go through the small-cell rule, record requests into a secure room with no download. Anyone flooding the service is blocked.</a:t>
             </a:r>
           </a:p>
         </p:txBody>
@@ -788,7 +792,32 @@
           <a:lstStyle/>
           <a:p>
             <a:r>
-              <a:t>Why is this better than a black box? There is no technical burden: the applicant writes in plain words and the AI even drafts the definitions. Every decision quotes the article verbatim, so it is explainable. The numbers come from code, not from the AI, so they are the same every run. Privacy rules are enforced inside the query, and everything is logged. (≈20 s)</a:t>
+              <a:t>Switch to the screen capture.</a:t>
+            </a:r>
+          </a:p>
+          <a:p>
+            <a:r>
+              <a:t>R02: the insurer. Rejected, Art. 54(b), quoted.</a:t>
+            </a:r>
+          </a:p>
+          <a:p>
+            <a:r>
+              <a:t>R01: diabetes by region, the table with the small-cell note.</a:t>
+            </a:r>
+          </a:p>
+          <a:p>
+            <a:r>
+              <a:t>R11: the same in German.</a:t>
+            </a:r>
+          </a:p>
+          <a:p>
+            <a:r>
+              <a:t>R12: records for a model; open the secure room; Download: 403.</a:t>
+            </a:r>
+          </a:p>
+          <a:p>
+            <a:r>
+              <a:t>flood.py: 20 served, then 429.</a:t>
             </a:r>
           </a:p>
         </p:txBody>
@@ -858,102 +887,7 @@
           <a:lstStyle/>
           <a:p>
             <a:r>
-              <a:t>Now the demo, in four steps and one attack. (switch to screen capture; ≈50 s)</a:t>
-            </a:r>
-          </a:p>
-          <a:p>
-            <a:r>
-              <a:t>R02: the insurer. Submit. Rejected, Art. 54(b), quoted.</a:t>
-            </a:r>
-          </a:p>
-          <a:p>
-            <a:r>
-              <a:t>R01: diabetes by region. Submit. The table, with the small-cell note.</a:t>
-            </a:r>
-          </a:p>
-          <a:p>
-            <a:r>
-              <a:t>R11: the same request in German. The decision shows the English text next to it.</a:t>
-            </a:r>
-          </a:p>
-          <a:p>
-            <a:r>
-              <a:t>R12: records for a prediction model. Approved into the secure room; open it, browse; click Download: 403, logged.</a:t>
-            </a:r>
-          </a:p>
-          <a:p>
-            <a:r>
-              <a:t>Finally run flood.py in a terminal: 20 served, then 429 with Retry-After.</a:t>
-            </a:r>
-          </a:p>
-        </p:txBody>
-      </p:sp>
-      <p:sp>
-        <p:nvSpPr>
-          <p:cNvPr id="4" name="Slide Number Placeholder 3"/>
-          <p:cNvSpPr>
-            <a:spLocks noGrp="1"/>
-          </p:cNvSpPr>
-          <p:nvPr>
-            <p:ph type="sldNum" idx="5" sz="quarter"/>
-          </p:nvPr>
-        </p:nvSpPr>
-        <p:spPr/>
-      </p:sp>
-    </p:spTree>
-  </p:cSld>
-  <p:clrMapOvr>
-    <a:masterClrMapping/>
-  </p:clrMapOvr>
-</p:notes>
-</file>
-
-<file path=ppt/notesSlides/notesSlide7.xml><?xml version="1.0" encoding="utf-8"?>
-<p:notes xmlns:a="http://schemas.openxmlformats.org/drawingml/2006/main" xmlns:p="http://schemas.openxmlformats.org/presentationml/2006/main" xmlns:r="http://schemas.openxmlformats.org/officeDocument/2006/relationships">
-  <p:cSld>
-    <p:spTree>
-      <p:nvGrpSpPr>
-        <p:cNvPr id="1" name=""/>
-        <p:cNvGrpSpPr/>
-        <p:nvPr/>
-      </p:nvGrpSpPr>
-      <p:grpSpPr>
-        <a:xfrm>
-          <a:off x="0" y="0"/>
-          <a:ext cx="0" cy="0"/>
-          <a:chOff x="0" y="0"/>
-          <a:chExt cx="0" cy="0"/>
-        </a:xfrm>
-      </p:grpSpPr>
-      <p:sp>
-        <p:nvSpPr>
-          <p:cNvPr id="2" name="Slide Image Placeholder 1"/>
-          <p:cNvSpPr>
-            <a:spLocks noGrp="1"/>
-          </p:cNvSpPr>
-          <p:nvPr>
-            <p:ph type="sldImg" idx="2"/>
-          </p:nvPr>
-        </p:nvSpPr>
-        <p:spPr/>
-      </p:sp>
-      <p:sp>
-        <p:nvSpPr>
-          <p:cNvPr id="3" name="Notes Placeholder 2"/>
-          <p:cNvSpPr>
-            <a:spLocks noGrp="1"/>
-          </p:cNvSpPr>
-          <p:nvPr>
-            <p:ph type="body" idx="3" sz="quarter"/>
-          </p:nvPr>
-        </p:nvSpPr>
-        <p:spPr/>
-        <p:txBody>
-          <a:bodyPr/>
-          <a:lstStyle/>
-          <a:p>
-            <a:r>
-              <a:t>What works: all ten task decisions, all six numbers, no leaks, consistent across runs, and 34 of 36 requests we had never seen. What does not yet: the law check is sometimes too strict, and the staff list is still a placeholder. Everything is in the repository. Thank you. (≈15 s)</a:t>
+              <a:t>What works: all ten task decisions, all six numbers, no leaks, consistent across runs, and 34 of 36 requests we had never seen. What does not yet: the law check is sometimes too strict, and the staff list is a placeholder. Everything is in the repository. Thank you.</a:t>
             </a:r>
           </a:p>
         </p:txBody>
@@ -3968,13 +3902,13 @@
         <p:spPr>
           <a:xfrm>
             <a:off x="0" y="0"/>
-            <a:ext cx="12191695" cy="6858000"/>
+            <a:ext cx="320040" cy="6858000"/>
           </a:xfrm>
           <a:prstGeom prst="rect">
             <a:avLst/>
           </a:prstGeom>
           <a:solidFill>
-            <a:srgbClr val="1F3A5F"/>
+            <a:srgbClr val="1A5FB4"/>
           </a:solidFill>
           <a:ln>
             <a:noFill/>
@@ -4011,8 +3945,8 @@
         </p:nvSpPr>
         <p:spPr>
           <a:xfrm>
-            <a:off x="822960" y="1737360"/>
-            <a:ext cx="10515600" cy="1463040"/>
+            <a:off x="1097280" y="2103120"/>
+            <a:ext cx="10058400" cy="1737360"/>
           </a:xfrm>
           <a:prstGeom prst="rect">
             <a:avLst/>
@@ -4020,18 +3954,22 @@
           <a:noFill/>
         </p:spPr>
         <p:txBody>
-          <a:bodyPr wrap="square" anchor="t" lIns="45720" rIns="45720">
+          <a:bodyPr wrap="square" anchor="t" lIns="0" rIns="0" tIns="0" bIns="0">
             <a:spAutoFit/>
           </a:bodyPr>
           <a:lstStyle/>
           <a:p>
-            <a:pPr algn="l"/>
-            <a:r>
-              <a:rPr sz="4000" b="1">
-                <a:solidFill>
-                  <a:srgbClr val="FFFFFF"/>
-                </a:solidFill>
-                <a:latin typeface="Inter"/>
+            <a:pPr algn="l">
+              <a:lnSpc>
+                <a:spcPct val="105000"/>
+              </a:lnSpc>
+            </a:pPr>
+            <a:r>
+              <a:rPr sz="4600" b="1">
+                <a:solidFill>
+                  <a:srgbClr val="141A22"/>
+                </a:solidFill>
+                <a:latin typeface="Lato"/>
               </a:rPr>
               <a:t>Health data access that explains itself</a:t>
             </a:r>
@@ -4046,8 +3984,8 @@
         </p:nvSpPr>
         <p:spPr>
           <a:xfrm>
-            <a:off x="822960" y="3291840"/>
-            <a:ext cx="10515600" cy="914400"/>
+            <a:off x="1097280" y="3977639"/>
+            <a:ext cx="9601200" cy="822960"/>
           </a:xfrm>
           <a:prstGeom prst="rect">
             <a:avLst/>
@@ -4055,18 +3993,22 @@
           <a:noFill/>
         </p:spPr>
         <p:txBody>
-          <a:bodyPr wrap="square" anchor="t" lIns="45720" rIns="45720">
+          <a:bodyPr wrap="square" anchor="t" lIns="0" rIns="0" tIns="0" bIns="0">
             <a:spAutoFit/>
           </a:bodyPr>
           <a:lstStyle/>
           <a:p>
-            <a:pPr algn="l"/>
+            <a:pPr algn="l">
+              <a:lnSpc>
+                <a:spcPct val="115000"/>
+              </a:lnSpc>
+            </a:pPr>
             <a:r>
               <a:rPr sz="2200" b="0">
                 <a:solidFill>
-                  <a:srgbClr val="DBE6F3"/>
-                </a:solidFill>
-                <a:latin typeface="Inter"/>
+                  <a:srgbClr val="6B7480"/>
+                </a:solidFill>
+                <a:latin typeface="Lato"/>
               </a:rPr>
               <a:t>An automated Health Data Access Body for the European Health Data Space</a:t>
             </a:r>
@@ -4081,8 +4023,8 @@
         </p:nvSpPr>
         <p:spPr>
           <a:xfrm>
-            <a:off x="822960" y="5120640"/>
-            <a:ext cx="10515600" cy="457200"/>
+            <a:off x="1097280" y="5669280"/>
+            <a:ext cx="9144000" cy="365760"/>
           </a:xfrm>
           <a:prstGeom prst="rect">
             <a:avLst/>
@@ -4090,20 +4032,623 @@
           <a:noFill/>
         </p:spPr>
         <p:txBody>
-          <a:bodyPr wrap="square" anchor="t" lIns="45720" rIns="45720">
+          <a:bodyPr wrap="square" anchor="t" lIns="0" rIns="0" tIns="0" bIns="0">
             <a:spAutoFit/>
           </a:bodyPr>
           <a:lstStyle/>
           <a:p>
-            <a:pPr algn="l"/>
+            <a:pPr algn="l">
+              <a:lnSpc>
+                <a:spcPct val="115000"/>
+              </a:lnSpc>
+            </a:pPr>
+            <a:r>
+              <a:rPr sz="1400" b="0">
+                <a:solidFill>
+                  <a:srgbClr val="6B7480"/>
+                </a:solidFill>
+                <a:latin typeface="Lato"/>
+              </a:rPr>
+              <a:t>HalfSecuredTeam  ·  Track 3  ·  Regulation (EU) 2025/327</a:t>
+            </a:r>
+          </a:p>
+        </p:txBody>
+      </p:sp>
+      <p:sp>
+        <p:nvSpPr>
+          <p:cNvPr id="6" name="TextBox 5"/>
+          <p:cNvSpPr txBox="1"/>
+          <p:nvPr/>
+        </p:nvSpPr>
+        <p:spPr>
+          <a:xfrm>
+            <a:off x="822960" y="6355080"/>
+            <a:ext cx="7315200" cy="274320"/>
+          </a:xfrm>
+          <a:prstGeom prst="rect">
+            <a:avLst/>
+          </a:prstGeom>
+          <a:noFill/>
+        </p:spPr>
+        <p:txBody>
+          <a:bodyPr wrap="square" anchor="t" lIns="0" rIns="0" tIns="0" bIns="0">
+            <a:spAutoFit/>
+          </a:bodyPr>
+          <a:lstStyle/>
+          <a:p>
+            <a:pPr algn="l">
+              <a:lnSpc>
+                <a:spcPct val="115000"/>
+              </a:lnSpc>
+            </a:pPr>
+            <a:r>
+              <a:rPr sz="1100" b="0">
+                <a:solidFill>
+                  <a:srgbClr val="6B7480"/>
+                </a:solidFill>
+                <a:latin typeface="Lato"/>
+              </a:rPr>
+              <a:t>HalfSecuredTeam  ·  EHDS Track 3</a:t>
+            </a:r>
+          </a:p>
+        </p:txBody>
+      </p:sp>
+      <p:sp>
+        <p:nvSpPr>
+          <p:cNvPr id="7" name="TextBox 6"/>
+          <p:cNvSpPr txBox="1"/>
+          <p:nvPr/>
+        </p:nvSpPr>
+        <p:spPr>
+          <a:xfrm>
+            <a:off x="10454335" y="6355080"/>
+            <a:ext cx="914400" cy="274320"/>
+          </a:xfrm>
+          <a:prstGeom prst="rect">
+            <a:avLst/>
+          </a:prstGeom>
+          <a:noFill/>
+        </p:spPr>
+        <p:txBody>
+          <a:bodyPr wrap="square" anchor="t" lIns="0" rIns="0" tIns="0" bIns="0">
+            <a:spAutoFit/>
+          </a:bodyPr>
+          <a:lstStyle/>
+          <a:p>
+            <a:pPr algn="r">
+              <a:lnSpc>
+                <a:spcPct val="115000"/>
+              </a:lnSpc>
+            </a:pPr>
+            <a:r>
+              <a:rPr sz="1100" b="0">
+                <a:solidFill>
+                  <a:srgbClr val="6B7480"/>
+                </a:solidFill>
+                <a:latin typeface="Lato"/>
+              </a:rPr>
+              <a:t>1</a:t>
+            </a:r>
+          </a:p>
+        </p:txBody>
+      </p:sp>
+    </p:spTree>
+  </p:cSld>
+  <p:clrMapOvr>
+    <a:masterClrMapping/>
+  </p:clrMapOvr>
+</p:sld>
+</file>
+
+<file path=ppt/slides/slide10.xml><?xml version="1.0" encoding="utf-8"?>
+<p:sld xmlns:a="http://schemas.openxmlformats.org/drawingml/2006/main" xmlns:p="http://schemas.openxmlformats.org/presentationml/2006/main" xmlns:r="http://schemas.openxmlformats.org/officeDocument/2006/relationships">
+  <p:cSld>
+    <p:spTree>
+      <p:nvGrpSpPr>
+        <p:cNvPr id="1" name=""/>
+        <p:cNvGrpSpPr/>
+        <p:nvPr/>
+      </p:nvGrpSpPr>
+      <p:grpSpPr/>
+      <p:sp>
+        <p:nvSpPr>
+          <p:cNvPr id="2" name="TextBox 1"/>
+          <p:cNvSpPr txBox="1"/>
+          <p:nvPr/>
+        </p:nvSpPr>
+        <p:spPr>
+          <a:xfrm>
+            <a:off x="822960" y="685800"/>
+            <a:ext cx="10545775" cy="274320"/>
+          </a:xfrm>
+          <a:prstGeom prst="rect">
+            <a:avLst/>
+          </a:prstGeom>
+          <a:noFill/>
+        </p:spPr>
+        <p:txBody>
+          <a:bodyPr wrap="square" anchor="t" lIns="0" rIns="0" tIns="0" bIns="0">
+            <a:spAutoFit/>
+          </a:bodyPr>
+          <a:lstStyle/>
+          <a:p>
+            <a:pPr algn="l">
+              <a:lnSpc>
+                <a:spcPct val="115000"/>
+              </a:lnSpc>
+            </a:pPr>
+            <a:r>
+              <a:rPr sz="1200" b="1">
+                <a:solidFill>
+                  <a:srgbClr val="1A5FB4"/>
+                </a:solidFill>
+                <a:latin typeface="Lato"/>
+              </a:rPr>
+              <a:t>KICKER</a:t>
+            </a:r>
+          </a:p>
+        </p:txBody>
+      </p:sp>
+      <p:sp>
+        <p:nvSpPr>
+          <p:cNvPr id="3" name="TextBox 2"/>
+          <p:cNvSpPr txBox="1"/>
+          <p:nvPr/>
+        </p:nvSpPr>
+        <p:spPr>
+          <a:xfrm>
+            <a:off x="822960" y="1005840"/>
+            <a:ext cx="10545775" cy="822960"/>
+          </a:xfrm>
+          <a:prstGeom prst="rect">
+            <a:avLst/>
+          </a:prstGeom>
+          <a:noFill/>
+        </p:spPr>
+        <p:txBody>
+          <a:bodyPr wrap="square" anchor="t" lIns="0" rIns="0" tIns="0" bIns="0">
+            <a:spAutoFit/>
+          </a:bodyPr>
+          <a:lstStyle/>
+          <a:p>
+            <a:pPr algn="l">
+              <a:lnSpc>
+                <a:spcPct val="115000"/>
+              </a:lnSpc>
+            </a:pPr>
+            <a:r>
+              <a:rPr sz="3400" b="1">
+                <a:solidFill>
+                  <a:srgbClr val="141A22"/>
+                </a:solidFill>
+                <a:latin typeface="Lato"/>
+              </a:rPr>
+              <a:t>Image slide</a:t>
+            </a:r>
+          </a:p>
+        </p:txBody>
+      </p:sp>
+      <p:sp>
+        <p:nvSpPr>
+          <p:cNvPr id="4" name="Rectangle 3"/>
+          <p:cNvSpPr/>
+          <p:nvPr/>
+        </p:nvSpPr>
+        <p:spPr>
+          <a:xfrm>
+            <a:off x="822960" y="1874520"/>
+            <a:ext cx="640080" cy="45720"/>
+          </a:xfrm>
+          <a:prstGeom prst="rect">
+            <a:avLst/>
+          </a:prstGeom>
+          <a:solidFill>
+            <a:srgbClr val="1A5FB4"/>
+          </a:solidFill>
+          <a:ln>
+            <a:noFill/>
+          </a:ln>
+          <a:effectLst/>
+        </p:spPr>
+        <p:style>
+          <a:lnRef idx="1">
+            <a:schemeClr val="accent1"/>
+          </a:lnRef>
+          <a:fillRef idx="3">
+            <a:schemeClr val="accent1"/>
+          </a:fillRef>
+          <a:effectRef idx="2">
+            <a:schemeClr val="accent1"/>
+          </a:effectRef>
+          <a:fontRef idx="minor">
+            <a:schemeClr val="lt1"/>
+          </a:fontRef>
+        </p:style>
+        <p:txBody>
+          <a:bodyPr rtlCol="0" anchor="ctr"/>
+          <a:lstStyle/>
+          <a:p>
+            <a:pPr algn="ctr"/>
+          </a:p>
+        </p:txBody>
+      </p:sp>
+      <p:sp>
+        <p:nvSpPr>
+          <p:cNvPr id="5" name="TextBox 4"/>
+          <p:cNvSpPr txBox="1"/>
+          <p:nvPr/>
+        </p:nvSpPr>
+        <p:spPr>
+          <a:xfrm>
+            <a:off x="822960" y="6355080"/>
+            <a:ext cx="7315200" cy="274320"/>
+          </a:xfrm>
+          <a:prstGeom prst="rect">
+            <a:avLst/>
+          </a:prstGeom>
+          <a:noFill/>
+        </p:spPr>
+        <p:txBody>
+          <a:bodyPr wrap="square" anchor="t" lIns="0" rIns="0" tIns="0" bIns="0">
+            <a:spAutoFit/>
+          </a:bodyPr>
+          <a:lstStyle/>
+          <a:p>
+            <a:pPr algn="l">
+              <a:lnSpc>
+                <a:spcPct val="115000"/>
+              </a:lnSpc>
+            </a:pPr>
+            <a:r>
+              <a:rPr sz="1100" b="0">
+                <a:solidFill>
+                  <a:srgbClr val="6B7480"/>
+                </a:solidFill>
+                <a:latin typeface="Lato"/>
+              </a:rPr>
+              <a:t>HalfSecuredTeam  ·  EHDS Track 3</a:t>
+            </a:r>
+          </a:p>
+        </p:txBody>
+      </p:sp>
+      <p:sp>
+        <p:nvSpPr>
+          <p:cNvPr id="6" name="TextBox 5"/>
+          <p:cNvSpPr txBox="1"/>
+          <p:nvPr/>
+        </p:nvSpPr>
+        <p:spPr>
+          <a:xfrm>
+            <a:off x="10454335" y="6355080"/>
+            <a:ext cx="914400" cy="274320"/>
+          </a:xfrm>
+          <a:prstGeom prst="rect">
+            <a:avLst/>
+          </a:prstGeom>
+          <a:noFill/>
+        </p:spPr>
+        <p:txBody>
+          <a:bodyPr wrap="square" anchor="t" lIns="0" rIns="0" tIns="0" bIns="0">
+            <a:spAutoFit/>
+          </a:bodyPr>
+          <a:lstStyle/>
+          <a:p>
+            <a:pPr algn="r">
+              <a:lnSpc>
+                <a:spcPct val="115000"/>
+              </a:lnSpc>
+            </a:pPr>
+            <a:r>
+              <a:rPr sz="1100" b="0">
+                <a:solidFill>
+                  <a:srgbClr val="6B7480"/>
+                </a:solidFill>
+                <a:latin typeface="Lato"/>
+              </a:rPr>
+              <a:t>10</a:t>
+            </a:r>
+          </a:p>
+        </p:txBody>
+      </p:sp>
+      <p:sp>
+        <p:nvSpPr>
+          <p:cNvPr id="7" name="Rounded Rectangle 6"/>
+          <p:cNvSpPr/>
+          <p:nvPr/>
+        </p:nvSpPr>
+        <p:spPr>
+          <a:xfrm>
+            <a:off x="822960" y="2286000"/>
+            <a:ext cx="10545775" cy="3840480"/>
+          </a:xfrm>
+          <a:prstGeom prst="roundRect">
+            <a:avLst>
+              <a:gd name="adj" fmla="val 6000"/>
+            </a:avLst>
+          </a:prstGeom>
+          <a:solidFill>
+            <a:srgbClr val="F4F6F8"/>
+          </a:solidFill>
+          <a:ln>
+            <a:noFill/>
+          </a:ln>
+          <a:effectLst/>
+        </p:spPr>
+        <p:style>
+          <a:lnRef idx="1">
+            <a:schemeClr val="accent1"/>
+          </a:lnRef>
+          <a:fillRef idx="3">
+            <a:schemeClr val="accent1"/>
+          </a:fillRef>
+          <a:effectRef idx="2">
+            <a:schemeClr val="accent1"/>
+          </a:effectRef>
+          <a:fontRef idx="minor">
+            <a:schemeClr val="lt1"/>
+          </a:fontRef>
+        </p:style>
+        <p:txBody>
+          <a:bodyPr rtlCol="0" anchor="ctr"/>
+          <a:lstStyle/>
+          <a:p>
+            <a:pPr algn="ctr"/>
+          </a:p>
+        </p:txBody>
+      </p:sp>
+      <p:sp>
+        <p:nvSpPr>
+          <p:cNvPr id="8" name="TextBox 7"/>
+          <p:cNvSpPr txBox="1"/>
+          <p:nvPr/>
+        </p:nvSpPr>
+        <p:spPr>
+          <a:xfrm>
+            <a:off x="822960" y="2286000"/>
+            <a:ext cx="10545775" cy="3840480"/>
+          </a:xfrm>
+          <a:prstGeom prst="rect">
+            <a:avLst/>
+          </a:prstGeom>
+          <a:noFill/>
+        </p:spPr>
+        <p:txBody>
+          <a:bodyPr wrap="square" anchor="ctr" lIns="0" rIns="0" tIns="0" bIns="0">
+            <a:spAutoFit/>
+          </a:bodyPr>
+          <a:lstStyle/>
+          <a:p>
+            <a:pPr algn="ctr">
+              <a:lnSpc>
+                <a:spcPct val="115000"/>
+              </a:lnSpc>
+            </a:pPr>
             <a:r>
               <a:rPr sz="1600" b="0">
                 <a:solidFill>
-                  <a:srgbClr val="DBE6F3"/>
-                </a:solidFill>
-                <a:latin typeface="Inter"/>
+                  <a:srgbClr val="6B7480"/>
+                </a:solidFill>
+                <a:latin typeface="Lato"/>
               </a:rPr>
-              <a:t>HalfSecuredTeam · Track 3 · Regulation (EU) 2025/327</a:t>
+              <a:t>image</a:t>
+            </a:r>
+          </a:p>
+        </p:txBody>
+      </p:sp>
+    </p:spTree>
+  </p:cSld>
+  <p:clrMapOvr>
+    <a:masterClrMapping/>
+  </p:clrMapOvr>
+</p:sld>
+</file>
+
+<file path=ppt/slides/slide11.xml><?xml version="1.0" encoding="utf-8"?>
+<p:sld xmlns:a="http://schemas.openxmlformats.org/drawingml/2006/main" xmlns:p="http://schemas.openxmlformats.org/presentationml/2006/main" xmlns:r="http://schemas.openxmlformats.org/officeDocument/2006/relationships">
+  <p:cSld>
+    <p:spTree>
+      <p:nvGrpSpPr>
+        <p:cNvPr id="1" name=""/>
+        <p:cNvGrpSpPr/>
+        <p:nvPr/>
+      </p:nvGrpSpPr>
+      <p:grpSpPr/>
+      <p:sp>
+        <p:nvSpPr>
+          <p:cNvPr id="2" name="Rectangle 1"/>
+          <p:cNvSpPr/>
+          <p:nvPr/>
+        </p:nvSpPr>
+        <p:spPr>
+          <a:xfrm>
+            <a:off x="822960" y="2011680"/>
+            <a:ext cx="73152" cy="2377440"/>
+          </a:xfrm>
+          <a:prstGeom prst="rect">
+            <a:avLst/>
+          </a:prstGeom>
+          <a:solidFill>
+            <a:srgbClr val="1A5FB4"/>
+          </a:solidFill>
+          <a:ln>
+            <a:noFill/>
+          </a:ln>
+          <a:effectLst/>
+        </p:spPr>
+        <p:style>
+          <a:lnRef idx="1">
+            <a:schemeClr val="accent1"/>
+          </a:lnRef>
+          <a:fillRef idx="3">
+            <a:schemeClr val="accent1"/>
+          </a:fillRef>
+          <a:effectRef idx="2">
+            <a:schemeClr val="accent1"/>
+          </a:effectRef>
+          <a:fontRef idx="minor">
+            <a:schemeClr val="lt1"/>
+          </a:fontRef>
+        </p:style>
+        <p:txBody>
+          <a:bodyPr rtlCol="0" anchor="ctr"/>
+          <a:lstStyle/>
+          <a:p>
+            <a:pPr algn="ctr"/>
+          </a:p>
+        </p:txBody>
+      </p:sp>
+      <p:sp>
+        <p:nvSpPr>
+          <p:cNvPr id="3" name="TextBox 2"/>
+          <p:cNvSpPr txBox="1"/>
+          <p:nvPr/>
+        </p:nvSpPr>
+        <p:spPr>
+          <a:xfrm>
+            <a:off x="1234440" y="2011680"/>
+            <a:ext cx="10058400" cy="2377440"/>
+          </a:xfrm>
+          <a:prstGeom prst="rect">
+            <a:avLst/>
+          </a:prstGeom>
+          <a:noFill/>
+        </p:spPr>
+        <p:txBody>
+          <a:bodyPr wrap="square" anchor="ctr" lIns="0" rIns="0" tIns="0" bIns="0">
+            <a:spAutoFit/>
+          </a:bodyPr>
+          <a:lstStyle/>
+          <a:p>
+            <a:pPr algn="l">
+              <a:lnSpc>
+                <a:spcPct val="110000"/>
+              </a:lnSpc>
+            </a:pPr>
+            <a:r>
+              <a:rPr sz="3600" b="1">
+                <a:solidFill>
+                  <a:srgbClr val="141A22"/>
+                </a:solidFill>
+                <a:latin typeface="Lato"/>
+              </a:rPr>
+              <a:t>A single sentence that matters.</a:t>
+            </a:r>
+          </a:p>
+        </p:txBody>
+      </p:sp>
+      <p:sp>
+        <p:nvSpPr>
+          <p:cNvPr id="4" name="TextBox 3"/>
+          <p:cNvSpPr txBox="1"/>
+          <p:nvPr/>
+        </p:nvSpPr>
+        <p:spPr>
+          <a:xfrm>
+            <a:off x="1234440" y="4572000"/>
+            <a:ext cx="10058400" cy="457200"/>
+          </a:xfrm>
+          <a:prstGeom prst="rect">
+            <a:avLst/>
+          </a:prstGeom>
+          <a:noFill/>
+        </p:spPr>
+        <p:txBody>
+          <a:bodyPr wrap="square" anchor="t" lIns="0" rIns="0" tIns="0" bIns="0">
+            <a:spAutoFit/>
+          </a:bodyPr>
+          <a:lstStyle/>
+          <a:p>
+            <a:pPr algn="l">
+              <a:lnSpc>
+                <a:spcPct val="115000"/>
+              </a:lnSpc>
+            </a:pPr>
+            <a:r>
+              <a:rPr sz="1600" b="0">
+                <a:solidFill>
+                  <a:srgbClr val="6B7480"/>
+                </a:solidFill>
+                <a:latin typeface="Lato"/>
+              </a:rPr>
+              <a:t>optional small line</a:t>
+            </a:r>
+          </a:p>
+        </p:txBody>
+      </p:sp>
+      <p:sp>
+        <p:nvSpPr>
+          <p:cNvPr id="5" name="TextBox 4"/>
+          <p:cNvSpPr txBox="1"/>
+          <p:nvPr/>
+        </p:nvSpPr>
+        <p:spPr>
+          <a:xfrm>
+            <a:off x="822960" y="6355080"/>
+            <a:ext cx="7315200" cy="274320"/>
+          </a:xfrm>
+          <a:prstGeom prst="rect">
+            <a:avLst/>
+          </a:prstGeom>
+          <a:noFill/>
+        </p:spPr>
+        <p:txBody>
+          <a:bodyPr wrap="square" anchor="t" lIns="0" rIns="0" tIns="0" bIns="0">
+            <a:spAutoFit/>
+          </a:bodyPr>
+          <a:lstStyle/>
+          <a:p>
+            <a:pPr algn="l">
+              <a:lnSpc>
+                <a:spcPct val="115000"/>
+              </a:lnSpc>
+            </a:pPr>
+            <a:r>
+              <a:rPr sz="1100" b="0">
+                <a:solidFill>
+                  <a:srgbClr val="6B7480"/>
+                </a:solidFill>
+                <a:latin typeface="Lato"/>
+              </a:rPr>
+              <a:t>HalfSecuredTeam  ·  EHDS Track 3</a:t>
+            </a:r>
+          </a:p>
+        </p:txBody>
+      </p:sp>
+      <p:sp>
+        <p:nvSpPr>
+          <p:cNvPr id="6" name="TextBox 5"/>
+          <p:cNvSpPr txBox="1"/>
+          <p:nvPr/>
+        </p:nvSpPr>
+        <p:spPr>
+          <a:xfrm>
+            <a:off x="10454335" y="6355080"/>
+            <a:ext cx="914400" cy="274320"/>
+          </a:xfrm>
+          <a:prstGeom prst="rect">
+            <a:avLst/>
+          </a:prstGeom>
+          <a:noFill/>
+        </p:spPr>
+        <p:txBody>
+          <a:bodyPr wrap="square" anchor="t" lIns="0" rIns="0" tIns="0" bIns="0">
+            <a:spAutoFit/>
+          </a:bodyPr>
+          <a:lstStyle/>
+          <a:p>
+            <a:pPr algn="r">
+              <a:lnSpc>
+                <a:spcPct val="115000"/>
+              </a:lnSpc>
+            </a:pPr>
+            <a:r>
+              <a:rPr sz="1100" b="0">
+                <a:solidFill>
+                  <a:srgbClr val="6B7480"/>
+                </a:solidFill>
+                <a:latin typeface="Lato"/>
+              </a:rPr>
+              <a:t>11</a:t>
             </a:r>
           </a:p>
         </p:txBody>
@@ -4128,20 +4673,98 @@
       <p:grpSpPr/>
       <p:sp>
         <p:nvSpPr>
-          <p:cNvPr id="2" name="Rectangle 1"/>
+          <p:cNvPr id="2" name="TextBox 1"/>
+          <p:cNvSpPr txBox="1"/>
+          <p:nvPr/>
+        </p:nvSpPr>
+        <p:spPr>
+          <a:xfrm>
+            <a:off x="822960" y="685800"/>
+            <a:ext cx="10545775" cy="274320"/>
+          </a:xfrm>
+          <a:prstGeom prst="rect">
+            <a:avLst/>
+          </a:prstGeom>
+          <a:noFill/>
+        </p:spPr>
+        <p:txBody>
+          <a:bodyPr wrap="square" anchor="t" lIns="0" rIns="0" tIns="0" bIns="0">
+            <a:spAutoFit/>
+          </a:bodyPr>
+          <a:lstStyle/>
+          <a:p>
+            <a:pPr algn="l">
+              <a:lnSpc>
+                <a:spcPct val="115000"/>
+              </a:lnSpc>
+            </a:pPr>
+            <a:r>
+              <a:rPr sz="1200" b="1">
+                <a:solidFill>
+                  <a:srgbClr val="1A5FB4"/>
+                </a:solidFill>
+                <a:latin typeface="Lato"/>
+              </a:rPr>
+              <a:t>THE PROBLEM</a:t>
+            </a:r>
+          </a:p>
+        </p:txBody>
+      </p:sp>
+      <p:sp>
+        <p:nvSpPr>
+          <p:cNvPr id="3" name="TextBox 2"/>
+          <p:cNvSpPr txBox="1"/>
+          <p:nvPr/>
+        </p:nvSpPr>
+        <p:spPr>
+          <a:xfrm>
+            <a:off x="822960" y="1005840"/>
+            <a:ext cx="10545775" cy="822960"/>
+          </a:xfrm>
+          <a:prstGeom prst="rect">
+            <a:avLst/>
+          </a:prstGeom>
+          <a:noFill/>
+        </p:spPr>
+        <p:txBody>
+          <a:bodyPr wrap="square" anchor="t" lIns="0" rIns="0" tIns="0" bIns="0">
+            <a:spAutoFit/>
+          </a:bodyPr>
+          <a:lstStyle/>
+          <a:p>
+            <a:pPr algn="l">
+              <a:lnSpc>
+                <a:spcPct val="115000"/>
+              </a:lnSpc>
+            </a:pPr>
+            <a:r>
+              <a:rPr sz="3400" b="1">
+                <a:solidFill>
+                  <a:srgbClr val="141A22"/>
+                </a:solidFill>
+                <a:latin typeface="Lato"/>
+              </a:rPr>
+              <a:t>Weeks of waiting, two kinds of people</a:t>
+            </a:r>
+          </a:p>
+        </p:txBody>
+      </p:sp>
+      <p:sp>
+        <p:nvSpPr>
+          <p:cNvPr id="4" name="Rectangle 3"/>
           <p:cNvSpPr/>
           <p:nvPr/>
         </p:nvSpPr>
         <p:spPr>
           <a:xfrm>
-            <a:off x="0" y="0"/>
-            <a:ext cx="12191695" cy="1051560"/>
+            <a:off x="822960" y="1874520"/>
+            <a:ext cx="640080" cy="45720"/>
           </a:xfrm>
           <a:prstGeom prst="rect">
             <a:avLst/>
           </a:prstGeom>
           <a:solidFill>
-            <a:srgbClr val="1F3A5F"/>
+            <a:srgbClr val="1A5FB4"/>
           </a:solidFill>
           <a:ln>
             <a:noFill/>
@@ -4172,14 +4795,14 @@
       </p:sp>
       <p:sp>
         <p:nvSpPr>
-          <p:cNvPr id="3" name="TextBox 2"/>
+          <p:cNvPr id="5" name="TextBox 4"/>
           <p:cNvSpPr txBox="1"/>
           <p:nvPr/>
         </p:nvSpPr>
         <p:spPr>
           <a:xfrm>
-            <a:off x="548640" y="182880"/>
-            <a:ext cx="8412480" cy="548640"/>
+            <a:off x="822960" y="6355080"/>
+            <a:ext cx="7315200" cy="274320"/>
           </a:xfrm>
           <a:prstGeom prst="rect">
             <a:avLst/>
@@ -4187,34 +4810,38 @@
           <a:noFill/>
         </p:spPr>
         <p:txBody>
-          <a:bodyPr wrap="square" anchor="t" lIns="45720" rIns="45720">
+          <a:bodyPr wrap="square" anchor="t" lIns="0" rIns="0" tIns="0" bIns="0">
             <a:spAutoFit/>
           </a:bodyPr>
           <a:lstStyle/>
           <a:p>
-            <a:pPr algn="l"/>
-            <a:r>
-              <a:rPr sz="2600" b="1">
-                <a:solidFill>
-                  <a:srgbClr val="FFFFFF"/>
-                </a:solidFill>
-                <a:latin typeface="Inter"/>
+            <a:pPr algn="l">
+              <a:lnSpc>
+                <a:spcPct val="115000"/>
+              </a:lnSpc>
+            </a:pPr>
+            <a:r>
+              <a:rPr sz="1100" b="0">
+                <a:solidFill>
+                  <a:srgbClr val="6B7480"/>
+                </a:solidFill>
+                <a:latin typeface="Lato"/>
               </a:rPr>
-              <a:t>The problem: slow access, two kinds of people</a:t>
-            </a:r>
-          </a:p>
-        </p:txBody>
-      </p:sp>
-      <p:sp>
-        <p:nvSpPr>
-          <p:cNvPr id="4" name="TextBox 3"/>
+              <a:t>HalfSecuredTeam  ·  EHDS Track 3</a:t>
+            </a:r>
+          </a:p>
+        </p:txBody>
+      </p:sp>
+      <p:sp>
+        <p:nvSpPr>
+          <p:cNvPr id="6" name="TextBox 5"/>
           <p:cNvSpPr txBox="1"/>
           <p:nvPr/>
         </p:nvSpPr>
         <p:spPr>
           <a:xfrm>
-            <a:off x="548640" y="658368"/>
-            <a:ext cx="8412480" cy="365760"/>
+            <a:off x="10454335" y="6355080"/>
+            <a:ext cx="914400" cy="274320"/>
           </a:xfrm>
           <a:prstGeom prst="rect">
             <a:avLst/>
@@ -4222,82 +4849,47 @@
           <a:noFill/>
         </p:spPr>
         <p:txBody>
-          <a:bodyPr wrap="square" anchor="t" lIns="45720" rIns="45720">
+          <a:bodyPr wrap="square" anchor="t" lIns="0" rIns="0" tIns="0" bIns="0">
             <a:spAutoFit/>
           </a:bodyPr>
           <a:lstStyle/>
           <a:p>
-            <a:pPr algn="l"/>
-            <a:r>
-              <a:rPr sz="1300" b="0">
-                <a:solidFill>
-                  <a:srgbClr val="DBE6F3"/>
-                </a:solidFill>
-                <a:latin typeface="Inter"/>
+            <a:pPr algn="r">
+              <a:lnSpc>
+                <a:spcPct val="115000"/>
+              </a:lnSpc>
+            </a:pPr>
+            <a:r>
+              <a:rPr sz="1100" b="0">
+                <a:solidFill>
+                  <a:srgbClr val="6B7480"/>
+                </a:solidFill>
+                <a:latin typeface="Lato"/>
               </a:rPr>
-              <a:t>researchers, engineers and the access body</a:t>
-            </a:r>
-          </a:p>
-        </p:txBody>
-      </p:sp>
-      <p:sp>
-        <p:nvSpPr>
-          <p:cNvPr id="5" name="TextBox 4"/>
-          <p:cNvSpPr txBox="1"/>
-          <p:nvPr/>
-        </p:nvSpPr>
-        <p:spPr>
-          <a:xfrm>
-            <a:off x="8503920" y="320040"/>
-            <a:ext cx="3200400" cy="457200"/>
-          </a:xfrm>
-          <a:prstGeom prst="rect">
-            <a:avLst/>
-          </a:prstGeom>
-          <a:noFill/>
-        </p:spPr>
-        <p:txBody>
-          <a:bodyPr wrap="square" anchor="t" lIns="45720" rIns="45720">
-            <a:spAutoFit/>
-          </a:bodyPr>
-          <a:lstStyle/>
-          <a:p>
-            <a:pPr algn="r"/>
-            <a:r>
-              <a:rPr sz="1200" b="0">
-                <a:solidFill>
-                  <a:srgbClr val="DBE6F3"/>
-                </a:solidFill>
-                <a:latin typeface="Inter"/>
-              </a:rPr>
-              <a:t>HalfSecuredTeam · Track 3</a:t>
-            </a:r>
-          </a:p>
-        </p:txBody>
-      </p:sp>
-      <p:sp>
-        <p:nvSpPr>
-          <p:cNvPr id="6" name="Rounded Rectangle 5"/>
+              <a:t>2</a:t>
+            </a:r>
+          </a:p>
+        </p:txBody>
+      </p:sp>
+      <p:sp>
+        <p:nvSpPr>
+          <p:cNvPr id="7" name="Rectangle 6"/>
           <p:cNvSpPr/>
           <p:nvPr/>
         </p:nvSpPr>
         <p:spPr>
           <a:xfrm>
-            <a:off x="548640" y="1463040"/>
-            <a:ext cx="3474720" cy="3291840"/>
-          </a:xfrm>
-          <a:prstGeom prst="roundRect">
-            <a:avLst>
-              <a:gd name="adj" fmla="val 8000"/>
-            </a:avLst>
+            <a:off x="822960" y="2834640"/>
+            <a:ext cx="457200" cy="54864"/>
+          </a:xfrm>
+          <a:prstGeom prst="rect">
+            <a:avLst/>
           </a:prstGeom>
           <a:solidFill>
-            <a:srgbClr val="F6F7F9"/>
+            <a:srgbClr val="1A5FB4"/>
           </a:solidFill>
-          <a:ln w="19050">
-            <a:solidFill>
-              <a:srgbClr val="1565C0"/>
-            </a:solidFill>
+          <a:ln>
+            <a:noFill/>
           </a:ln>
           <a:effectLst/>
         </p:spPr>
@@ -4325,14 +4917,14 @@
       </p:sp>
       <p:sp>
         <p:nvSpPr>
-          <p:cNvPr id="7" name="TextBox 6"/>
+          <p:cNvPr id="8" name="TextBox 7"/>
           <p:cNvSpPr txBox="1"/>
           <p:nvPr/>
         </p:nvSpPr>
         <p:spPr>
           <a:xfrm>
-            <a:off x="777240" y="1645920"/>
-            <a:ext cx="3017520" cy="457200"/>
+            <a:off x="822960" y="3108960"/>
+            <a:ext cx="3210458" cy="1005840"/>
           </a:xfrm>
           <a:prstGeom prst="rect">
             <a:avLst/>
@@ -4340,18 +4932,22 @@
           <a:noFill/>
         </p:spPr>
         <p:txBody>
-          <a:bodyPr wrap="square" anchor="t" lIns="45720" rIns="45720">
+          <a:bodyPr wrap="square" anchor="t" lIns="0" rIns="0" tIns="0" bIns="0">
             <a:spAutoFit/>
           </a:bodyPr>
           <a:lstStyle/>
           <a:p>
-            <a:pPr algn="l"/>
-            <a:r>
-              <a:rPr sz="2000" b="1">
-                <a:solidFill>
-                  <a:srgbClr val="1565C0"/>
-                </a:solidFill>
-                <a:latin typeface="Inter"/>
+            <a:pPr algn="l">
+              <a:lnSpc>
+                <a:spcPct val="110000"/>
+              </a:lnSpc>
+            </a:pPr>
+            <a:r>
+              <a:rPr sz="2400" b="1">
+                <a:solidFill>
+                  <a:srgbClr val="141A22"/>
+                </a:solidFill>
+                <a:latin typeface="Lato"/>
               </a:rPr>
               <a:t>Researchers</a:t>
             </a:r>
@@ -4360,14 +4956,14 @@
       </p:sp>
       <p:sp>
         <p:nvSpPr>
-          <p:cNvPr id="8" name="TextBox 7"/>
+          <p:cNvPr id="9" name="TextBox 8"/>
           <p:cNvSpPr txBox="1"/>
           <p:nvPr/>
         </p:nvSpPr>
         <p:spPr>
           <a:xfrm>
-            <a:off x="777240" y="2194560"/>
-            <a:ext cx="3017520" cy="2377440"/>
+            <a:off x="822960" y="4160520"/>
+            <a:ext cx="3210458" cy="2286000"/>
           </a:xfrm>
           <a:prstGeom prst="rect">
             <a:avLst/>
@@ -4375,83 +4971,47 @@
           <a:noFill/>
         </p:spPr>
         <p:txBody>
-          <a:bodyPr wrap="square">
+          <a:bodyPr wrap="square" anchor="t" lIns="0" rIns="0" tIns="0" bIns="0">
             <a:spAutoFit/>
           </a:bodyPr>
           <a:lstStyle/>
           <a:p>
-            <a:pPr>
-              <a:spcAft>
-                <a:spcPts val="600"/>
-              </a:spcAft>
+            <a:pPr algn="l">
+              <a:lnSpc>
+                <a:spcPct val="135000"/>
+              </a:lnSpc>
             </a:pPr>
             <a:r>
-              <a:rPr sz="1600" b="1">
-                <a:solidFill>
-                  <a:srgbClr val="1F2A37"/>
-                </a:solidFill>
-                <a:latin typeface="Inter"/>
+              <a:rPr sz="1800" b="0">
+                <a:solidFill>
+                  <a:srgbClr val="6B7480"/>
+                </a:solidFill>
+                <a:latin typeface="Lato"/>
               </a:rPr>
-              <a:t>•  know the medicine and the question</a:t>
-            </a:r>
-          </a:p>
-          <a:p>
-            <a:pPr>
-              <a:spcAft>
-                <a:spcPts val="600"/>
-              </a:spcAft>
-            </a:pPr>
-            <a:r>
-              <a:rPr sz="1600" b="1">
-                <a:solidFill>
-                  <a:srgbClr val="1F2A37"/>
-                </a:solidFill>
-                <a:latin typeface="Inter"/>
-              </a:rPr>
-              <a:t>•  do not write database queries</a:t>
-            </a:r>
-          </a:p>
-          <a:p>
-            <a:pPr>
-              <a:spcAft>
-                <a:spcPts val="600"/>
-              </a:spcAft>
-            </a:pPr>
-            <a:r>
-              <a:rPr sz="1600" b="1">
-                <a:solidFill>
-                  <a:srgbClr val="1F2A37"/>
-                </a:solidFill>
-                <a:latin typeface="Inter"/>
-              </a:rPr>
-              <a:t>•  often only know what they want to achieve</a:t>
-            </a:r>
-          </a:p>
-        </p:txBody>
-      </p:sp>
-      <p:sp>
-        <p:nvSpPr>
-          <p:cNvPr id="9" name="Rounded Rectangle 8"/>
+              <a:t>know the medicine and the question — not how to query a database</a:t>
+            </a:r>
+          </a:p>
+        </p:txBody>
+      </p:sp>
+      <p:sp>
+        <p:nvSpPr>
+          <p:cNvPr id="10" name="Rectangle 9"/>
           <p:cNvSpPr/>
           <p:nvPr/>
         </p:nvSpPr>
         <p:spPr>
           <a:xfrm>
-            <a:off x="4343400" y="1463040"/>
-            <a:ext cx="3474720" cy="3291840"/>
-          </a:xfrm>
-          <a:prstGeom prst="roundRect">
-            <a:avLst>
-              <a:gd name="adj" fmla="val 8000"/>
-            </a:avLst>
+            <a:off x="4490618" y="2834640"/>
+            <a:ext cx="457200" cy="54864"/>
+          </a:xfrm>
+          <a:prstGeom prst="rect">
+            <a:avLst/>
           </a:prstGeom>
           <a:solidFill>
-            <a:srgbClr val="F6F7F9"/>
+            <a:srgbClr val="1A5FB4"/>
           </a:solidFill>
-          <a:ln w="19050">
-            <a:solidFill>
-              <a:srgbClr val="F0B429"/>
-            </a:solidFill>
+          <a:ln>
+            <a:noFill/>
           </a:ln>
           <a:effectLst/>
         </p:spPr>
@@ -4479,14 +5039,14 @@
       </p:sp>
       <p:sp>
         <p:nvSpPr>
-          <p:cNvPr id="10" name="TextBox 9"/>
+          <p:cNvPr id="11" name="TextBox 10"/>
           <p:cNvSpPr txBox="1"/>
           <p:nvPr/>
         </p:nvSpPr>
         <p:spPr>
           <a:xfrm>
-            <a:off x="4572000" y="1645920"/>
-            <a:ext cx="3017520" cy="457200"/>
+            <a:off x="4490618" y="3108960"/>
+            <a:ext cx="3210458" cy="1005840"/>
           </a:xfrm>
           <a:prstGeom prst="rect">
             <a:avLst/>
@@ -4494,18 +5054,22 @@
           <a:noFill/>
         </p:spPr>
         <p:txBody>
-          <a:bodyPr wrap="square" anchor="t" lIns="45720" rIns="45720">
+          <a:bodyPr wrap="square" anchor="t" lIns="0" rIns="0" tIns="0" bIns="0">
             <a:spAutoFit/>
           </a:bodyPr>
           <a:lstStyle/>
           <a:p>
-            <a:pPr algn="l"/>
-            <a:r>
-              <a:rPr sz="2000" b="1">
-                <a:solidFill>
-                  <a:srgbClr val="F0B429"/>
-                </a:solidFill>
-                <a:latin typeface="Inter"/>
+            <a:pPr algn="l">
+              <a:lnSpc>
+                <a:spcPct val="110000"/>
+              </a:lnSpc>
+            </a:pPr>
+            <a:r>
+              <a:rPr sz="2400" b="1">
+                <a:solidFill>
+                  <a:srgbClr val="141A22"/>
+                </a:solidFill>
+                <a:latin typeface="Lato"/>
               </a:rPr>
               <a:t>Engineers</a:t>
             </a:r>
@@ -4514,14 +5078,14 @@
       </p:sp>
       <p:sp>
         <p:nvSpPr>
-          <p:cNvPr id="11" name="TextBox 10"/>
+          <p:cNvPr id="12" name="TextBox 11"/>
           <p:cNvSpPr txBox="1"/>
           <p:nvPr/>
         </p:nvSpPr>
         <p:spPr>
           <a:xfrm>
-            <a:off x="4572000" y="2194560"/>
-            <a:ext cx="3017520" cy="2377440"/>
+            <a:off x="4490618" y="4160520"/>
+            <a:ext cx="3210458" cy="2286000"/>
           </a:xfrm>
           <a:prstGeom prst="rect">
             <a:avLst/>
@@ -4529,83 +5093,47 @@
           <a:noFill/>
         </p:spPr>
         <p:txBody>
-          <a:bodyPr wrap="square">
+          <a:bodyPr wrap="square" anchor="t" lIns="0" rIns="0" tIns="0" bIns="0">
             <a:spAutoFit/>
           </a:bodyPr>
           <a:lstStyle/>
           <a:p>
-            <a:pPr>
-              <a:spcAft>
-                <a:spcPts val="600"/>
-              </a:spcAft>
+            <a:pPr algn="l">
+              <a:lnSpc>
+                <a:spcPct val="135000"/>
+              </a:lnSpc>
             </a:pPr>
             <a:r>
-              <a:rPr sz="1600" b="1">
-                <a:solidFill>
-                  <a:srgbClr val="1F2A37"/>
-                </a:solidFill>
-                <a:latin typeface="Inter"/>
+              <a:rPr sz="1800" b="0">
+                <a:solidFill>
+                  <a:srgbClr val="6B7480"/>
+                </a:solidFill>
+                <a:latin typeface="Lato"/>
               </a:rPr>
-              <a:t>•  write the queries</a:t>
-            </a:r>
-          </a:p>
-          <a:p>
-            <a:pPr>
-              <a:spcAft>
-                <a:spcPts val="600"/>
-              </a:spcAft>
-            </a:pPr>
-            <a:r>
-              <a:rPr sz="1600" b="1">
-                <a:solidFill>
-                  <a:srgbClr val="1F2A37"/>
-                </a:solidFill>
-                <a:latin typeface="Inter"/>
-              </a:rPr>
-              <a:t>•  do not know ICD-10 from ATC</a:t>
-            </a:r>
-          </a:p>
-          <a:p>
-            <a:pPr>
-              <a:spcAft>
-                <a:spcPts val="600"/>
-              </a:spcAft>
-            </a:pPr>
-            <a:r>
-              <a:rPr sz="1600" b="1">
-                <a:solidFill>
-                  <a:srgbClr val="1F2A37"/>
-                </a:solidFill>
-                <a:latin typeface="Inter"/>
-              </a:rPr>
-              <a:t>•  cannot judge if a purpose is lawful</a:t>
-            </a:r>
-          </a:p>
-        </p:txBody>
-      </p:sp>
-      <p:sp>
-        <p:nvSpPr>
-          <p:cNvPr id="12" name="Rounded Rectangle 11"/>
+              <a:t>write the query — but not the medical codes, nor whether the purpose is lawful</a:t>
+            </a:r>
+          </a:p>
+        </p:txBody>
+      </p:sp>
+      <p:sp>
+        <p:nvSpPr>
+          <p:cNvPr id="13" name="Rectangle 12"/>
           <p:cNvSpPr/>
           <p:nvPr/>
         </p:nvSpPr>
         <p:spPr>
           <a:xfrm>
-            <a:off x="8138160" y="1463040"/>
-            <a:ext cx="3474720" cy="3291840"/>
-          </a:xfrm>
-          <a:prstGeom prst="roundRect">
-            <a:avLst>
-              <a:gd name="adj" fmla="val 8000"/>
-            </a:avLst>
+            <a:off x="8158276" y="2834640"/>
+            <a:ext cx="457200" cy="54864"/>
+          </a:xfrm>
+          <a:prstGeom prst="rect">
+            <a:avLst/>
           </a:prstGeom>
           <a:solidFill>
-            <a:srgbClr val="F6F7F9"/>
+            <a:srgbClr val="1A5FB4"/>
           </a:solidFill>
-          <a:ln w="19050">
-            <a:solidFill>
-              <a:srgbClr val="C62828"/>
-            </a:solidFill>
+          <a:ln>
+            <a:noFill/>
           </a:ln>
           <a:effectLst/>
         </p:spPr>
@@ -4633,14 +5161,14 @@
       </p:sp>
       <p:sp>
         <p:nvSpPr>
-          <p:cNvPr id="13" name="TextBox 12"/>
+          <p:cNvPr id="14" name="TextBox 13"/>
           <p:cNvSpPr txBox="1"/>
           <p:nvPr/>
         </p:nvSpPr>
         <p:spPr>
           <a:xfrm>
-            <a:off x="8366760" y="1645920"/>
-            <a:ext cx="3017520" cy="457200"/>
+            <a:off x="8158276" y="3108960"/>
+            <a:ext cx="3210458" cy="1005840"/>
           </a:xfrm>
           <a:prstGeom prst="rect">
             <a:avLst/>
@@ -4648,18 +5176,22 @@
           <a:noFill/>
         </p:spPr>
         <p:txBody>
-          <a:bodyPr wrap="square" anchor="t" lIns="45720" rIns="45720">
+          <a:bodyPr wrap="square" anchor="t" lIns="0" rIns="0" tIns="0" bIns="0">
             <a:spAutoFit/>
           </a:bodyPr>
           <a:lstStyle/>
           <a:p>
-            <a:pPr algn="l"/>
-            <a:r>
-              <a:rPr sz="2000" b="1">
-                <a:solidFill>
-                  <a:srgbClr val="C62828"/>
-                </a:solidFill>
-                <a:latin typeface="Inter"/>
+            <a:pPr algn="l">
+              <a:lnSpc>
+                <a:spcPct val="110000"/>
+              </a:lnSpc>
+            </a:pPr>
+            <a:r>
+              <a:rPr sz="2400" b="1">
+                <a:solidFill>
+                  <a:srgbClr val="141A22"/>
+                </a:solidFill>
+                <a:latin typeface="Lato"/>
               </a:rPr>
               <a:t>The access body</a:t>
             </a:r>
@@ -4668,14 +5200,14 @@
       </p:sp>
       <p:sp>
         <p:nvSpPr>
-          <p:cNvPr id="14" name="TextBox 13"/>
+          <p:cNvPr id="15" name="TextBox 14"/>
           <p:cNvSpPr txBox="1"/>
           <p:nvPr/>
         </p:nvSpPr>
         <p:spPr>
           <a:xfrm>
-            <a:off x="8366760" y="2194560"/>
-            <a:ext cx="3017520" cy="2377440"/>
+            <a:off x="8158276" y="4160520"/>
+            <a:ext cx="3210458" cy="2286000"/>
           </a:xfrm>
           <a:prstGeom prst="rect">
             <a:avLst/>
@@ -4683,103 +5215,25 @@
           <a:noFill/>
         </p:spPr>
         <p:txBody>
-          <a:bodyPr wrap="square">
+          <a:bodyPr wrap="square" anchor="t" lIns="0" rIns="0" tIns="0" bIns="0">
             <a:spAutoFit/>
           </a:bodyPr>
           <a:lstStyle/>
           <a:p>
-            <a:pPr>
-              <a:spcAft>
-                <a:spcPts val="600"/>
-              </a:spcAft>
+            <a:pPr algn="l">
+              <a:lnSpc>
+                <a:spcPct val="135000"/>
+              </a:lnSpc>
             </a:pPr>
             <a:r>
-              <a:rPr sz="1600" b="1">
-                <a:solidFill>
-                  <a:srgbClr val="1F2A37"/>
-                </a:solidFill>
-                <a:latin typeface="Inter"/>
+              <a:rPr sz="1800" b="0">
+                <a:solidFill>
+                  <a:srgbClr val="6B7480"/>
+                </a:solidFill>
+                <a:latin typeface="Lato"/>
               </a:rPr>
-              <a:t>•  must decide every request against the law</a:t>
-            </a:r>
-          </a:p>
-          <a:p>
-            <a:pPr>
-              <a:spcAft>
-                <a:spcPts val="600"/>
-              </a:spcAft>
-            </a:pPr>
-            <a:r>
-              <a:rPr sz="1600" b="1">
-                <a:solidFill>
-                  <a:srgbClr val="1F2A37"/>
-                </a:solidFill>
-                <a:latin typeface="Inter"/>
-              </a:rPr>
-              <a:t>•  must protect patients: small groups, opt-outs</a:t>
-            </a:r>
-          </a:p>
-          <a:p>
-            <a:pPr>
-              <a:spcAft>
-                <a:spcPts val="600"/>
-              </a:spcAft>
-            </a:pPr>
-            <a:r>
-              <a:rPr sz="1600" b="1">
-                <a:solidFill>
-                  <a:srgbClr val="1F2A37"/>
-                </a:solidFill>
-                <a:latin typeface="Inter"/>
-              </a:rPr>
-              <a:t>•  today: weeks of manual work</a:t>
-            </a:r>
-          </a:p>
-        </p:txBody>
-      </p:sp>
-      <p:sp>
-        <p:nvSpPr>
-          <p:cNvPr id="15" name="Rounded Rectangle 14"/>
-          <p:cNvSpPr/>
-          <p:nvPr/>
-        </p:nvSpPr>
-        <p:spPr>
-          <a:xfrm>
-            <a:off x="548640" y="5074920"/>
-            <a:ext cx="11064240" cy="1005840"/>
-          </a:xfrm>
-          <a:prstGeom prst="roundRect">
-            <a:avLst>
-              <a:gd name="adj" fmla="val 8000"/>
-            </a:avLst>
-          </a:prstGeom>
-          <a:solidFill>
-            <a:srgbClr val="1F3A5F"/>
-          </a:solidFill>
-          <a:ln>
-            <a:noFill/>
-          </a:ln>
-          <a:effectLst/>
-        </p:spPr>
-        <p:style>
-          <a:lnRef idx="1">
-            <a:schemeClr val="accent1"/>
-          </a:lnRef>
-          <a:fillRef idx="3">
-            <a:schemeClr val="accent1"/>
-          </a:fillRef>
-          <a:effectRef idx="2">
-            <a:schemeClr val="accent1"/>
-          </a:effectRef>
-          <a:fontRef idx="minor">
-            <a:schemeClr val="lt1"/>
-          </a:fontRef>
-        </p:style>
-        <p:txBody>
-          <a:bodyPr rtlCol="0" anchor="ctr"/>
-          <a:lstStyle/>
-          <a:p>
-            <a:pPr algn="ctr"/>
+              <a:t>must check every request against the regulation and protect patients</a:t>
+            </a:r>
           </a:p>
         </p:txBody>
       </p:sp>
@@ -4791,8 +5245,8 @@
         </p:nvSpPr>
         <p:spPr>
           <a:xfrm>
-            <a:off x="822960" y="5120640"/>
-            <a:ext cx="10515600" cy="914400"/>
+            <a:off x="822960" y="5577840"/>
+            <a:ext cx="10545775" cy="457200"/>
           </a:xfrm>
           <a:prstGeom prst="rect">
             <a:avLst/>
@@ -4800,55 +5254,24 @@
           <a:noFill/>
         </p:spPr>
         <p:txBody>
-          <a:bodyPr wrap="square" anchor="ctr" lIns="45720" rIns="45720">
+          <a:bodyPr wrap="square" anchor="t" lIns="0" rIns="0" tIns="0" bIns="0">
             <a:spAutoFit/>
           </a:bodyPr>
           <a:lstStyle/>
           <a:p>
-            <a:pPr algn="l"/>
-            <a:r>
-              <a:rPr sz="2000" b="1">
-                <a:solidFill>
-                  <a:srgbClr val="FFFFFF"/>
-                </a:solidFill>
-                <a:latin typeface="Inter"/>
+            <a:pPr algn="l">
+              <a:lnSpc>
+                <a:spcPct val="115000"/>
+              </a:lnSpc>
+            </a:pPr>
+            <a:r>
+              <a:rPr sz="2400" b="1">
+                <a:solidFill>
+                  <a:srgbClr val="1A5FB4"/>
+                </a:solidFill>
+                <a:latin typeface="Lato"/>
               </a:rPr>
-              <a:t>We sit at the intersection: plain words in, a lawful, explained, privacy-safe answer out.</a:t>
-            </a:r>
-          </a:p>
-        </p:txBody>
-      </p:sp>
-      <p:sp>
-        <p:nvSpPr>
-          <p:cNvPr id="17" name="TextBox 16"/>
-          <p:cNvSpPr txBox="1"/>
-          <p:nvPr/>
-        </p:nvSpPr>
-        <p:spPr>
-          <a:xfrm>
-            <a:off x="548640" y="6446520"/>
-            <a:ext cx="10972800" cy="274320"/>
-          </a:xfrm>
-          <a:prstGeom prst="rect">
-            <a:avLst/>
-          </a:prstGeom>
-          <a:noFill/>
-        </p:spPr>
-        <p:txBody>
-          <a:bodyPr wrap="square" anchor="t" lIns="45720" rIns="45720">
-            <a:spAutoFit/>
-          </a:bodyPr>
-          <a:lstStyle/>
-          <a:p>
-            <a:pPr algn="l"/>
-            <a:r>
-              <a:rPr sz="1000" b="0">
-                <a:solidFill>
-                  <a:srgbClr val="5B6472"/>
-                </a:solidFill>
-                <a:latin typeface="Inter"/>
-              </a:rPr>
-              <a:t>EHDS · Regulation (EU) 2025/327 · synthetic data only</a:t>
+              <a:t>We sit at the intersection.</a:t>
             </a:r>
           </a:p>
         </p:txBody>
@@ -4873,20 +5296,98 @@
       <p:grpSpPr/>
       <p:sp>
         <p:nvSpPr>
-          <p:cNvPr id="2" name="Rectangle 1"/>
+          <p:cNvPr id="2" name="TextBox 1"/>
+          <p:cNvSpPr txBox="1"/>
+          <p:nvPr/>
+        </p:nvSpPr>
+        <p:spPr>
+          <a:xfrm>
+            <a:off x="822960" y="685800"/>
+            <a:ext cx="10545775" cy="274320"/>
+          </a:xfrm>
+          <a:prstGeom prst="rect">
+            <a:avLst/>
+          </a:prstGeom>
+          <a:noFill/>
+        </p:spPr>
+        <p:txBody>
+          <a:bodyPr wrap="square" anchor="t" lIns="0" rIns="0" tIns="0" bIns="0">
+            <a:spAutoFit/>
+          </a:bodyPr>
+          <a:lstStyle/>
+          <a:p>
+            <a:pPr algn="l">
+              <a:lnSpc>
+                <a:spcPct val="115000"/>
+              </a:lnSpc>
+            </a:pPr>
+            <a:r>
+              <a:rPr sz="1200" b="1">
+                <a:solidFill>
+                  <a:srgbClr val="1A5FB4"/>
+                </a:solidFill>
+                <a:latin typeface="Lato"/>
+              </a:rPr>
+              <a:t>OUR APPROACH</a:t>
+            </a:r>
+          </a:p>
+        </p:txBody>
+      </p:sp>
+      <p:sp>
+        <p:nvSpPr>
+          <p:cNvPr id="3" name="TextBox 2"/>
+          <p:cNvSpPr txBox="1"/>
+          <p:nvPr/>
+        </p:nvSpPr>
+        <p:spPr>
+          <a:xfrm>
+            <a:off x="822960" y="1005840"/>
+            <a:ext cx="10545775" cy="822960"/>
+          </a:xfrm>
+          <a:prstGeom prst="rect">
+            <a:avLst/>
+          </a:prstGeom>
+          <a:noFill/>
+        </p:spPr>
+        <p:txBody>
+          <a:bodyPr wrap="square" anchor="t" lIns="0" rIns="0" tIns="0" bIns="0">
+            <a:spAutoFit/>
+          </a:bodyPr>
+          <a:lstStyle/>
+          <a:p>
+            <a:pPr algn="l">
+              <a:lnSpc>
+                <a:spcPct val="115000"/>
+              </a:lnSpc>
+            </a:pPr>
+            <a:r>
+              <a:rPr sz="3400" b="1">
+                <a:solidFill>
+                  <a:srgbClr val="141A22"/>
+                </a:solidFill>
+                <a:latin typeface="Lato"/>
+              </a:rPr>
+              <a:t>Four ideas</a:t>
+            </a:r>
+          </a:p>
+        </p:txBody>
+      </p:sp>
+      <p:sp>
+        <p:nvSpPr>
+          <p:cNvPr id="4" name="Rectangle 3"/>
           <p:cNvSpPr/>
           <p:nvPr/>
         </p:nvSpPr>
         <p:spPr>
           <a:xfrm>
-            <a:off x="0" y="0"/>
-            <a:ext cx="12191695" cy="1051560"/>
+            <a:off x="822960" y="1874520"/>
+            <a:ext cx="640080" cy="45720"/>
           </a:xfrm>
           <a:prstGeom prst="rect">
             <a:avLst/>
           </a:prstGeom>
           <a:solidFill>
-            <a:srgbClr val="1F3A5F"/>
+            <a:srgbClr val="1A5FB4"/>
           </a:solidFill>
           <a:ln>
             <a:noFill/>
@@ -4917,14 +5418,14 @@
       </p:sp>
       <p:sp>
         <p:nvSpPr>
-          <p:cNvPr id="3" name="TextBox 2"/>
+          <p:cNvPr id="5" name="TextBox 4"/>
           <p:cNvSpPr txBox="1"/>
           <p:nvPr/>
         </p:nvSpPr>
         <p:spPr>
           <a:xfrm>
-            <a:off x="548640" y="182880"/>
-            <a:ext cx="8412480" cy="548640"/>
+            <a:off x="822960" y="6355080"/>
+            <a:ext cx="7315200" cy="274320"/>
           </a:xfrm>
           <a:prstGeom prst="rect">
             <a:avLst/>
@@ -4932,34 +5433,38 @@
           <a:noFill/>
         </p:spPr>
         <p:txBody>
-          <a:bodyPr wrap="square" anchor="t" lIns="45720" rIns="45720">
+          <a:bodyPr wrap="square" anchor="t" lIns="0" rIns="0" tIns="0" bIns="0">
             <a:spAutoFit/>
           </a:bodyPr>
           <a:lstStyle/>
           <a:p>
-            <a:pPr algn="l"/>
-            <a:r>
-              <a:rPr sz="2600" b="1">
-                <a:solidFill>
-                  <a:srgbClr val="FFFFFF"/>
-                </a:solidFill>
-                <a:latin typeface="Inter"/>
+            <a:pPr algn="l">
+              <a:lnSpc>
+                <a:spcPct val="115000"/>
+              </a:lnSpc>
+            </a:pPr>
+            <a:r>
+              <a:rPr sz="1100" b="0">
+                <a:solidFill>
+                  <a:srgbClr val="6B7480"/>
+                </a:solidFill>
+                <a:latin typeface="Lato"/>
               </a:rPr>
-              <a:t>Our approach</a:t>
-            </a:r>
-          </a:p>
-        </p:txBody>
-      </p:sp>
-      <p:sp>
-        <p:nvSpPr>
-          <p:cNvPr id="4" name="TextBox 3"/>
+              <a:t>HalfSecuredTeam  ·  EHDS Track 3</a:t>
+            </a:r>
+          </a:p>
+        </p:txBody>
+      </p:sp>
+      <p:sp>
+        <p:nvSpPr>
+          <p:cNvPr id="6" name="TextBox 5"/>
           <p:cNvSpPr txBox="1"/>
           <p:nvPr/>
         </p:nvSpPr>
         <p:spPr>
           <a:xfrm>
-            <a:off x="548640" y="658368"/>
-            <a:ext cx="8412480" cy="365760"/>
+            <a:off x="10454335" y="6355080"/>
+            <a:ext cx="914400" cy="274320"/>
           </a:xfrm>
           <a:prstGeom prst="rect">
             <a:avLst/>
@@ -4967,82 +5472,47 @@
           <a:noFill/>
         </p:spPr>
         <p:txBody>
-          <a:bodyPr wrap="square" anchor="t" lIns="45720" rIns="45720">
+          <a:bodyPr wrap="square" anchor="t" lIns="0" rIns="0" tIns="0" bIns="0">
             <a:spAutoFit/>
           </a:bodyPr>
           <a:lstStyle/>
           <a:p>
-            <a:pPr algn="l"/>
-            <a:r>
-              <a:rPr sz="1300" b="0">
-                <a:solidFill>
-                  <a:srgbClr val="DBE6F3"/>
-                </a:solidFill>
-                <a:latin typeface="Inter"/>
+            <a:pPr algn="r">
+              <a:lnSpc>
+                <a:spcPct val="115000"/>
+              </a:lnSpc>
+            </a:pPr>
+            <a:r>
+              <a:rPr sz="1100" b="0">
+                <a:solidFill>
+                  <a:srgbClr val="6B7480"/>
+                </a:solidFill>
+                <a:latin typeface="Lato"/>
               </a:rPr>
-              <a:t>four ideas</a:t>
-            </a:r>
-          </a:p>
-        </p:txBody>
-      </p:sp>
-      <p:sp>
-        <p:nvSpPr>
-          <p:cNvPr id="5" name="TextBox 4"/>
-          <p:cNvSpPr txBox="1"/>
-          <p:nvPr/>
-        </p:nvSpPr>
-        <p:spPr>
-          <a:xfrm>
-            <a:off x="8503920" y="320040"/>
-            <a:ext cx="3200400" cy="457200"/>
-          </a:xfrm>
-          <a:prstGeom prst="rect">
-            <a:avLst/>
-          </a:prstGeom>
-          <a:noFill/>
-        </p:spPr>
-        <p:txBody>
-          <a:bodyPr wrap="square" anchor="t" lIns="45720" rIns="45720">
-            <a:spAutoFit/>
-          </a:bodyPr>
-          <a:lstStyle/>
-          <a:p>
-            <a:pPr algn="r"/>
-            <a:r>
-              <a:rPr sz="1200" b="0">
-                <a:solidFill>
-                  <a:srgbClr val="DBE6F3"/>
-                </a:solidFill>
-                <a:latin typeface="Inter"/>
-              </a:rPr>
-              <a:t>HalfSecuredTeam · Track 3</a:t>
-            </a:r>
-          </a:p>
-        </p:txBody>
-      </p:sp>
-      <p:sp>
-        <p:nvSpPr>
-          <p:cNvPr id="6" name="Rounded Rectangle 5"/>
+              <a:t>3</a:t>
+            </a:r>
+          </a:p>
+        </p:txBody>
+      </p:sp>
+      <p:sp>
+        <p:nvSpPr>
+          <p:cNvPr id="7" name="Rectangle 6"/>
           <p:cNvSpPr/>
           <p:nvPr/>
         </p:nvSpPr>
         <p:spPr>
           <a:xfrm>
-            <a:off x="548640" y="1417320"/>
-            <a:ext cx="5394960" cy="2103120"/>
-          </a:xfrm>
-          <a:prstGeom prst="roundRect">
-            <a:avLst>
-              <a:gd name="adj" fmla="val 8000"/>
-            </a:avLst>
+            <a:off x="822960" y="2834640"/>
+            <a:ext cx="457200" cy="54864"/>
+          </a:xfrm>
+          <a:prstGeom prst="rect">
+            <a:avLst/>
           </a:prstGeom>
           <a:solidFill>
-            <a:srgbClr val="F6F7F9"/>
+            <a:srgbClr val="1A5FB4"/>
           </a:solidFill>
-          <a:ln w="19050">
-            <a:solidFill>
-              <a:srgbClr val="F0B429"/>
-            </a:solidFill>
+          <a:ln>
+            <a:noFill/>
           </a:ln>
           <a:effectLst/>
         </p:spPr>
@@ -5070,22 +5540,98 @@
       </p:sp>
       <p:sp>
         <p:nvSpPr>
-          <p:cNvPr id="7" name="Rounded Rectangle 6"/>
+          <p:cNvPr id="8" name="TextBox 7"/>
+          <p:cNvSpPr txBox="1"/>
+          <p:nvPr/>
+        </p:nvSpPr>
+        <p:spPr>
+          <a:xfrm>
+            <a:off x="822960" y="3108960"/>
+            <a:ext cx="2293543" cy="1005840"/>
+          </a:xfrm>
+          <a:prstGeom prst="rect">
+            <a:avLst/>
+          </a:prstGeom>
+          <a:noFill/>
+        </p:spPr>
+        <p:txBody>
+          <a:bodyPr wrap="square" anchor="t" lIns="0" rIns="0" tIns="0" bIns="0">
+            <a:spAutoFit/>
+          </a:bodyPr>
+          <a:lstStyle/>
+          <a:p>
+            <a:pPr algn="l">
+              <a:lnSpc>
+                <a:spcPct val="110000"/>
+              </a:lnSpc>
+            </a:pPr>
+            <a:r>
+              <a:rPr sz="2400" b="1">
+                <a:solidFill>
+                  <a:srgbClr val="141A22"/>
+                </a:solidFill>
+                <a:latin typeface="Lato"/>
+              </a:rPr>
+              <a:t>Law-grounded AI</a:t>
+            </a:r>
+          </a:p>
+        </p:txBody>
+      </p:sp>
+      <p:sp>
+        <p:nvSpPr>
+          <p:cNvPr id="9" name="TextBox 8"/>
+          <p:cNvSpPr txBox="1"/>
+          <p:nvPr/>
+        </p:nvSpPr>
+        <p:spPr>
+          <a:xfrm>
+            <a:off x="822960" y="4160520"/>
+            <a:ext cx="2293543" cy="2286000"/>
+          </a:xfrm>
+          <a:prstGeom prst="rect">
+            <a:avLst/>
+          </a:prstGeom>
+          <a:noFill/>
+        </p:spPr>
+        <p:txBody>
+          <a:bodyPr wrap="square" anchor="t" lIns="0" rIns="0" tIns="0" bIns="0">
+            <a:spAutoFit/>
+          </a:bodyPr>
+          <a:lstStyle/>
+          <a:p>
+            <a:pPr algn="l">
+              <a:lnSpc>
+                <a:spcPct val="135000"/>
+              </a:lnSpc>
+            </a:pPr>
+            <a:r>
+              <a:rPr sz="1800" b="0">
+                <a:solidFill>
+                  <a:srgbClr val="6B7480"/>
+                </a:solidFill>
+                <a:latin typeface="Lato"/>
+              </a:rPr>
+              <a:t>picks the article and quotes it</a:t>
+            </a:r>
+          </a:p>
+        </p:txBody>
+      </p:sp>
+      <p:sp>
+        <p:nvSpPr>
+          <p:cNvPr id="10" name="Rectangle 9"/>
           <p:cNvSpPr/>
           <p:nvPr/>
         </p:nvSpPr>
         <p:spPr>
           <a:xfrm>
-            <a:off x="548640" y="1417320"/>
-            <a:ext cx="164592" cy="2103120"/>
-          </a:xfrm>
-          <a:prstGeom prst="roundRect">
-            <a:avLst>
-              <a:gd name="adj" fmla="val 8000"/>
-            </a:avLst>
+            <a:off x="3573703" y="2834640"/>
+            <a:ext cx="457200" cy="54864"/>
+          </a:xfrm>
+          <a:prstGeom prst="rect">
+            <a:avLst/>
           </a:prstGeom>
           <a:solidFill>
-            <a:srgbClr val="F0B429"/>
+            <a:srgbClr val="1A5FB4"/>
           </a:solidFill>
           <a:ln>
             <a:noFill/>
@@ -5116,14 +5662,14 @@
       </p:sp>
       <p:sp>
         <p:nvSpPr>
-          <p:cNvPr id="8" name="TextBox 7"/>
+          <p:cNvPr id="11" name="TextBox 10"/>
           <p:cNvSpPr txBox="1"/>
           <p:nvPr/>
         </p:nvSpPr>
         <p:spPr>
           <a:xfrm>
-            <a:off x="1005840" y="1828800"/>
-            <a:ext cx="4663440" cy="731520"/>
+            <a:off x="3573703" y="3108960"/>
+            <a:ext cx="2293543" cy="1005840"/>
           </a:xfrm>
           <a:prstGeom prst="rect">
             <a:avLst/>
@@ -5131,34 +5677,38 @@
           <a:noFill/>
         </p:spPr>
         <p:txBody>
-          <a:bodyPr wrap="square" anchor="t" lIns="45720" rIns="45720">
+          <a:bodyPr wrap="square" anchor="t" lIns="0" rIns="0" tIns="0" bIns="0">
             <a:spAutoFit/>
           </a:bodyPr>
           <a:lstStyle/>
           <a:p>
-            <a:pPr algn="l"/>
-            <a:r>
-              <a:rPr sz="2800" b="1">
-                <a:solidFill>
-                  <a:srgbClr val="F0B429"/>
-                </a:solidFill>
-                <a:latin typeface="Inter"/>
+            <a:pPr algn="l">
+              <a:lnSpc>
+                <a:spcPct val="110000"/>
+              </a:lnSpc>
+            </a:pPr>
+            <a:r>
+              <a:rPr sz="2400" b="1">
+                <a:solidFill>
+                  <a:srgbClr val="141A22"/>
+                </a:solidFill>
+                <a:latin typeface="Lato"/>
               </a:rPr>
-              <a:t>Law-grounded AI</a:t>
-            </a:r>
-          </a:p>
-        </p:txBody>
-      </p:sp>
-      <p:sp>
-        <p:nvSpPr>
-          <p:cNvPr id="9" name="TextBox 8"/>
+              <a:t>Words → SQL by rules</a:t>
+            </a:r>
+          </a:p>
+        </p:txBody>
+      </p:sp>
+      <p:sp>
+        <p:nvSpPr>
+          <p:cNvPr id="12" name="TextBox 11"/>
           <p:cNvSpPr txBox="1"/>
           <p:nvPr/>
         </p:nvSpPr>
         <p:spPr>
           <a:xfrm>
-            <a:off x="1005840" y="2606040"/>
-            <a:ext cx="4663440" cy="548640"/>
+            <a:off x="3573703" y="4160520"/>
+            <a:ext cx="2293543" cy="2286000"/>
           </a:xfrm>
           <a:prstGeom prst="rect">
             <a:avLst/>
@@ -5166,47 +5716,47 @@
           <a:noFill/>
         </p:spPr>
         <p:txBody>
-          <a:bodyPr wrap="square" anchor="t" lIns="45720" rIns="45720">
+          <a:bodyPr wrap="square" anchor="t" lIns="0" rIns="0" tIns="0" bIns="0">
             <a:spAutoFit/>
           </a:bodyPr>
           <a:lstStyle/>
           <a:p>
-            <a:pPr algn="l"/>
-            <a:r>
-              <a:rPr sz="1700" b="0">
-                <a:solidFill>
-                  <a:srgbClr val="5B6472"/>
-                </a:solidFill>
-                <a:latin typeface="Inter"/>
+            <a:pPr algn="l">
+              <a:lnSpc>
+                <a:spcPct val="135000"/>
+              </a:lnSpc>
+            </a:pPr>
+            <a:r>
+              <a:rPr sz="1800" b="0">
+                <a:solidFill>
+                  <a:srgbClr val="6B7480"/>
+                </a:solidFill>
+                <a:latin typeface="Lato"/>
               </a:rPr>
-              <a:t>picks the article and quotes it</a:t>
-            </a:r>
-          </a:p>
-        </p:txBody>
-      </p:sp>
-      <p:sp>
-        <p:nvSpPr>
-          <p:cNvPr id="10" name="Rounded Rectangle 9"/>
+              <a:t>no query written per request</a:t>
+            </a:r>
+          </a:p>
+        </p:txBody>
+      </p:sp>
+      <p:sp>
+        <p:nvSpPr>
+          <p:cNvPr id="13" name="Rectangle 12"/>
           <p:cNvSpPr/>
           <p:nvPr/>
         </p:nvSpPr>
         <p:spPr>
           <a:xfrm>
-            <a:off x="6263640" y="1417320"/>
-            <a:ext cx="5394960" cy="2103120"/>
-          </a:xfrm>
-          <a:prstGeom prst="roundRect">
-            <a:avLst>
-              <a:gd name="adj" fmla="val 8000"/>
-            </a:avLst>
+            <a:off x="6324447" y="2834640"/>
+            <a:ext cx="457200" cy="54864"/>
+          </a:xfrm>
+          <a:prstGeom prst="rect">
+            <a:avLst/>
           </a:prstGeom>
           <a:solidFill>
-            <a:srgbClr val="F6F7F9"/>
+            <a:srgbClr val="1A5FB4"/>
           </a:solidFill>
-          <a:ln w="19050">
-            <a:solidFill>
-              <a:srgbClr val="2E7D32"/>
-            </a:solidFill>
+          <a:ln>
+            <a:noFill/>
           </a:ln>
           <a:effectLst/>
         </p:spPr>
@@ -5234,22 +5784,98 @@
       </p:sp>
       <p:sp>
         <p:nvSpPr>
-          <p:cNvPr id="11" name="Rounded Rectangle 10"/>
+          <p:cNvPr id="14" name="TextBox 13"/>
+          <p:cNvSpPr txBox="1"/>
+          <p:nvPr/>
+        </p:nvSpPr>
+        <p:spPr>
+          <a:xfrm>
+            <a:off x="6324447" y="3108960"/>
+            <a:ext cx="2293543" cy="1005840"/>
+          </a:xfrm>
+          <a:prstGeom prst="rect">
+            <a:avLst/>
+          </a:prstGeom>
+          <a:noFill/>
+        </p:spPr>
+        <p:txBody>
+          <a:bodyPr wrap="square" anchor="t" lIns="0" rIns="0" tIns="0" bIns="0">
+            <a:spAutoFit/>
+          </a:bodyPr>
+          <a:lstStyle/>
+          <a:p>
+            <a:pPr algn="l">
+              <a:lnSpc>
+                <a:spcPct val="110000"/>
+              </a:lnSpc>
+            </a:pPr>
+            <a:r>
+              <a:rPr sz="2400" b="1">
+                <a:solidFill>
+                  <a:srgbClr val="141A22"/>
+                </a:solidFill>
+                <a:latin typeface="Lato"/>
+              </a:rPr>
+              <a:t>Privacy inside the query</a:t>
+            </a:r>
+          </a:p>
+        </p:txBody>
+      </p:sp>
+      <p:sp>
+        <p:nvSpPr>
+          <p:cNvPr id="15" name="TextBox 14"/>
+          <p:cNvSpPr txBox="1"/>
+          <p:nvPr/>
+        </p:nvSpPr>
+        <p:spPr>
+          <a:xfrm>
+            <a:off x="6324447" y="4160520"/>
+            <a:ext cx="2293543" cy="2286000"/>
+          </a:xfrm>
+          <a:prstGeom prst="rect">
+            <a:avLst/>
+          </a:prstGeom>
+          <a:noFill/>
+        </p:spPr>
+        <p:txBody>
+          <a:bodyPr wrap="square" anchor="t" lIns="0" rIns="0" tIns="0" bIns="0">
+            <a:spAutoFit/>
+          </a:bodyPr>
+          <a:lstStyle/>
+          <a:p>
+            <a:pPr algn="l">
+              <a:lnSpc>
+                <a:spcPct val="135000"/>
+              </a:lnSpc>
+            </a:pPr>
+            <a:r>
+              <a:rPr sz="1800" b="0">
+                <a:solidFill>
+                  <a:srgbClr val="6B7480"/>
+                </a:solidFill>
+                <a:latin typeface="Lato"/>
+              </a:rPr>
+              <a:t>small cells and opt-outs cannot leak</a:t>
+            </a:r>
+          </a:p>
+        </p:txBody>
+      </p:sp>
+      <p:sp>
+        <p:nvSpPr>
+          <p:cNvPr id="16" name="Rectangle 15"/>
           <p:cNvSpPr/>
           <p:nvPr/>
         </p:nvSpPr>
         <p:spPr>
           <a:xfrm>
-            <a:off x="6263640" y="1417320"/>
-            <a:ext cx="164592" cy="2103120"/>
-          </a:xfrm>
-          <a:prstGeom prst="roundRect">
-            <a:avLst>
-              <a:gd name="adj" fmla="val 8000"/>
-            </a:avLst>
+            <a:off x="9075191" y="2834640"/>
+            <a:ext cx="457200" cy="54864"/>
+          </a:xfrm>
+          <a:prstGeom prst="rect">
+            <a:avLst/>
           </a:prstGeom>
           <a:solidFill>
-            <a:srgbClr val="2E7D32"/>
+            <a:srgbClr val="1A5FB4"/>
           </a:solidFill>
           <a:ln>
             <a:noFill/>
@@ -5280,14 +5906,14 @@
       </p:sp>
       <p:sp>
         <p:nvSpPr>
-          <p:cNvPr id="12" name="TextBox 11"/>
+          <p:cNvPr id="17" name="TextBox 16"/>
           <p:cNvSpPr txBox="1"/>
           <p:nvPr/>
         </p:nvSpPr>
         <p:spPr>
           <a:xfrm>
-            <a:off x="6720840" y="1828800"/>
-            <a:ext cx="4663440" cy="731520"/>
+            <a:off x="9075191" y="3108960"/>
+            <a:ext cx="2293543" cy="1005840"/>
           </a:xfrm>
           <a:prstGeom prst="rect">
             <a:avLst/>
@@ -5295,34 +5921,38 @@
           <a:noFill/>
         </p:spPr>
         <p:txBody>
-          <a:bodyPr wrap="square" anchor="t" lIns="45720" rIns="45720">
+          <a:bodyPr wrap="square" anchor="t" lIns="0" rIns="0" tIns="0" bIns="0">
             <a:spAutoFit/>
           </a:bodyPr>
           <a:lstStyle/>
           <a:p>
-            <a:pPr algn="l"/>
-            <a:r>
-              <a:rPr sz="2800" b="1">
-                <a:solidFill>
-                  <a:srgbClr val="2E7D32"/>
-                </a:solidFill>
-                <a:latin typeface="Inter"/>
+            <a:pPr algn="l">
+              <a:lnSpc>
+                <a:spcPct val="110000"/>
+              </a:lnSpc>
+            </a:pPr>
+            <a:r>
+              <a:rPr sz="2400" b="1">
+                <a:solidFill>
+                  <a:srgbClr val="141A22"/>
+                </a:solidFill>
+                <a:latin typeface="Lato"/>
               </a:rPr>
-              <a:t>Words → SQL by rules</a:t>
-            </a:r>
-          </a:p>
-        </p:txBody>
-      </p:sp>
-      <p:sp>
-        <p:nvSpPr>
-          <p:cNvPr id="13" name="TextBox 12"/>
+              <a:t>Secure room, no exit</a:t>
+            </a:r>
+          </a:p>
+        </p:txBody>
+      </p:sp>
+      <p:sp>
+        <p:nvSpPr>
+          <p:cNvPr id="18" name="TextBox 17"/>
           <p:cNvSpPr txBox="1"/>
           <p:nvPr/>
         </p:nvSpPr>
         <p:spPr>
           <a:xfrm>
-            <a:off x="6720840" y="2606040"/>
-            <a:ext cx="4663440" cy="548640"/>
+            <a:off x="9075191" y="4160520"/>
+            <a:ext cx="2293543" cy="2286000"/>
           </a:xfrm>
           <a:prstGeom prst="rect">
             <a:avLst/>
@@ -5330,383 +5960,24 @@
           <a:noFill/>
         </p:spPr>
         <p:txBody>
-          <a:bodyPr wrap="square" anchor="t" lIns="45720" rIns="45720">
+          <a:bodyPr wrap="square" anchor="t" lIns="0" rIns="0" tIns="0" bIns="0">
             <a:spAutoFit/>
           </a:bodyPr>
           <a:lstStyle/>
           <a:p>
-            <a:pPr algn="l"/>
-            <a:r>
-              <a:rPr sz="1700" b="0">
-                <a:solidFill>
-                  <a:srgbClr val="5B6472"/>
-                </a:solidFill>
-                <a:latin typeface="Inter"/>
-              </a:rPr>
-              <a:t>no query written per request</a:t>
-            </a:r>
-          </a:p>
-        </p:txBody>
-      </p:sp>
-      <p:sp>
-        <p:nvSpPr>
-          <p:cNvPr id="14" name="Rounded Rectangle 13"/>
-          <p:cNvSpPr/>
-          <p:nvPr/>
-        </p:nvSpPr>
-        <p:spPr>
-          <a:xfrm>
-            <a:off x="548640" y="3794760"/>
-            <a:ext cx="5394960" cy="2103120"/>
-          </a:xfrm>
-          <a:prstGeom prst="roundRect">
-            <a:avLst>
-              <a:gd name="adj" fmla="val 8000"/>
-            </a:avLst>
-          </a:prstGeom>
-          <a:solidFill>
-            <a:srgbClr val="F6F7F9"/>
-          </a:solidFill>
-          <a:ln w="19050">
-            <a:solidFill>
-              <a:srgbClr val="1565C0"/>
-            </a:solidFill>
-          </a:ln>
-          <a:effectLst/>
-        </p:spPr>
-        <p:style>
-          <a:lnRef idx="1">
-            <a:schemeClr val="accent1"/>
-          </a:lnRef>
-          <a:fillRef idx="3">
-            <a:schemeClr val="accent1"/>
-          </a:fillRef>
-          <a:effectRef idx="2">
-            <a:schemeClr val="accent1"/>
-          </a:effectRef>
-          <a:fontRef idx="minor">
-            <a:schemeClr val="lt1"/>
-          </a:fontRef>
-        </p:style>
-        <p:txBody>
-          <a:bodyPr rtlCol="0" anchor="ctr"/>
-          <a:lstStyle/>
-          <a:p>
-            <a:pPr algn="ctr"/>
-          </a:p>
-        </p:txBody>
-      </p:sp>
-      <p:sp>
-        <p:nvSpPr>
-          <p:cNvPr id="15" name="Rounded Rectangle 14"/>
-          <p:cNvSpPr/>
-          <p:nvPr/>
-        </p:nvSpPr>
-        <p:spPr>
-          <a:xfrm>
-            <a:off x="548640" y="3794760"/>
-            <a:ext cx="164592" cy="2103120"/>
-          </a:xfrm>
-          <a:prstGeom prst="roundRect">
-            <a:avLst>
-              <a:gd name="adj" fmla="val 8000"/>
-            </a:avLst>
-          </a:prstGeom>
-          <a:solidFill>
-            <a:srgbClr val="1565C0"/>
-          </a:solidFill>
-          <a:ln>
-            <a:noFill/>
-          </a:ln>
-          <a:effectLst/>
-        </p:spPr>
-        <p:style>
-          <a:lnRef idx="1">
-            <a:schemeClr val="accent1"/>
-          </a:lnRef>
-          <a:fillRef idx="3">
-            <a:schemeClr val="accent1"/>
-          </a:fillRef>
-          <a:effectRef idx="2">
-            <a:schemeClr val="accent1"/>
-          </a:effectRef>
-          <a:fontRef idx="minor">
-            <a:schemeClr val="lt1"/>
-          </a:fontRef>
-        </p:style>
-        <p:txBody>
-          <a:bodyPr rtlCol="0" anchor="ctr"/>
-          <a:lstStyle/>
-          <a:p>
-            <a:pPr algn="ctr"/>
-          </a:p>
-        </p:txBody>
-      </p:sp>
-      <p:sp>
-        <p:nvSpPr>
-          <p:cNvPr id="16" name="TextBox 15"/>
-          <p:cNvSpPr txBox="1"/>
-          <p:nvPr/>
-        </p:nvSpPr>
-        <p:spPr>
-          <a:xfrm>
-            <a:off x="1005840" y="4206240"/>
-            <a:ext cx="4663440" cy="731520"/>
-          </a:xfrm>
-          <a:prstGeom prst="rect">
-            <a:avLst/>
-          </a:prstGeom>
-          <a:noFill/>
-        </p:spPr>
-        <p:txBody>
-          <a:bodyPr wrap="square" anchor="t" lIns="45720" rIns="45720">
-            <a:spAutoFit/>
-          </a:bodyPr>
-          <a:lstStyle/>
-          <a:p>
-            <a:pPr algn="l"/>
-            <a:r>
-              <a:rPr sz="2800" b="1">
-                <a:solidFill>
-                  <a:srgbClr val="1565C0"/>
-                </a:solidFill>
-                <a:latin typeface="Inter"/>
-              </a:rPr>
-              <a:t>Privacy inside the query</a:t>
-            </a:r>
-          </a:p>
-        </p:txBody>
-      </p:sp>
-      <p:sp>
-        <p:nvSpPr>
-          <p:cNvPr id="17" name="TextBox 16"/>
-          <p:cNvSpPr txBox="1"/>
-          <p:nvPr/>
-        </p:nvSpPr>
-        <p:spPr>
-          <a:xfrm>
-            <a:off x="1005840" y="4983480"/>
-            <a:ext cx="4663440" cy="548640"/>
-          </a:xfrm>
-          <a:prstGeom prst="rect">
-            <a:avLst/>
-          </a:prstGeom>
-          <a:noFill/>
-        </p:spPr>
-        <p:txBody>
-          <a:bodyPr wrap="square" anchor="t" lIns="45720" rIns="45720">
-            <a:spAutoFit/>
-          </a:bodyPr>
-          <a:lstStyle/>
-          <a:p>
-            <a:pPr algn="l"/>
-            <a:r>
-              <a:rPr sz="1700" b="0">
-                <a:solidFill>
-                  <a:srgbClr val="5B6472"/>
-                </a:solidFill>
-                <a:latin typeface="Inter"/>
-              </a:rPr>
-              <a:t>small cells and opt-outs cannot leak</a:t>
-            </a:r>
-          </a:p>
-        </p:txBody>
-      </p:sp>
-      <p:sp>
-        <p:nvSpPr>
-          <p:cNvPr id="18" name="Rounded Rectangle 17"/>
-          <p:cNvSpPr/>
-          <p:nvPr/>
-        </p:nvSpPr>
-        <p:spPr>
-          <a:xfrm>
-            <a:off x="6263640" y="3794760"/>
-            <a:ext cx="5394960" cy="2103120"/>
-          </a:xfrm>
-          <a:prstGeom prst="roundRect">
-            <a:avLst>
-              <a:gd name="adj" fmla="val 8000"/>
-            </a:avLst>
-          </a:prstGeom>
-          <a:solidFill>
-            <a:srgbClr val="F6F7F9"/>
-          </a:solidFill>
-          <a:ln w="19050">
-            <a:solidFill>
-              <a:srgbClr val="C62828"/>
-            </a:solidFill>
-          </a:ln>
-          <a:effectLst/>
-        </p:spPr>
-        <p:style>
-          <a:lnRef idx="1">
-            <a:schemeClr val="accent1"/>
-          </a:lnRef>
-          <a:fillRef idx="3">
-            <a:schemeClr val="accent1"/>
-          </a:fillRef>
-          <a:effectRef idx="2">
-            <a:schemeClr val="accent1"/>
-          </a:effectRef>
-          <a:fontRef idx="minor">
-            <a:schemeClr val="lt1"/>
-          </a:fontRef>
-        </p:style>
-        <p:txBody>
-          <a:bodyPr rtlCol="0" anchor="ctr"/>
-          <a:lstStyle/>
-          <a:p>
-            <a:pPr algn="ctr"/>
-          </a:p>
-        </p:txBody>
-      </p:sp>
-      <p:sp>
-        <p:nvSpPr>
-          <p:cNvPr id="19" name="Rounded Rectangle 18"/>
-          <p:cNvSpPr/>
-          <p:nvPr/>
-        </p:nvSpPr>
-        <p:spPr>
-          <a:xfrm>
-            <a:off x="6263640" y="3794760"/>
-            <a:ext cx="164592" cy="2103120"/>
-          </a:xfrm>
-          <a:prstGeom prst="roundRect">
-            <a:avLst>
-              <a:gd name="adj" fmla="val 8000"/>
-            </a:avLst>
-          </a:prstGeom>
-          <a:solidFill>
-            <a:srgbClr val="C62828"/>
-          </a:solidFill>
-          <a:ln>
-            <a:noFill/>
-          </a:ln>
-          <a:effectLst/>
-        </p:spPr>
-        <p:style>
-          <a:lnRef idx="1">
-            <a:schemeClr val="accent1"/>
-          </a:lnRef>
-          <a:fillRef idx="3">
-            <a:schemeClr val="accent1"/>
-          </a:fillRef>
-          <a:effectRef idx="2">
-            <a:schemeClr val="accent1"/>
-          </a:effectRef>
-          <a:fontRef idx="minor">
-            <a:schemeClr val="lt1"/>
-          </a:fontRef>
-        </p:style>
-        <p:txBody>
-          <a:bodyPr rtlCol="0" anchor="ctr"/>
-          <a:lstStyle/>
-          <a:p>
-            <a:pPr algn="ctr"/>
-          </a:p>
-        </p:txBody>
-      </p:sp>
-      <p:sp>
-        <p:nvSpPr>
-          <p:cNvPr id="20" name="TextBox 19"/>
-          <p:cNvSpPr txBox="1"/>
-          <p:nvPr/>
-        </p:nvSpPr>
-        <p:spPr>
-          <a:xfrm>
-            <a:off x="6720840" y="4206240"/>
-            <a:ext cx="4663440" cy="731520"/>
-          </a:xfrm>
-          <a:prstGeom prst="rect">
-            <a:avLst/>
-          </a:prstGeom>
-          <a:noFill/>
-        </p:spPr>
-        <p:txBody>
-          <a:bodyPr wrap="square" anchor="t" lIns="45720" rIns="45720">
-            <a:spAutoFit/>
-          </a:bodyPr>
-          <a:lstStyle/>
-          <a:p>
-            <a:pPr algn="l"/>
-            <a:r>
-              <a:rPr sz="2800" b="1">
-                <a:solidFill>
-                  <a:srgbClr val="C62828"/>
-                </a:solidFill>
-                <a:latin typeface="Inter"/>
-              </a:rPr>
-              <a:t>Secure room, no exit</a:t>
-            </a:r>
-          </a:p>
-        </p:txBody>
-      </p:sp>
-      <p:sp>
-        <p:nvSpPr>
-          <p:cNvPr id="21" name="TextBox 20"/>
-          <p:cNvSpPr txBox="1"/>
-          <p:nvPr/>
-        </p:nvSpPr>
-        <p:spPr>
-          <a:xfrm>
-            <a:off x="6720840" y="4983480"/>
-            <a:ext cx="4663440" cy="548640"/>
-          </a:xfrm>
-          <a:prstGeom prst="rect">
-            <a:avLst/>
-          </a:prstGeom>
-          <a:noFill/>
-        </p:spPr>
-        <p:txBody>
-          <a:bodyPr wrap="square" anchor="t" lIns="45720" rIns="45720">
-            <a:spAutoFit/>
-          </a:bodyPr>
-          <a:lstStyle/>
-          <a:p>
-            <a:pPr algn="l"/>
-            <a:r>
-              <a:rPr sz="1700" b="0">
-                <a:solidFill>
-                  <a:srgbClr val="5B6472"/>
-                </a:solidFill>
-                <a:latin typeface="Inter"/>
+            <a:pPr algn="l">
+              <a:lnSpc>
+                <a:spcPct val="135000"/>
+              </a:lnSpc>
+            </a:pPr>
+            <a:r>
+              <a:rPr sz="1800" b="0">
+                <a:solidFill>
+                  <a:srgbClr val="6B7480"/>
+                </a:solidFill>
+                <a:latin typeface="Lato"/>
               </a:rPr>
               <a:t>records viewed as images, never downloaded</a:t>
-            </a:r>
-          </a:p>
-        </p:txBody>
-      </p:sp>
-      <p:sp>
-        <p:nvSpPr>
-          <p:cNvPr id="22" name="TextBox 21"/>
-          <p:cNvSpPr txBox="1"/>
-          <p:nvPr/>
-        </p:nvSpPr>
-        <p:spPr>
-          <a:xfrm>
-            <a:off x="548640" y="6446520"/>
-            <a:ext cx="10972800" cy="274320"/>
-          </a:xfrm>
-          <a:prstGeom prst="rect">
-            <a:avLst/>
-          </a:prstGeom>
-          <a:noFill/>
-        </p:spPr>
-        <p:txBody>
-          <a:bodyPr wrap="square" anchor="t" lIns="45720" rIns="45720">
-            <a:spAutoFit/>
-          </a:bodyPr>
-          <a:lstStyle/>
-          <a:p>
-            <a:pPr algn="l"/>
-            <a:r>
-              <a:rPr sz="1000" b="0">
-                <a:solidFill>
-                  <a:srgbClr val="5B6472"/>
-                </a:solidFill>
-                <a:latin typeface="Inter"/>
-              </a:rPr>
-              <a:t>EHDS · Regulation (EU) 2025/327 · synthetic data only</a:t>
             </a:r>
           </a:p>
         </p:txBody>
@@ -5731,20 +6002,98 @@
       <p:grpSpPr/>
       <p:sp>
         <p:nvSpPr>
-          <p:cNvPr id="2" name="Rectangle 1"/>
+          <p:cNvPr id="2" name="TextBox 1"/>
+          <p:cNvSpPr txBox="1"/>
+          <p:nvPr/>
+        </p:nvSpPr>
+        <p:spPr>
+          <a:xfrm>
+            <a:off x="822960" y="685800"/>
+            <a:ext cx="10545775" cy="274320"/>
+          </a:xfrm>
+          <a:prstGeom prst="rect">
+            <a:avLst/>
+          </a:prstGeom>
+          <a:noFill/>
+        </p:spPr>
+        <p:txBody>
+          <a:bodyPr wrap="square" anchor="t" lIns="0" rIns="0" tIns="0" bIns="0">
+            <a:spAutoFit/>
+          </a:bodyPr>
+          <a:lstStyle/>
+          <a:p>
+            <a:pPr algn="l">
+              <a:lnSpc>
+                <a:spcPct val="115000"/>
+              </a:lnSpc>
+            </a:pPr>
+            <a:r>
+              <a:rPr sz="1200" b="1">
+                <a:solidFill>
+                  <a:srgbClr val="1A5FB4"/>
+                </a:solidFill>
+                <a:latin typeface="Lato"/>
+              </a:rPr>
+              <a:t>HOW IT WORKS</a:t>
+            </a:r>
+          </a:p>
+        </p:txBody>
+      </p:sp>
+      <p:sp>
+        <p:nvSpPr>
+          <p:cNvPr id="3" name="TextBox 2"/>
+          <p:cNvSpPr txBox="1"/>
+          <p:nvPr/>
+        </p:nvSpPr>
+        <p:spPr>
+          <a:xfrm>
+            <a:off x="822960" y="1005840"/>
+            <a:ext cx="10545775" cy="822960"/>
+          </a:xfrm>
+          <a:prstGeom prst="rect">
+            <a:avLst/>
+          </a:prstGeom>
+          <a:noFill/>
+        </p:spPr>
+        <p:txBody>
+          <a:bodyPr wrap="square" anchor="t" lIns="0" rIns="0" tIns="0" bIns="0">
+            <a:spAutoFit/>
+          </a:bodyPr>
+          <a:lstStyle/>
+          <a:p>
+            <a:pPr algn="l">
+              <a:lnSpc>
+                <a:spcPct val="115000"/>
+              </a:lnSpc>
+            </a:pPr>
+            <a:r>
+              <a:rPr sz="3400" b="1">
+                <a:solidFill>
+                  <a:srgbClr val="141A22"/>
+                </a:solidFill>
+                <a:latin typeface="Lato"/>
+              </a:rPr>
+              <a:t>One pipeline, three outcomes</a:t>
+            </a:r>
+          </a:p>
+        </p:txBody>
+      </p:sp>
+      <p:sp>
+        <p:nvSpPr>
+          <p:cNvPr id="4" name="Rectangle 3"/>
           <p:cNvSpPr/>
           <p:nvPr/>
         </p:nvSpPr>
         <p:spPr>
           <a:xfrm>
-            <a:off x="0" y="0"/>
-            <a:ext cx="12191695" cy="1051560"/>
+            <a:off x="822960" y="1874520"/>
+            <a:ext cx="640080" cy="45720"/>
           </a:xfrm>
           <a:prstGeom prst="rect">
             <a:avLst/>
           </a:prstGeom>
           <a:solidFill>
-            <a:srgbClr val="1F3A5F"/>
+            <a:srgbClr val="1A5FB4"/>
           </a:solidFill>
           <a:ln>
             <a:noFill/>
@@ -5775,14 +6124,14 @@
       </p:sp>
       <p:sp>
         <p:nvSpPr>
-          <p:cNvPr id="3" name="TextBox 2"/>
+          <p:cNvPr id="5" name="TextBox 4"/>
           <p:cNvSpPr txBox="1"/>
           <p:nvPr/>
         </p:nvSpPr>
         <p:spPr>
           <a:xfrm>
-            <a:off x="548640" y="182880"/>
-            <a:ext cx="8412480" cy="548640"/>
+            <a:off x="822960" y="6355080"/>
+            <a:ext cx="7315200" cy="274320"/>
           </a:xfrm>
           <a:prstGeom prst="rect">
             <a:avLst/>
@@ -5790,34 +6139,38 @@
           <a:noFill/>
         </p:spPr>
         <p:txBody>
-          <a:bodyPr wrap="square" anchor="t" lIns="45720" rIns="45720">
+          <a:bodyPr wrap="square" anchor="t" lIns="0" rIns="0" tIns="0" bIns="0">
             <a:spAutoFit/>
           </a:bodyPr>
           <a:lstStyle/>
           <a:p>
-            <a:pPr algn="l"/>
-            <a:r>
-              <a:rPr sz="2600" b="1">
-                <a:solidFill>
-                  <a:srgbClr val="FFFFFF"/>
-                </a:solidFill>
-                <a:latin typeface="Inter"/>
+            <a:pPr algn="l">
+              <a:lnSpc>
+                <a:spcPct val="115000"/>
+              </a:lnSpc>
+            </a:pPr>
+            <a:r>
+              <a:rPr sz="1100" b="0">
+                <a:solidFill>
+                  <a:srgbClr val="6B7480"/>
+                </a:solidFill>
+                <a:latin typeface="Lato"/>
               </a:rPr>
-              <a:t>What we built: one pipeline, three outcomes</a:t>
-            </a:r>
-          </a:p>
-        </p:txBody>
-      </p:sp>
-      <p:sp>
-        <p:nvSpPr>
-          <p:cNvPr id="4" name="TextBox 3"/>
+              <a:t>HalfSecuredTeam  ·  EHDS Track 3</a:t>
+            </a:r>
+          </a:p>
+        </p:txBody>
+      </p:sp>
+      <p:sp>
+        <p:nvSpPr>
+          <p:cNvPr id="6" name="TextBox 5"/>
           <p:cNvSpPr txBox="1"/>
           <p:nvPr/>
         </p:nvSpPr>
         <p:spPr>
           <a:xfrm>
-            <a:off x="548640" y="658368"/>
-            <a:ext cx="8412480" cy="365760"/>
+            <a:off x="10454335" y="6355080"/>
+            <a:ext cx="914400" cy="274320"/>
           </a:xfrm>
           <a:prstGeom prst="rect">
             <a:avLst/>
@@ -5825,62 +6178,31 @@
           <a:noFill/>
         </p:spPr>
         <p:txBody>
-          <a:bodyPr wrap="square" anchor="t" lIns="45720" rIns="45720">
+          <a:bodyPr wrap="square" anchor="t" lIns="0" rIns="0" tIns="0" bIns="0">
             <a:spAutoFit/>
           </a:bodyPr>
           <a:lstStyle/>
           <a:p>
-            <a:pPr algn="l"/>
-            <a:r>
-              <a:rPr sz="1300" b="0">
-                <a:solidFill>
-                  <a:srgbClr val="DBE6F3"/>
-                </a:solidFill>
-                <a:latin typeface="Inter"/>
+            <a:pPr algn="r">
+              <a:lnSpc>
+                <a:spcPct val="115000"/>
+              </a:lnSpc>
+            </a:pPr>
+            <a:r>
+              <a:rPr sz="1100" b="0">
+                <a:solidFill>
+                  <a:srgbClr val="6B7480"/>
+                </a:solidFill>
+                <a:latin typeface="Lato"/>
               </a:rPr>
-              <a:t>request → law check → statistics or secure room; attackers blocked</a:t>
-            </a:r>
-          </a:p>
-        </p:txBody>
-      </p:sp>
-      <p:sp>
-        <p:nvSpPr>
-          <p:cNvPr id="5" name="TextBox 4"/>
-          <p:cNvSpPr txBox="1"/>
-          <p:nvPr/>
-        </p:nvSpPr>
-        <p:spPr>
-          <a:xfrm>
-            <a:off x="8503920" y="320040"/>
-            <a:ext cx="3200400" cy="457200"/>
-          </a:xfrm>
-          <a:prstGeom prst="rect">
-            <a:avLst/>
-          </a:prstGeom>
-          <a:noFill/>
-        </p:spPr>
-        <p:txBody>
-          <a:bodyPr wrap="square" anchor="t" lIns="45720" rIns="45720">
-            <a:spAutoFit/>
-          </a:bodyPr>
-          <a:lstStyle/>
-          <a:p>
-            <a:pPr algn="r"/>
-            <a:r>
-              <a:rPr sz="1200" b="0">
-                <a:solidFill>
-                  <a:srgbClr val="DBE6F3"/>
-                </a:solidFill>
-                <a:latin typeface="Inter"/>
-              </a:rPr>
-              <a:t>HalfSecuredTeam · Track 3</a:t>
+              <a:t>4</a:t>
             </a:r>
           </a:p>
         </p:txBody>
       </p:sp>
       <p:pic>
         <p:nvPicPr>
-          <p:cNvPr id="6" name="Picture 5" descr="how-it-works.png"/>
+          <p:cNvPr id="7" name="Picture 6" descr="how-it-works.png"/>
           <p:cNvPicPr>
             <a:picLocks noChangeAspect="1"/>
           </p:cNvPicPr>
@@ -5894,49 +6216,14 @@
         </p:blipFill>
         <p:spPr>
           <a:xfrm>
-            <a:off x="365760" y="1218111"/>
-            <a:ext cx="11430000" cy="5061857"/>
+            <a:off x="1759822" y="2286000"/>
+            <a:ext cx="8672051" cy="3840480"/>
           </a:xfrm>
           <a:prstGeom prst="rect">
             <a:avLst/>
           </a:prstGeom>
         </p:spPr>
       </p:pic>
-      <p:sp>
-        <p:nvSpPr>
-          <p:cNvPr id="7" name="TextBox 6"/>
-          <p:cNvSpPr txBox="1"/>
-          <p:nvPr/>
-        </p:nvSpPr>
-        <p:spPr>
-          <a:xfrm>
-            <a:off x="548640" y="6446520"/>
-            <a:ext cx="10972800" cy="274320"/>
-          </a:xfrm>
-          <a:prstGeom prst="rect">
-            <a:avLst/>
-          </a:prstGeom>
-          <a:noFill/>
-        </p:spPr>
-        <p:txBody>
-          <a:bodyPr wrap="square" anchor="t" lIns="45720" rIns="45720">
-            <a:spAutoFit/>
-          </a:bodyPr>
-          <a:lstStyle/>
-          <a:p>
-            <a:pPr algn="l"/>
-            <a:r>
-              <a:rPr sz="1000" b="0">
-                <a:solidFill>
-                  <a:srgbClr val="5B6472"/>
-                </a:solidFill>
-                <a:latin typeface="Inter"/>
-              </a:rPr>
-              <a:t>EHDS · Regulation (EU) 2025/327 · synthetic data only</a:t>
-            </a:r>
-          </a:p>
-        </p:txBody>
-      </p:sp>
     </p:spTree>
   </p:cSld>
   <p:clrMapOvr>
@@ -5964,13 +6251,13 @@
         <p:spPr>
           <a:xfrm>
             <a:off x="0" y="0"/>
-            <a:ext cx="12191695" cy="1051560"/>
+            <a:ext cx="12191695" cy="6858000"/>
           </a:xfrm>
           <a:prstGeom prst="rect">
             <a:avLst/>
           </a:prstGeom>
           <a:solidFill>
-            <a:srgbClr val="1F3A5F"/>
+            <a:srgbClr val="1A5FB4"/>
           </a:solidFill>
           <a:ln>
             <a:noFill/>
@@ -6007,8 +6294,8 @@
         </p:nvSpPr>
         <p:spPr>
           <a:xfrm>
-            <a:off x="548640" y="182880"/>
-            <a:ext cx="8412480" cy="548640"/>
+            <a:off x="822960" y="2011680"/>
+            <a:ext cx="3657600" cy="1097280"/>
           </a:xfrm>
           <a:prstGeom prst="rect">
             <a:avLst/>
@@ -6016,20 +6303,24 @@
           <a:noFill/>
         </p:spPr>
         <p:txBody>
-          <a:bodyPr wrap="square" anchor="t" lIns="45720" rIns="45720">
+          <a:bodyPr wrap="square" anchor="t" lIns="0" rIns="0" tIns="0" bIns="0">
             <a:spAutoFit/>
           </a:bodyPr>
           <a:lstStyle/>
           <a:p>
-            <a:pPr algn="l"/>
-            <a:r>
-              <a:rPr sz="2600" b="1">
-                <a:solidFill>
-                  <a:srgbClr val="FFFFFF"/>
-                </a:solidFill>
-                <a:latin typeface="Inter"/>
+            <a:pPr algn="l">
+              <a:lnSpc>
+                <a:spcPct val="115000"/>
+              </a:lnSpc>
+            </a:pPr>
+            <a:r>
+              <a:rPr sz="7200" b="1">
+                <a:solidFill>
+                  <a:srgbClr val="BFD4EE"/>
+                </a:solidFill>
+                <a:latin typeface="Lato"/>
               </a:rPr>
-              <a:t>Why this is better than a black box</a:t>
+              <a:t>Demo</a:t>
             </a:r>
           </a:p>
         </p:txBody>
@@ -6042,8 +6333,8 @@
         </p:nvSpPr>
         <p:spPr>
           <a:xfrm>
-            <a:off x="548640" y="658368"/>
-            <a:ext cx="8412480" cy="365760"/>
+            <a:off x="822960" y="3108960"/>
+            <a:ext cx="10058400" cy="1097280"/>
           </a:xfrm>
           <a:prstGeom prst="rect">
             <a:avLst/>
@@ -6051,20 +6342,24 @@
           <a:noFill/>
         </p:spPr>
         <p:txBody>
-          <a:bodyPr wrap="square" anchor="t" lIns="45720" rIns="45720">
+          <a:bodyPr wrap="square" anchor="t" lIns="0" rIns="0" tIns="0" bIns="0">
             <a:spAutoFit/>
           </a:bodyPr>
           <a:lstStyle/>
           <a:p>
-            <a:pPr algn="l"/>
-            <a:r>
-              <a:rPr sz="1300" b="0">
-                <a:solidFill>
-                  <a:srgbClr val="DBE6F3"/>
-                </a:solidFill>
-                <a:latin typeface="Inter"/>
+            <a:pPr algn="l">
+              <a:lnSpc>
+                <a:spcPct val="115000"/>
+              </a:lnSpc>
+            </a:pPr>
+            <a:r>
+              <a:rPr sz="4400" b="1">
+                <a:solidFill>
+                  <a:srgbClr val="FFFFFF"/>
+                </a:solidFill>
+                <a:latin typeface="Lato"/>
               </a:rPr>
-              <a:t>grounded, fast, consistent, safe</a:t>
+              <a:t>Four requests and one attack</a:t>
             </a:r>
           </a:p>
         </p:txBody>
@@ -6077,8 +6372,8 @@
         </p:nvSpPr>
         <p:spPr>
           <a:xfrm>
-            <a:off x="8503920" y="320040"/>
-            <a:ext cx="3200400" cy="457200"/>
+            <a:off x="822960" y="4206240"/>
+            <a:ext cx="10058400" cy="731520"/>
           </a:xfrm>
           <a:prstGeom prst="rect">
             <a:avLst/>
@@ -6086,20 +6381,24 @@
           <a:noFill/>
         </p:spPr>
         <p:txBody>
-          <a:bodyPr wrap="square" anchor="t" lIns="45720" rIns="45720">
+          <a:bodyPr wrap="square" anchor="t" lIns="0" rIns="0" tIns="0" bIns="0">
             <a:spAutoFit/>
           </a:bodyPr>
           <a:lstStyle/>
           <a:p>
-            <a:pPr algn="r"/>
-            <a:r>
-              <a:rPr sz="1200" b="0">
-                <a:solidFill>
-                  <a:srgbClr val="DBE6F3"/>
-                </a:solidFill>
-                <a:latin typeface="Inter"/>
+            <a:pPr algn="l">
+              <a:lnSpc>
+                <a:spcPct val="115000"/>
+              </a:lnSpc>
+            </a:pPr>
+            <a:r>
+              <a:rPr sz="2000" b="0">
+                <a:solidFill>
+                  <a:srgbClr val="DCE7F5"/>
+                </a:solidFill>
+                <a:latin typeface="Lato"/>
               </a:rPr>
-              <a:t>HalfSecuredTeam · Track 3</a:t>
+              <a:t>R02 rejected  ·  R01 statistics  ·  R11 in German  ·  R12 secure room  ·  flood blocked</a:t>
             </a:r>
           </a:p>
         </p:txBody>
@@ -6112,8 +6411,8 @@
         </p:nvSpPr>
         <p:spPr>
           <a:xfrm>
-            <a:off x="548640" y="1371600"/>
-            <a:ext cx="5760720" cy="4572000"/>
+            <a:off x="822960" y="6355080"/>
+            <a:ext cx="7315200" cy="274320"/>
           </a:xfrm>
           <a:prstGeom prst="rect">
             <a:avLst/>
@@ -6121,196 +6420,38 @@
           <a:noFill/>
         </p:spPr>
         <p:txBody>
-          <a:bodyPr wrap="square">
+          <a:bodyPr wrap="square" anchor="t" lIns="0" rIns="0" tIns="0" bIns="0">
             <a:spAutoFit/>
           </a:bodyPr>
           <a:lstStyle/>
           <a:p>
-            <a:pPr>
-              <a:spcAft>
-                <a:spcPts val="1000"/>
-              </a:spcAft>
+            <a:pPr algn="l">
+              <a:lnSpc>
+                <a:spcPct val="115000"/>
+              </a:lnSpc>
             </a:pPr>
             <a:r>
-              <a:rPr sz="1700" b="1">
-                <a:solidFill>
-                  <a:srgbClr val="1F2A37"/>
-                </a:solidFill>
-                <a:latin typeface="Inter"/>
+              <a:rPr sz="1100" b="0">
+                <a:solidFill>
+                  <a:srgbClr val="B8C4D6"/>
+                </a:solidFill>
+                <a:latin typeface="Lato"/>
               </a:rPr>
-              <a:t>•  No technical burden.</a:t>
-            </a:r>
-            <a:r>
-              <a:rPr sz="1700">
-                <a:solidFill>
-                  <a:srgbClr val="5B6472"/>
-                </a:solidFill>
-                <a:latin typeface="Inter"/>
-              </a:rPr>
-              <a:t> Plain words in; the AI drafts the definitions the access body can compute.</a:t>
-            </a:r>
-          </a:p>
-          <a:p>
-            <a:pPr>
-              <a:spcAft>
-                <a:spcPts val="1000"/>
-              </a:spcAft>
-            </a:pPr>
-            <a:r>
-              <a:rPr sz="1700" b="1">
-                <a:solidFill>
-                  <a:srgbClr val="1F2A37"/>
-                </a:solidFill>
-                <a:latin typeface="Inter"/>
-              </a:rPr>
-              <a:t>•  Explainable, not a verdict.</a:t>
-            </a:r>
-            <a:r>
-              <a:rPr sz="1700">
-                <a:solidFill>
-                  <a:srgbClr val="5B6472"/>
-                </a:solidFill>
-                <a:latin typeface="Inter"/>
-              </a:rPr>
-              <a:t> Every decision quotes the article, verbatim from the law text.</a:t>
-            </a:r>
-          </a:p>
-          <a:p>
-            <a:pPr>
-              <a:spcAft>
-                <a:spcPts val="1000"/>
-              </a:spcAft>
-            </a:pPr>
-            <a:r>
-              <a:rPr sz="1700" b="1">
-                <a:solidFill>
-                  <a:srgbClr val="1F2A37"/>
-                </a:solidFill>
-                <a:latin typeface="Inter"/>
-              </a:rPr>
-              <a:t>•  Numbers from code, not from the AI.</a:t>
-            </a:r>
-            <a:r>
-              <a:rPr sz="1700">
-                <a:solidFill>
-                  <a:srgbClr val="5B6472"/>
-                </a:solidFill>
-                <a:latin typeface="Inter"/>
-              </a:rPr>
-              <a:t> Same answer on every run; 10/10 consistent across 3 runs.</a:t>
-            </a:r>
-          </a:p>
-          <a:p>
-            <a:pPr>
-              <a:spcAft>
-                <a:spcPts val="1000"/>
-              </a:spcAft>
-            </a:pPr>
-            <a:r>
-              <a:rPr sz="1700" b="1">
-                <a:solidFill>
-                  <a:srgbClr val="1F2A37"/>
-                </a:solidFill>
-                <a:latin typeface="Inter"/>
-              </a:rPr>
-              <a:t>•  Privacy enforced in the query.</a:t>
-            </a:r>
-            <a:r>
-              <a:rPr sz="1700">
-                <a:solidFill>
-                  <a:srgbClr val="5B6472"/>
-                </a:solidFill>
-                <a:latin typeface="Inter"/>
-              </a:rPr>
-              <a:t> &lt;10, suppressed, opt-outs out — no answer can bypass it.</a:t>
-            </a:r>
-          </a:p>
-          <a:p>
-            <a:pPr>
-              <a:spcAft>
-                <a:spcPts val="1000"/>
-              </a:spcAft>
-            </a:pPr>
-            <a:r>
-              <a:rPr sz="1700" b="1">
-                <a:solidFill>
-                  <a:srgbClr val="1F2A37"/>
-                </a:solidFill>
-                <a:latin typeface="Inter"/>
-              </a:rPr>
-              <a:t>•  Any EU language, one rulebook.</a:t>
-            </a:r>
-            <a:r>
-              <a:rPr sz="1700">
-                <a:solidFill>
-                  <a:srgbClr val="5B6472"/>
-                </a:solidFill>
-                <a:latin typeface="Inter"/>
-              </a:rPr>
-              <a:t> German, Swedish, Greek → English once, then the same checks.</a:t>
-            </a:r>
-          </a:p>
-          <a:p>
-            <a:pPr>
-              <a:spcAft>
-                <a:spcPts val="1000"/>
-              </a:spcAft>
-            </a:pPr>
-            <a:r>
-              <a:rPr sz="1700" b="1">
-                <a:solidFill>
-                  <a:srgbClr val="1F2A37"/>
-                </a:solidFill>
-                <a:latin typeface="Inter"/>
-              </a:rPr>
-              <a:t>•  Audit and abuse control.</a:t>
-            </a:r>
-            <a:r>
-              <a:rPr sz="1700">
-                <a:solidFill>
-                  <a:srgbClr val="5B6472"/>
-                </a:solidFill>
-                <a:latin typeface="Inter"/>
-              </a:rPr>
-              <a:t> Every SPE action logged; flooding addresses blocked (429).</a:t>
-            </a:r>
-          </a:p>
-        </p:txBody>
-      </p:sp>
-      <p:pic>
-        <p:nvPicPr>
-          <p:cNvPr id="7" name="Picture 6" descr="ui-reject.png"/>
-          <p:cNvPicPr>
-            <a:picLocks noChangeAspect="1"/>
-          </p:cNvPicPr>
-          <p:nvPr/>
-        </p:nvPicPr>
-        <p:blipFill>
-          <a:blip r:embed="rId2"/>
-          <a:stretch>
-            <a:fillRect/>
-          </a:stretch>
-        </p:blipFill>
-        <p:spPr>
-          <a:xfrm>
-            <a:off x="6583680" y="1505402"/>
-            <a:ext cx="5212080" cy="4487275"/>
-          </a:xfrm>
-          <a:prstGeom prst="rect">
-            <a:avLst/>
-          </a:prstGeom>
-        </p:spPr>
-      </p:pic>
-      <p:sp>
-        <p:nvSpPr>
-          <p:cNvPr id="8" name="TextBox 7"/>
+              <a:t>HalfSecuredTeam  ·  EHDS Track 3</a:t>
+            </a:r>
+          </a:p>
+        </p:txBody>
+      </p:sp>
+      <p:sp>
+        <p:nvSpPr>
+          <p:cNvPr id="7" name="TextBox 6"/>
           <p:cNvSpPr txBox="1"/>
           <p:nvPr/>
         </p:nvSpPr>
         <p:spPr>
           <a:xfrm>
-            <a:off x="548640" y="6446520"/>
-            <a:ext cx="10972800" cy="274320"/>
+            <a:off x="10454335" y="6355080"/>
+            <a:ext cx="914400" cy="274320"/>
           </a:xfrm>
           <a:prstGeom prst="rect">
             <a:avLst/>
@@ -6318,20 +6459,24 @@
           <a:noFill/>
         </p:spPr>
         <p:txBody>
-          <a:bodyPr wrap="square" anchor="t" lIns="45720" rIns="45720">
+          <a:bodyPr wrap="square" anchor="t" lIns="0" rIns="0" tIns="0" bIns="0">
             <a:spAutoFit/>
           </a:bodyPr>
           <a:lstStyle/>
           <a:p>
-            <a:pPr algn="l"/>
-            <a:r>
-              <a:rPr sz="1000" b="0">
-                <a:solidFill>
-                  <a:srgbClr val="5B6472"/>
-                </a:solidFill>
-                <a:latin typeface="Inter"/>
+            <a:pPr algn="r">
+              <a:lnSpc>
+                <a:spcPct val="115000"/>
+              </a:lnSpc>
+            </a:pPr>
+            <a:r>
+              <a:rPr sz="1100" b="0">
+                <a:solidFill>
+                  <a:srgbClr val="B8C4D6"/>
+                </a:solidFill>
+                <a:latin typeface="Lato"/>
               </a:rPr>
-              <a:t>EHDS · Regulation (EU) 2025/327 · synthetic data only</a:t>
+              <a:t>5</a:t>
             </a:r>
           </a:p>
         </p:txBody>
@@ -6356,20 +6501,98 @@
       <p:grpSpPr/>
       <p:sp>
         <p:nvSpPr>
-          <p:cNvPr id="2" name="Rectangle 1"/>
+          <p:cNvPr id="2" name="TextBox 1"/>
+          <p:cNvSpPr txBox="1"/>
+          <p:nvPr/>
+        </p:nvSpPr>
+        <p:spPr>
+          <a:xfrm>
+            <a:off x="822960" y="685800"/>
+            <a:ext cx="10545775" cy="274320"/>
+          </a:xfrm>
+          <a:prstGeom prst="rect">
+            <a:avLst/>
+          </a:prstGeom>
+          <a:noFill/>
+        </p:spPr>
+        <p:txBody>
+          <a:bodyPr wrap="square" anchor="t" lIns="0" rIns="0" tIns="0" bIns="0">
+            <a:spAutoFit/>
+          </a:bodyPr>
+          <a:lstStyle/>
+          <a:p>
+            <a:pPr algn="l">
+              <a:lnSpc>
+                <a:spcPct val="115000"/>
+              </a:lnSpc>
+            </a:pPr>
+            <a:r>
+              <a:rPr sz="1200" b="1">
+                <a:solidFill>
+                  <a:srgbClr val="1A5FB4"/>
+                </a:solidFill>
+                <a:latin typeface="Lato"/>
+              </a:rPr>
+              <a:t>HONEST SUMMARY</a:t>
+            </a:r>
+          </a:p>
+        </p:txBody>
+      </p:sp>
+      <p:sp>
+        <p:nvSpPr>
+          <p:cNvPr id="3" name="TextBox 2"/>
+          <p:cNvSpPr txBox="1"/>
+          <p:nvPr/>
+        </p:nvSpPr>
+        <p:spPr>
+          <a:xfrm>
+            <a:off x="822960" y="1005840"/>
+            <a:ext cx="10545775" cy="822960"/>
+          </a:xfrm>
+          <a:prstGeom prst="rect">
+            <a:avLst/>
+          </a:prstGeom>
+          <a:noFill/>
+        </p:spPr>
+        <p:txBody>
+          <a:bodyPr wrap="square" anchor="t" lIns="0" rIns="0" tIns="0" bIns="0">
+            <a:spAutoFit/>
+          </a:bodyPr>
+          <a:lstStyle/>
+          <a:p>
+            <a:pPr algn="l">
+              <a:lnSpc>
+                <a:spcPct val="115000"/>
+              </a:lnSpc>
+            </a:pPr>
+            <a:r>
+              <a:rPr sz="3400" b="1">
+                <a:solidFill>
+                  <a:srgbClr val="141A22"/>
+                </a:solidFill>
+                <a:latin typeface="Lato"/>
+              </a:rPr>
+              <a:t>What works — and what does not yet</a:t>
+            </a:r>
+          </a:p>
+        </p:txBody>
+      </p:sp>
+      <p:sp>
+        <p:nvSpPr>
+          <p:cNvPr id="4" name="Rectangle 3"/>
           <p:cNvSpPr/>
           <p:nvPr/>
         </p:nvSpPr>
         <p:spPr>
           <a:xfrm>
-            <a:off x="0" y="0"/>
-            <a:ext cx="12191695" cy="6858000"/>
+            <a:off x="822960" y="1874520"/>
+            <a:ext cx="640080" cy="45720"/>
           </a:xfrm>
           <a:prstGeom prst="rect">
             <a:avLst/>
           </a:prstGeom>
           <a:solidFill>
-            <a:srgbClr val="1F3A5F"/>
+            <a:srgbClr val="1A5FB4"/>
           </a:solidFill>
           <a:ln>
             <a:noFill/>
@@ -6400,14 +6623,14 @@
       </p:sp>
       <p:sp>
         <p:nvSpPr>
-          <p:cNvPr id="3" name="TextBox 2"/>
+          <p:cNvPr id="5" name="TextBox 4"/>
           <p:cNvSpPr txBox="1"/>
           <p:nvPr/>
         </p:nvSpPr>
         <p:spPr>
           <a:xfrm>
-            <a:off x="822960" y="1097280"/>
-            <a:ext cx="10515600" cy="914400"/>
+            <a:off x="822960" y="6355080"/>
+            <a:ext cx="7315200" cy="274320"/>
           </a:xfrm>
           <a:prstGeom prst="rect">
             <a:avLst/>
@@ -6415,42 +6638,83 @@
           <a:noFill/>
         </p:spPr>
         <p:txBody>
-          <a:bodyPr wrap="square" anchor="t" lIns="45720" rIns="45720">
+          <a:bodyPr wrap="square" anchor="t" lIns="0" rIns="0" tIns="0" bIns="0">
             <a:spAutoFit/>
           </a:bodyPr>
           <a:lstStyle/>
           <a:p>
-            <a:pPr algn="l"/>
-            <a:r>
-              <a:rPr sz="4400" b="1">
-                <a:solidFill>
-                  <a:srgbClr val="FFFFFF"/>
-                </a:solidFill>
-                <a:latin typeface="Inter"/>
+            <a:pPr algn="l">
+              <a:lnSpc>
+                <a:spcPct val="115000"/>
+              </a:lnSpc>
+            </a:pPr>
+            <a:r>
+              <a:rPr sz="1100" b="0">
+                <a:solidFill>
+                  <a:srgbClr val="6B7480"/>
+                </a:solidFill>
+                <a:latin typeface="Lato"/>
               </a:rPr>
-              <a:t>Demo</a:t>
-            </a:r>
-          </a:p>
-        </p:txBody>
-      </p:sp>
-      <p:sp>
-        <p:nvSpPr>
-          <p:cNvPr id="4" name="Rounded Rectangle 3"/>
+              <a:t>HalfSecuredTeam  ·  EHDS Track 3</a:t>
+            </a:r>
+          </a:p>
+        </p:txBody>
+      </p:sp>
+      <p:sp>
+        <p:nvSpPr>
+          <p:cNvPr id="6" name="TextBox 5"/>
+          <p:cNvSpPr txBox="1"/>
+          <p:nvPr/>
+        </p:nvSpPr>
+        <p:spPr>
+          <a:xfrm>
+            <a:off x="10454335" y="6355080"/>
+            <a:ext cx="914400" cy="274320"/>
+          </a:xfrm>
+          <a:prstGeom prst="rect">
+            <a:avLst/>
+          </a:prstGeom>
+          <a:noFill/>
+        </p:spPr>
+        <p:txBody>
+          <a:bodyPr wrap="square" anchor="t" lIns="0" rIns="0" tIns="0" bIns="0">
+            <a:spAutoFit/>
+          </a:bodyPr>
+          <a:lstStyle/>
+          <a:p>
+            <a:pPr algn="r">
+              <a:lnSpc>
+                <a:spcPct val="115000"/>
+              </a:lnSpc>
+            </a:pPr>
+            <a:r>
+              <a:rPr sz="1100" b="0">
+                <a:solidFill>
+                  <a:srgbClr val="6B7480"/>
+                </a:solidFill>
+                <a:latin typeface="Lato"/>
+              </a:rPr>
+              <a:t>6</a:t>
+            </a:r>
+          </a:p>
+        </p:txBody>
+      </p:sp>
+      <p:sp>
+        <p:nvSpPr>
+          <p:cNvPr id="7" name="Rectangle 6"/>
           <p:cNvSpPr/>
           <p:nvPr/>
         </p:nvSpPr>
         <p:spPr>
           <a:xfrm>
-            <a:off x="822960" y="2377440"/>
-            <a:ext cx="2103120" cy="2926080"/>
-          </a:xfrm>
-          <a:prstGeom prst="roundRect">
-            <a:avLst>
-              <a:gd name="adj" fmla="val 8000"/>
-            </a:avLst>
+            <a:off x="822960" y="2286000"/>
+            <a:ext cx="457200" cy="45720"/>
+          </a:xfrm>
+          <a:prstGeom prst="rect">
+            <a:avLst/>
           </a:prstGeom>
           <a:solidFill>
-            <a:srgbClr val="FFFFFF"/>
+            <a:srgbClr val="2E7D32"/>
           </a:solidFill>
           <a:ln>
             <a:noFill/>
@@ -6481,19 +6745,159 @@
       </p:sp>
       <p:sp>
         <p:nvSpPr>
-          <p:cNvPr id="5" name="Rounded Rectangle 4"/>
+          <p:cNvPr id="8" name="TextBox 7"/>
+          <p:cNvSpPr txBox="1"/>
+          <p:nvPr/>
+        </p:nvSpPr>
+        <p:spPr>
+          <a:xfrm>
+            <a:off x="822960" y="2514600"/>
+            <a:ext cx="4998567" cy="548640"/>
+          </a:xfrm>
+          <a:prstGeom prst="rect">
+            <a:avLst/>
+          </a:prstGeom>
+          <a:noFill/>
+        </p:spPr>
+        <p:txBody>
+          <a:bodyPr wrap="square" anchor="t" lIns="0" rIns="0" tIns="0" bIns="0">
+            <a:spAutoFit/>
+          </a:bodyPr>
+          <a:lstStyle/>
+          <a:p>
+            <a:pPr algn="l">
+              <a:lnSpc>
+                <a:spcPct val="115000"/>
+              </a:lnSpc>
+            </a:pPr>
+            <a:r>
+              <a:rPr sz="2200" b="1">
+                <a:solidFill>
+                  <a:srgbClr val="2E7D32"/>
+                </a:solidFill>
+                <a:latin typeface="Lato"/>
+              </a:rPr>
+              <a:t>Works</a:t>
+            </a:r>
+          </a:p>
+        </p:txBody>
+      </p:sp>
+      <p:sp>
+        <p:nvSpPr>
+          <p:cNvPr id="9" name="TextBox 8"/>
+          <p:cNvSpPr txBox="1"/>
+          <p:nvPr/>
+        </p:nvSpPr>
+        <p:spPr>
+          <a:xfrm>
+            <a:off x="822960" y="3154680"/>
+            <a:ext cx="4998567" cy="3200400"/>
+          </a:xfrm>
+          <a:prstGeom prst="rect">
+            <a:avLst/>
+          </a:prstGeom>
+          <a:noFill/>
+        </p:spPr>
+        <p:txBody>
+          <a:bodyPr wrap="square" anchor="t" lIns="0" rIns="0" tIns="0" bIns="0">
+            <a:spAutoFit/>
+          </a:bodyPr>
+          <a:lstStyle/>
+          <a:p>
+            <a:pPr algn="l">
+              <a:lnSpc>
+                <a:spcPct val="150000"/>
+              </a:lnSpc>
+            </a:pPr>
+            <a:r>
+              <a:rPr sz="1600" b="0">
+                <a:solidFill>
+                  <a:srgbClr val="141A22"/>
+                </a:solidFill>
+                <a:latin typeface="Lato"/>
+              </a:rPr>
+              <a:t>—  10 / 10 decisions and articles</a:t>
+            </a:r>
+          </a:p>
+          <a:p>
+            <a:pPr algn="l">
+              <a:lnSpc>
+                <a:spcPct val="150000"/>
+              </a:lnSpc>
+            </a:pPr>
+            <a:r>
+              <a:rPr sz="1600" b="0">
+                <a:solidFill>
+                  <a:srgbClr val="141A22"/>
+                </a:solidFill>
+                <a:latin typeface="Lato"/>
+              </a:rPr>
+              <a:t>—  6 / 6 numbers, 0 privacy leaks</a:t>
+            </a:r>
+          </a:p>
+          <a:p>
+            <a:pPr algn="l">
+              <a:lnSpc>
+                <a:spcPct val="150000"/>
+              </a:lnSpc>
+            </a:pPr>
+            <a:r>
+              <a:rPr sz="1600" b="0">
+                <a:solidFill>
+                  <a:srgbClr val="141A22"/>
+                </a:solidFill>
+                <a:latin typeface="Lato"/>
+              </a:rPr>
+              <a:t>—  10 / 10 consistent across 3 runs, 5.7 s</a:t>
+            </a:r>
+          </a:p>
+          <a:p>
+            <a:pPr algn="l">
+              <a:lnSpc>
+                <a:spcPct val="150000"/>
+              </a:lnSpc>
+            </a:pPr>
+            <a:r>
+              <a:rPr sz="1600" b="0">
+                <a:solidFill>
+                  <a:srgbClr val="141A22"/>
+                </a:solidFill>
+                <a:latin typeface="Lato"/>
+              </a:rPr>
+              <a:t>—  34 / 36 unseen requests, incl. German</a:t>
+            </a:r>
+          </a:p>
+          <a:p>
+            <a:pPr algn="l">
+              <a:lnSpc>
+                <a:spcPct val="150000"/>
+              </a:lnSpc>
+            </a:pPr>
+            <a:r>
+              <a:rPr sz="1600" b="0">
+                <a:solidFill>
+                  <a:srgbClr val="141A22"/>
+                </a:solidFill>
+                <a:latin typeface="Lato"/>
+              </a:rPr>
+              <a:t>—  Secure room: images only, download 403</a:t>
+            </a:r>
+          </a:p>
+        </p:txBody>
+      </p:sp>
+      <p:sp>
+        <p:nvSpPr>
+          <p:cNvPr id="10" name="Rectangle 9"/>
           <p:cNvSpPr/>
           <p:nvPr/>
         </p:nvSpPr>
         <p:spPr>
           <a:xfrm>
-            <a:off x="822960" y="2377440"/>
-            <a:ext cx="2103120" cy="640080"/>
-          </a:xfrm>
-          <a:prstGeom prst="roundRect">
-            <a:avLst>
-              <a:gd name="adj" fmla="val 8000"/>
-            </a:avLst>
+            <a:off x="6370167" y="2286000"/>
+            <a:ext cx="457200" cy="45720"/>
+          </a:xfrm>
+          <a:prstGeom prst="rect">
+            <a:avLst/>
           </a:prstGeom>
           <a:solidFill>
             <a:srgbClr val="C62828"/>
@@ -6527,14 +6931,14 @@
       </p:sp>
       <p:sp>
         <p:nvSpPr>
-          <p:cNvPr id="6" name="TextBox 5"/>
+          <p:cNvPr id="11" name="TextBox 10"/>
           <p:cNvSpPr txBox="1"/>
           <p:nvPr/>
         </p:nvSpPr>
         <p:spPr>
           <a:xfrm>
-            <a:off x="822960" y="2377440"/>
-            <a:ext cx="2103120" cy="640080"/>
+            <a:off x="6370167" y="2514600"/>
+            <a:ext cx="4998567" cy="548640"/>
           </a:xfrm>
           <a:prstGeom prst="rect">
             <a:avLst/>
@@ -6542,34 +6946,38 @@
           <a:noFill/>
         </p:spPr>
         <p:txBody>
-          <a:bodyPr wrap="square" anchor="ctr" lIns="45720" rIns="45720">
+          <a:bodyPr wrap="square" anchor="t" lIns="0" rIns="0" tIns="0" bIns="0">
             <a:spAutoFit/>
           </a:bodyPr>
           <a:lstStyle/>
           <a:p>
-            <a:pPr algn="ctr"/>
-            <a:r>
-              <a:rPr sz="2000" b="1">
-                <a:solidFill>
-                  <a:srgbClr val="FFFFFF"/>
-                </a:solidFill>
-                <a:latin typeface="Inter"/>
+            <a:pPr algn="l">
+              <a:lnSpc>
+                <a:spcPct val="115000"/>
+              </a:lnSpc>
+            </a:pPr>
+            <a:r>
+              <a:rPr sz="2200" b="1">
+                <a:solidFill>
+                  <a:srgbClr val="C62828"/>
+                </a:solidFill>
+                <a:latin typeface="Lato"/>
               </a:rPr>
-              <a:t>R02</a:t>
-            </a:r>
-          </a:p>
-        </p:txBody>
-      </p:sp>
-      <p:sp>
-        <p:nvSpPr>
-          <p:cNvPr id="7" name="TextBox 6"/>
+              <a:t>Not yet</a:t>
+            </a:r>
+          </a:p>
+        </p:txBody>
+      </p:sp>
+      <p:sp>
+        <p:nvSpPr>
+          <p:cNvPr id="12" name="TextBox 11"/>
           <p:cNvSpPr txBox="1"/>
           <p:nvPr/>
         </p:nvSpPr>
         <p:spPr>
           <a:xfrm>
-            <a:off x="960120" y="3154680"/>
-            <a:ext cx="1828800" cy="1097280"/>
+            <a:off x="6370167" y="3154680"/>
+            <a:ext cx="4998567" cy="3200400"/>
           </a:xfrm>
           <a:prstGeom prst="rect">
             <a:avLst/>
@@ -6577,34 +6985,86 @@
           <a:noFill/>
         </p:spPr>
         <p:txBody>
-          <a:bodyPr wrap="square" anchor="t" lIns="45720" rIns="45720">
+          <a:bodyPr wrap="square" anchor="t" lIns="0" rIns="0" tIns="0" bIns="0">
             <a:spAutoFit/>
           </a:bodyPr>
           <a:lstStyle/>
           <a:p>
-            <a:pPr algn="ctr"/>
-            <a:r>
-              <a:rPr sz="1500" b="0">
-                <a:solidFill>
-                  <a:srgbClr val="1F2A37"/>
-                </a:solidFill>
-                <a:latin typeface="Inter"/>
+            <a:pPr algn="l">
+              <a:lnSpc>
+                <a:spcPct val="150000"/>
+              </a:lnSpc>
+            </a:pPr>
+            <a:r>
+              <a:rPr sz="1600" b="0">
+                <a:solidFill>
+                  <a:srgbClr val="141A22"/>
+                </a:solidFill>
+                <a:latin typeface="Lato"/>
               </a:rPr>
-              <a:t>Insurer wants to price premiums</a:t>
-            </a:r>
-          </a:p>
-        </p:txBody>
-      </p:sp>
-      <p:sp>
-        <p:nvSpPr>
-          <p:cNvPr id="8" name="TextBox 7"/>
+              <a:t>—  Sometimes too strict when a study mentions a prohibited topic</a:t>
+            </a:r>
+          </a:p>
+          <a:p>
+            <a:pPr algn="l">
+              <a:lnSpc>
+                <a:spcPct val="150000"/>
+              </a:lnSpc>
+            </a:pPr>
+            <a:r>
+              <a:rPr sz="1600" b="0">
+                <a:solidFill>
+                  <a:srgbClr val="141A22"/>
+                </a:solidFill>
+                <a:latin typeface="Lato"/>
+              </a:rPr>
+              <a:t>—  Cited point within Art. 53 can vary</a:t>
+            </a:r>
+          </a:p>
+          <a:p>
+            <a:pPr algn="l">
+              <a:lnSpc>
+                <a:spcPct val="150000"/>
+              </a:lnSpc>
+            </a:pPr>
+            <a:r>
+              <a:rPr sz="1600" b="0">
+                <a:solidFill>
+                  <a:srgbClr val="141A22"/>
+                </a:solidFill>
+                <a:latin typeface="Lato"/>
+              </a:rPr>
+              <a:t>—  Staff submission list is a placeholder</a:t>
+            </a:r>
+          </a:p>
+          <a:p>
+            <a:pPr algn="l">
+              <a:lnSpc>
+                <a:spcPct val="150000"/>
+              </a:lnSpc>
+            </a:pPr>
+            <a:r>
+              <a:rPr sz="1600" b="0">
+                <a:solidFill>
+                  <a:srgbClr val="141A22"/>
+                </a:solidFill>
+                <a:latin typeface="Lato"/>
+              </a:rPr>
+              <a:t>—  Screens can be photographed — true of every SPE</a:t>
+            </a:r>
+          </a:p>
+        </p:txBody>
+      </p:sp>
+      <p:sp>
+        <p:nvSpPr>
+          <p:cNvPr id="13" name="TextBox 12"/>
           <p:cNvSpPr txBox="1"/>
           <p:nvPr/>
         </p:nvSpPr>
         <p:spPr>
           <a:xfrm>
-            <a:off x="960120" y="4206240"/>
-            <a:ext cx="1828800" cy="1005840"/>
+            <a:off x="822960" y="5760720"/>
+            <a:ext cx="10545775" cy="365760"/>
           </a:xfrm>
           <a:prstGeom prst="rect">
             <a:avLst/>
@@ -6612,843 +7072,24 @@
           <a:noFill/>
         </p:spPr>
         <p:txBody>
-          <a:bodyPr wrap="square" anchor="t" lIns="45720" rIns="45720">
+          <a:bodyPr wrap="square" anchor="t" lIns="0" rIns="0" tIns="0" bIns="0">
             <a:spAutoFit/>
           </a:bodyPr>
           <a:lstStyle/>
           <a:p>
-            <a:pPr algn="ctr"/>
-            <a:r>
-              <a:rPr sz="1500" b="1">
-                <a:solidFill>
-                  <a:srgbClr val="C62828"/>
-                </a:solidFill>
-                <a:latin typeface="Inter"/>
+            <a:pPr algn="l">
+              <a:lnSpc>
+                <a:spcPct val="115000"/>
+              </a:lnSpc>
+            </a:pPr>
+            <a:r>
+              <a:rPr sz="1400" b="1">
+                <a:solidFill>
+                  <a:srgbClr val="1A5FB4"/>
+                </a:solidFill>
+                <a:latin typeface="Lato"/>
               </a:rPr>
-              <a:t>Rejected — Art. 54(b) quoted</a:t>
-            </a:r>
-          </a:p>
-        </p:txBody>
-      </p:sp>
-      <p:sp>
-        <p:nvSpPr>
-          <p:cNvPr id="9" name="Rounded Rectangle 8"/>
-          <p:cNvSpPr/>
-          <p:nvPr/>
-        </p:nvSpPr>
-        <p:spPr>
-          <a:xfrm>
-            <a:off x="3063240" y="2377440"/>
-            <a:ext cx="2103120" cy="2926080"/>
-          </a:xfrm>
-          <a:prstGeom prst="roundRect">
-            <a:avLst>
-              <a:gd name="adj" fmla="val 8000"/>
-            </a:avLst>
-          </a:prstGeom>
-          <a:solidFill>
-            <a:srgbClr val="FFFFFF"/>
-          </a:solidFill>
-          <a:ln>
-            <a:noFill/>
-          </a:ln>
-          <a:effectLst/>
-        </p:spPr>
-        <p:style>
-          <a:lnRef idx="1">
-            <a:schemeClr val="accent1"/>
-          </a:lnRef>
-          <a:fillRef idx="3">
-            <a:schemeClr val="accent1"/>
-          </a:fillRef>
-          <a:effectRef idx="2">
-            <a:schemeClr val="accent1"/>
-          </a:effectRef>
-          <a:fontRef idx="minor">
-            <a:schemeClr val="lt1"/>
-          </a:fontRef>
-        </p:style>
-        <p:txBody>
-          <a:bodyPr rtlCol="0" anchor="ctr"/>
-          <a:lstStyle/>
-          <a:p>
-            <a:pPr algn="ctr"/>
-          </a:p>
-        </p:txBody>
-      </p:sp>
-      <p:sp>
-        <p:nvSpPr>
-          <p:cNvPr id="10" name="Rounded Rectangle 9"/>
-          <p:cNvSpPr/>
-          <p:nvPr/>
-        </p:nvSpPr>
-        <p:spPr>
-          <a:xfrm>
-            <a:off x="3063240" y="2377440"/>
-            <a:ext cx="2103120" cy="640080"/>
-          </a:xfrm>
-          <a:prstGeom prst="roundRect">
-            <a:avLst>
-              <a:gd name="adj" fmla="val 8000"/>
-            </a:avLst>
-          </a:prstGeom>
-          <a:solidFill>
-            <a:srgbClr val="2E7D32"/>
-          </a:solidFill>
-          <a:ln>
-            <a:noFill/>
-          </a:ln>
-          <a:effectLst/>
-        </p:spPr>
-        <p:style>
-          <a:lnRef idx="1">
-            <a:schemeClr val="accent1"/>
-          </a:lnRef>
-          <a:fillRef idx="3">
-            <a:schemeClr val="accent1"/>
-          </a:fillRef>
-          <a:effectRef idx="2">
-            <a:schemeClr val="accent1"/>
-          </a:effectRef>
-          <a:fontRef idx="minor">
-            <a:schemeClr val="lt1"/>
-          </a:fontRef>
-        </p:style>
-        <p:txBody>
-          <a:bodyPr rtlCol="0" anchor="ctr"/>
-          <a:lstStyle/>
-          <a:p>
-            <a:pPr algn="ctr"/>
-          </a:p>
-        </p:txBody>
-      </p:sp>
-      <p:sp>
-        <p:nvSpPr>
-          <p:cNvPr id="11" name="TextBox 10"/>
-          <p:cNvSpPr txBox="1"/>
-          <p:nvPr/>
-        </p:nvSpPr>
-        <p:spPr>
-          <a:xfrm>
-            <a:off x="3063240" y="2377440"/>
-            <a:ext cx="2103120" cy="640080"/>
-          </a:xfrm>
-          <a:prstGeom prst="rect">
-            <a:avLst/>
-          </a:prstGeom>
-          <a:noFill/>
-        </p:spPr>
-        <p:txBody>
-          <a:bodyPr wrap="square" anchor="ctr" lIns="45720" rIns="45720">
-            <a:spAutoFit/>
-          </a:bodyPr>
-          <a:lstStyle/>
-          <a:p>
-            <a:pPr algn="ctr"/>
-            <a:r>
-              <a:rPr sz="2000" b="1">
-                <a:solidFill>
-                  <a:srgbClr val="FFFFFF"/>
-                </a:solidFill>
-                <a:latin typeface="Inter"/>
-              </a:rPr>
-              <a:t>R01</a:t>
-            </a:r>
-          </a:p>
-        </p:txBody>
-      </p:sp>
-      <p:sp>
-        <p:nvSpPr>
-          <p:cNvPr id="12" name="TextBox 11"/>
-          <p:cNvSpPr txBox="1"/>
-          <p:nvPr/>
-        </p:nvSpPr>
-        <p:spPr>
-          <a:xfrm>
-            <a:off x="3200400" y="3154680"/>
-            <a:ext cx="1828800" cy="1097280"/>
-          </a:xfrm>
-          <a:prstGeom prst="rect">
-            <a:avLst/>
-          </a:prstGeom>
-          <a:noFill/>
-        </p:spPr>
-        <p:txBody>
-          <a:bodyPr wrap="square" anchor="t" lIns="45720" rIns="45720">
-            <a:spAutoFit/>
-          </a:bodyPr>
-          <a:lstStyle/>
-          <a:p>
-            <a:pPr algn="ctr"/>
-            <a:r>
-              <a:rPr sz="1500" b="0">
-                <a:solidFill>
-                  <a:srgbClr val="1F2A37"/>
-                </a:solidFill>
-                <a:latin typeface="Inter"/>
-              </a:rPr>
-              <a:t>Diabetes prevalence by region</a:t>
-            </a:r>
-          </a:p>
-        </p:txBody>
-      </p:sp>
-      <p:sp>
-        <p:nvSpPr>
-          <p:cNvPr id="13" name="TextBox 12"/>
-          <p:cNvSpPr txBox="1"/>
-          <p:nvPr/>
-        </p:nvSpPr>
-        <p:spPr>
-          <a:xfrm>
-            <a:off x="3200400" y="4206240"/>
-            <a:ext cx="1828800" cy="1005840"/>
-          </a:xfrm>
-          <a:prstGeom prst="rect">
-            <a:avLst/>
-          </a:prstGeom>
-          <a:noFill/>
-        </p:spPr>
-        <p:txBody>
-          <a:bodyPr wrap="square" anchor="t" lIns="45720" rIns="45720">
-            <a:spAutoFit/>
-          </a:bodyPr>
-          <a:lstStyle/>
-          <a:p>
-            <a:pPr algn="ctr"/>
-            <a:r>
-              <a:rPr sz="1500" b="1">
-                <a:solidFill>
-                  <a:srgbClr val="2E7D32"/>
-                </a:solidFill>
-                <a:latin typeface="Inter"/>
-              </a:rPr>
-              <a:t>Statistics, small cells hidden</a:t>
-            </a:r>
-          </a:p>
-        </p:txBody>
-      </p:sp>
-      <p:sp>
-        <p:nvSpPr>
-          <p:cNvPr id="14" name="Rounded Rectangle 13"/>
-          <p:cNvSpPr/>
-          <p:nvPr/>
-        </p:nvSpPr>
-        <p:spPr>
-          <a:xfrm>
-            <a:off x="5303520" y="2377440"/>
-            <a:ext cx="2103120" cy="2926080"/>
-          </a:xfrm>
-          <a:prstGeom prst="roundRect">
-            <a:avLst>
-              <a:gd name="adj" fmla="val 8000"/>
-            </a:avLst>
-          </a:prstGeom>
-          <a:solidFill>
-            <a:srgbClr val="FFFFFF"/>
-          </a:solidFill>
-          <a:ln>
-            <a:noFill/>
-          </a:ln>
-          <a:effectLst/>
-        </p:spPr>
-        <p:style>
-          <a:lnRef idx="1">
-            <a:schemeClr val="accent1"/>
-          </a:lnRef>
-          <a:fillRef idx="3">
-            <a:schemeClr val="accent1"/>
-          </a:fillRef>
-          <a:effectRef idx="2">
-            <a:schemeClr val="accent1"/>
-          </a:effectRef>
-          <a:fontRef idx="minor">
-            <a:schemeClr val="lt1"/>
-          </a:fontRef>
-        </p:style>
-        <p:txBody>
-          <a:bodyPr rtlCol="0" anchor="ctr"/>
-          <a:lstStyle/>
-          <a:p>
-            <a:pPr algn="ctr"/>
-          </a:p>
-        </p:txBody>
-      </p:sp>
-      <p:sp>
-        <p:nvSpPr>
-          <p:cNvPr id="15" name="Rounded Rectangle 14"/>
-          <p:cNvSpPr/>
-          <p:nvPr/>
-        </p:nvSpPr>
-        <p:spPr>
-          <a:xfrm>
-            <a:off x="5303520" y="2377440"/>
-            <a:ext cx="2103120" cy="640080"/>
-          </a:xfrm>
-          <a:prstGeom prst="roundRect">
-            <a:avLst>
-              <a:gd name="adj" fmla="val 8000"/>
-            </a:avLst>
-          </a:prstGeom>
-          <a:solidFill>
-            <a:srgbClr val="F0B429"/>
-          </a:solidFill>
-          <a:ln>
-            <a:noFill/>
-          </a:ln>
-          <a:effectLst/>
-        </p:spPr>
-        <p:style>
-          <a:lnRef idx="1">
-            <a:schemeClr val="accent1"/>
-          </a:lnRef>
-          <a:fillRef idx="3">
-            <a:schemeClr val="accent1"/>
-          </a:fillRef>
-          <a:effectRef idx="2">
-            <a:schemeClr val="accent1"/>
-          </a:effectRef>
-          <a:fontRef idx="minor">
-            <a:schemeClr val="lt1"/>
-          </a:fontRef>
-        </p:style>
-        <p:txBody>
-          <a:bodyPr rtlCol="0" anchor="ctr"/>
-          <a:lstStyle/>
-          <a:p>
-            <a:pPr algn="ctr"/>
-          </a:p>
-        </p:txBody>
-      </p:sp>
-      <p:sp>
-        <p:nvSpPr>
-          <p:cNvPr id="16" name="TextBox 15"/>
-          <p:cNvSpPr txBox="1"/>
-          <p:nvPr/>
-        </p:nvSpPr>
-        <p:spPr>
-          <a:xfrm>
-            <a:off x="5303520" y="2377440"/>
-            <a:ext cx="2103120" cy="640080"/>
-          </a:xfrm>
-          <a:prstGeom prst="rect">
-            <a:avLst/>
-          </a:prstGeom>
-          <a:noFill/>
-        </p:spPr>
-        <p:txBody>
-          <a:bodyPr wrap="square" anchor="ctr" lIns="45720" rIns="45720">
-            <a:spAutoFit/>
-          </a:bodyPr>
-          <a:lstStyle/>
-          <a:p>
-            <a:pPr algn="ctr"/>
-            <a:r>
-              <a:rPr sz="2000" b="1">
-                <a:solidFill>
-                  <a:srgbClr val="FFFFFF"/>
-                </a:solidFill>
-                <a:latin typeface="Inter"/>
-              </a:rPr>
-              <a:t>R11</a:t>
-            </a:r>
-          </a:p>
-        </p:txBody>
-      </p:sp>
-      <p:sp>
-        <p:nvSpPr>
-          <p:cNvPr id="17" name="TextBox 16"/>
-          <p:cNvSpPr txBox="1"/>
-          <p:nvPr/>
-        </p:nvSpPr>
-        <p:spPr>
-          <a:xfrm>
-            <a:off x="5440680" y="3154680"/>
-            <a:ext cx="1828800" cy="1097280"/>
-          </a:xfrm>
-          <a:prstGeom prst="rect">
-            <a:avLst/>
-          </a:prstGeom>
-          <a:noFill/>
-        </p:spPr>
-        <p:txBody>
-          <a:bodyPr wrap="square" anchor="t" lIns="45720" rIns="45720">
-            <a:spAutoFit/>
-          </a:bodyPr>
-          <a:lstStyle/>
-          <a:p>
-            <a:pPr algn="ctr"/>
-            <a:r>
-              <a:rPr sz="1500" b="0">
-                <a:solidFill>
-                  <a:srgbClr val="1F2A37"/>
-                </a:solidFill>
-                <a:latin typeface="Inter"/>
-              </a:rPr>
-              <a:t>Same, written in German</a:t>
-            </a:r>
-          </a:p>
-        </p:txBody>
-      </p:sp>
-      <p:sp>
-        <p:nvSpPr>
-          <p:cNvPr id="18" name="TextBox 17"/>
-          <p:cNvSpPr txBox="1"/>
-          <p:nvPr/>
-        </p:nvSpPr>
-        <p:spPr>
-          <a:xfrm>
-            <a:off x="5440680" y="4206240"/>
-            <a:ext cx="1828800" cy="1005840"/>
-          </a:xfrm>
-          <a:prstGeom prst="rect">
-            <a:avLst/>
-          </a:prstGeom>
-          <a:noFill/>
-        </p:spPr>
-        <p:txBody>
-          <a:bodyPr wrap="square" anchor="t" lIns="45720" rIns="45720">
-            <a:spAutoFit/>
-          </a:bodyPr>
-          <a:lstStyle/>
-          <a:p>
-            <a:pPr algn="ctr"/>
-            <a:r>
-              <a:rPr sz="1500" b="1">
-                <a:solidFill>
-                  <a:srgbClr val="F0B429"/>
-                </a:solidFill>
-                <a:latin typeface="Inter"/>
-              </a:rPr>
-              <a:t>Translated once, same rulebook</a:t>
-            </a:r>
-          </a:p>
-        </p:txBody>
-      </p:sp>
-      <p:sp>
-        <p:nvSpPr>
-          <p:cNvPr id="19" name="Rounded Rectangle 18"/>
-          <p:cNvSpPr/>
-          <p:nvPr/>
-        </p:nvSpPr>
-        <p:spPr>
-          <a:xfrm>
-            <a:off x="7543800" y="2377440"/>
-            <a:ext cx="2103120" cy="2926080"/>
-          </a:xfrm>
-          <a:prstGeom prst="roundRect">
-            <a:avLst>
-              <a:gd name="adj" fmla="val 8000"/>
-            </a:avLst>
-          </a:prstGeom>
-          <a:solidFill>
-            <a:srgbClr val="FFFFFF"/>
-          </a:solidFill>
-          <a:ln>
-            <a:noFill/>
-          </a:ln>
-          <a:effectLst/>
-        </p:spPr>
-        <p:style>
-          <a:lnRef idx="1">
-            <a:schemeClr val="accent1"/>
-          </a:lnRef>
-          <a:fillRef idx="3">
-            <a:schemeClr val="accent1"/>
-          </a:fillRef>
-          <a:effectRef idx="2">
-            <a:schemeClr val="accent1"/>
-          </a:effectRef>
-          <a:fontRef idx="minor">
-            <a:schemeClr val="lt1"/>
-          </a:fontRef>
-        </p:style>
-        <p:txBody>
-          <a:bodyPr rtlCol="0" anchor="ctr"/>
-          <a:lstStyle/>
-          <a:p>
-            <a:pPr algn="ctr"/>
-          </a:p>
-        </p:txBody>
-      </p:sp>
-      <p:sp>
-        <p:nvSpPr>
-          <p:cNvPr id="20" name="Rounded Rectangle 19"/>
-          <p:cNvSpPr/>
-          <p:nvPr/>
-        </p:nvSpPr>
-        <p:spPr>
-          <a:xfrm>
-            <a:off x="7543800" y="2377440"/>
-            <a:ext cx="2103120" cy="640080"/>
-          </a:xfrm>
-          <a:prstGeom prst="roundRect">
-            <a:avLst>
-              <a:gd name="adj" fmla="val 8000"/>
-            </a:avLst>
-          </a:prstGeom>
-          <a:solidFill>
-            <a:srgbClr val="1565C0"/>
-          </a:solidFill>
-          <a:ln>
-            <a:noFill/>
-          </a:ln>
-          <a:effectLst/>
-        </p:spPr>
-        <p:style>
-          <a:lnRef idx="1">
-            <a:schemeClr val="accent1"/>
-          </a:lnRef>
-          <a:fillRef idx="3">
-            <a:schemeClr val="accent1"/>
-          </a:fillRef>
-          <a:effectRef idx="2">
-            <a:schemeClr val="accent1"/>
-          </a:effectRef>
-          <a:fontRef idx="minor">
-            <a:schemeClr val="lt1"/>
-          </a:fontRef>
-        </p:style>
-        <p:txBody>
-          <a:bodyPr rtlCol="0" anchor="ctr"/>
-          <a:lstStyle/>
-          <a:p>
-            <a:pPr algn="ctr"/>
-          </a:p>
-        </p:txBody>
-      </p:sp>
-      <p:sp>
-        <p:nvSpPr>
-          <p:cNvPr id="21" name="TextBox 20"/>
-          <p:cNvSpPr txBox="1"/>
-          <p:nvPr/>
-        </p:nvSpPr>
-        <p:spPr>
-          <a:xfrm>
-            <a:off x="7543800" y="2377440"/>
-            <a:ext cx="2103120" cy="640080"/>
-          </a:xfrm>
-          <a:prstGeom prst="rect">
-            <a:avLst/>
-          </a:prstGeom>
-          <a:noFill/>
-        </p:spPr>
-        <p:txBody>
-          <a:bodyPr wrap="square" anchor="ctr" lIns="45720" rIns="45720">
-            <a:spAutoFit/>
-          </a:bodyPr>
-          <a:lstStyle/>
-          <a:p>
-            <a:pPr algn="ctr"/>
-            <a:r>
-              <a:rPr sz="2000" b="1">
-                <a:solidFill>
-                  <a:srgbClr val="FFFFFF"/>
-                </a:solidFill>
-                <a:latin typeface="Inter"/>
-              </a:rPr>
-              <a:t>R12</a:t>
-            </a:r>
-          </a:p>
-        </p:txBody>
-      </p:sp>
-      <p:sp>
-        <p:nvSpPr>
-          <p:cNvPr id="22" name="TextBox 21"/>
-          <p:cNvSpPr txBox="1"/>
-          <p:nvPr/>
-        </p:nvSpPr>
-        <p:spPr>
-          <a:xfrm>
-            <a:off x="7680960" y="3154680"/>
-            <a:ext cx="1828800" cy="1097280"/>
-          </a:xfrm>
-          <a:prstGeom prst="rect">
-            <a:avLst/>
-          </a:prstGeom>
-          <a:noFill/>
-        </p:spPr>
-        <p:txBody>
-          <a:bodyPr wrap="square" anchor="t" lIns="45720" rIns="45720">
-            <a:spAutoFit/>
-          </a:bodyPr>
-          <a:lstStyle/>
-          <a:p>
-            <a:pPr algn="ctr"/>
-            <a:r>
-              <a:rPr sz="1500" b="0">
-                <a:solidFill>
-                  <a:srgbClr val="1F2A37"/>
-                </a:solidFill>
-                <a:latin typeface="Inter"/>
-              </a:rPr>
-              <a:t>Heart-failure records for a model</a:t>
-            </a:r>
-          </a:p>
-        </p:txBody>
-      </p:sp>
-      <p:sp>
-        <p:nvSpPr>
-          <p:cNvPr id="23" name="TextBox 22"/>
-          <p:cNvSpPr txBox="1"/>
-          <p:nvPr/>
-        </p:nvSpPr>
-        <p:spPr>
-          <a:xfrm>
-            <a:off x="7680960" y="4206240"/>
-            <a:ext cx="1828800" cy="1005840"/>
-          </a:xfrm>
-          <a:prstGeom prst="rect">
-            <a:avLst/>
-          </a:prstGeom>
-          <a:noFill/>
-        </p:spPr>
-        <p:txBody>
-          <a:bodyPr wrap="square" anchor="t" lIns="45720" rIns="45720">
-            <a:spAutoFit/>
-          </a:bodyPr>
-          <a:lstStyle/>
-          <a:p>
-            <a:pPr algn="ctr"/>
-            <a:r>
-              <a:rPr sz="1500" b="1">
-                <a:solidFill>
-                  <a:srgbClr val="1565C0"/>
-                </a:solidFill>
-                <a:latin typeface="Inter"/>
-              </a:rPr>
-              <a:t>Secure room, download → 403</a:t>
-            </a:r>
-          </a:p>
-        </p:txBody>
-      </p:sp>
-      <p:sp>
-        <p:nvSpPr>
-          <p:cNvPr id="24" name="Rounded Rectangle 23"/>
-          <p:cNvSpPr/>
-          <p:nvPr/>
-        </p:nvSpPr>
-        <p:spPr>
-          <a:xfrm>
-            <a:off x="9784080" y="2377440"/>
-            <a:ext cx="2103120" cy="2926080"/>
-          </a:xfrm>
-          <a:prstGeom prst="roundRect">
-            <a:avLst>
-              <a:gd name="adj" fmla="val 8000"/>
-            </a:avLst>
-          </a:prstGeom>
-          <a:solidFill>
-            <a:srgbClr val="FFFFFF"/>
-          </a:solidFill>
-          <a:ln>
-            <a:noFill/>
-          </a:ln>
-          <a:effectLst/>
-        </p:spPr>
-        <p:style>
-          <a:lnRef idx="1">
-            <a:schemeClr val="accent1"/>
-          </a:lnRef>
-          <a:fillRef idx="3">
-            <a:schemeClr val="accent1"/>
-          </a:fillRef>
-          <a:effectRef idx="2">
-            <a:schemeClr val="accent1"/>
-          </a:effectRef>
-          <a:fontRef idx="minor">
-            <a:schemeClr val="lt1"/>
-          </a:fontRef>
-        </p:style>
-        <p:txBody>
-          <a:bodyPr rtlCol="0" anchor="ctr"/>
-          <a:lstStyle/>
-          <a:p>
-            <a:pPr algn="ctr"/>
-          </a:p>
-        </p:txBody>
-      </p:sp>
-      <p:sp>
-        <p:nvSpPr>
-          <p:cNvPr id="25" name="Rounded Rectangle 24"/>
-          <p:cNvSpPr/>
-          <p:nvPr/>
-        </p:nvSpPr>
-        <p:spPr>
-          <a:xfrm>
-            <a:off x="9784080" y="2377440"/>
-            <a:ext cx="2103120" cy="640080"/>
-          </a:xfrm>
-          <a:prstGeom prst="roundRect">
-            <a:avLst>
-              <a:gd name="adj" fmla="val 8000"/>
-            </a:avLst>
-          </a:prstGeom>
-          <a:solidFill>
-            <a:srgbClr val="C62828"/>
-          </a:solidFill>
-          <a:ln>
-            <a:noFill/>
-          </a:ln>
-          <a:effectLst/>
-        </p:spPr>
-        <p:style>
-          <a:lnRef idx="1">
-            <a:schemeClr val="accent1"/>
-          </a:lnRef>
-          <a:fillRef idx="3">
-            <a:schemeClr val="accent1"/>
-          </a:fillRef>
-          <a:effectRef idx="2">
-            <a:schemeClr val="accent1"/>
-          </a:effectRef>
-          <a:fontRef idx="minor">
-            <a:schemeClr val="lt1"/>
-          </a:fontRef>
-        </p:style>
-        <p:txBody>
-          <a:bodyPr rtlCol="0" anchor="ctr"/>
-          <a:lstStyle/>
-          <a:p>
-            <a:pPr algn="ctr"/>
-          </a:p>
-        </p:txBody>
-      </p:sp>
-      <p:sp>
-        <p:nvSpPr>
-          <p:cNvPr id="26" name="TextBox 25"/>
-          <p:cNvSpPr txBox="1"/>
-          <p:nvPr/>
-        </p:nvSpPr>
-        <p:spPr>
-          <a:xfrm>
-            <a:off x="9784080" y="2377440"/>
-            <a:ext cx="2103120" cy="640080"/>
-          </a:xfrm>
-          <a:prstGeom prst="rect">
-            <a:avLst/>
-          </a:prstGeom>
-          <a:noFill/>
-        </p:spPr>
-        <p:txBody>
-          <a:bodyPr wrap="square" anchor="ctr" lIns="45720" rIns="45720">
-            <a:spAutoFit/>
-          </a:bodyPr>
-          <a:lstStyle/>
-          <a:p>
-            <a:pPr algn="ctr"/>
-            <a:r>
-              <a:rPr sz="2000" b="1">
-                <a:solidFill>
-                  <a:srgbClr val="FFFFFF"/>
-                </a:solidFill>
-                <a:latin typeface="Inter"/>
-              </a:rPr>
-              <a:t>flood</a:t>
-            </a:r>
-          </a:p>
-        </p:txBody>
-      </p:sp>
-      <p:sp>
-        <p:nvSpPr>
-          <p:cNvPr id="27" name="TextBox 26"/>
-          <p:cNvSpPr txBox="1"/>
-          <p:nvPr/>
-        </p:nvSpPr>
-        <p:spPr>
-          <a:xfrm>
-            <a:off x="9921240" y="3154680"/>
-            <a:ext cx="1828800" cy="1097280"/>
-          </a:xfrm>
-          <a:prstGeom prst="rect">
-            <a:avLst/>
-          </a:prstGeom>
-          <a:noFill/>
-        </p:spPr>
-        <p:txBody>
-          <a:bodyPr wrap="square" anchor="t" lIns="45720" rIns="45720">
-            <a:spAutoFit/>
-          </a:bodyPr>
-          <a:lstStyle/>
-          <a:p>
-            <a:pPr algn="ctr"/>
-            <a:r>
-              <a:rPr sz="1500" b="0">
-                <a:solidFill>
-                  <a:srgbClr val="1F2A37"/>
-                </a:solidFill>
-                <a:latin typeface="Inter"/>
-              </a:rPr>
-              <a:t>30 requests in 0.15 s</a:t>
-            </a:r>
-          </a:p>
-        </p:txBody>
-      </p:sp>
-      <p:sp>
-        <p:nvSpPr>
-          <p:cNvPr id="28" name="TextBox 27"/>
-          <p:cNvSpPr txBox="1"/>
-          <p:nvPr/>
-        </p:nvSpPr>
-        <p:spPr>
-          <a:xfrm>
-            <a:off x="9921240" y="4206240"/>
-            <a:ext cx="1828800" cy="1005840"/>
-          </a:xfrm>
-          <a:prstGeom prst="rect">
-            <a:avLst/>
-          </a:prstGeom>
-          <a:noFill/>
-        </p:spPr>
-        <p:txBody>
-          <a:bodyPr wrap="square" anchor="t" lIns="45720" rIns="45720">
-            <a:spAutoFit/>
-          </a:bodyPr>
-          <a:lstStyle/>
-          <a:p>
-            <a:pPr algn="ctr"/>
-            <a:r>
-              <a:rPr sz="1500" b="1">
-                <a:solidFill>
-                  <a:srgbClr val="C62828"/>
-                </a:solidFill>
-                <a:latin typeface="Inter"/>
-              </a:rPr>
-              <a:t>Blocked from #21 — 429</a:t>
-            </a:r>
-          </a:p>
-        </p:txBody>
-      </p:sp>
-      <p:sp>
-        <p:nvSpPr>
-          <p:cNvPr id="29" name="TextBox 28"/>
-          <p:cNvSpPr txBox="1"/>
-          <p:nvPr/>
-        </p:nvSpPr>
-        <p:spPr>
-          <a:xfrm>
-            <a:off x="822960" y="5669280"/>
-            <a:ext cx="10515600" cy="457200"/>
-          </a:xfrm>
-          <a:prstGeom prst="rect">
-            <a:avLst/>
-          </a:prstGeom>
-          <a:noFill/>
-        </p:spPr>
-        <p:txBody>
-          <a:bodyPr wrap="square" anchor="t" lIns="45720" rIns="45720">
-            <a:spAutoFit/>
-          </a:bodyPr>
-          <a:lstStyle/>
-          <a:p>
-            <a:pPr algn="l"/>
-            <a:r>
-              <a:rPr sz="1600" b="0">
-                <a:solidFill>
-                  <a:srgbClr val="DBE6F3"/>
-                </a:solidFill>
-                <a:latin typeface="Inter"/>
-              </a:rPr>
-              <a:t>Live, on 20,000 synthetic patients. Switch to the screen capture now.</a:t>
+              <a:t>github.com/MatthiasEbner2002/Track_3-HalfSecuredTeam</a:t>
             </a:r>
           </a:p>
         </p:txBody>
@@ -7479,14 +7120,14 @@
         </p:nvSpPr>
         <p:spPr>
           <a:xfrm>
-            <a:off x="0" y="0"/>
-            <a:ext cx="12191695" cy="1051560"/>
+            <a:off x="822960" y="2011680"/>
+            <a:ext cx="73152" cy="2377440"/>
           </a:xfrm>
           <a:prstGeom prst="rect">
             <a:avLst/>
           </a:prstGeom>
           <a:solidFill>
-            <a:srgbClr val="1F3A5F"/>
+            <a:srgbClr val="1A5FB4"/>
           </a:solidFill>
           <a:ln>
             <a:noFill/>
@@ -7523,8 +7164,8 @@
         </p:nvSpPr>
         <p:spPr>
           <a:xfrm>
-            <a:off x="548640" y="182880"/>
-            <a:ext cx="8412480" cy="548640"/>
+            <a:off x="1234440" y="2011680"/>
+            <a:ext cx="10058400" cy="2377440"/>
           </a:xfrm>
           <a:prstGeom prst="rect">
             <a:avLst/>
@@ -7532,20 +7173,24 @@
           <a:noFill/>
         </p:spPr>
         <p:txBody>
-          <a:bodyPr wrap="square" anchor="t" lIns="45720" rIns="45720">
+          <a:bodyPr wrap="square" anchor="ctr" lIns="0" rIns="0" tIns="0" bIns="0">
             <a:spAutoFit/>
           </a:bodyPr>
           <a:lstStyle/>
           <a:p>
-            <a:pPr algn="l"/>
-            <a:r>
-              <a:rPr sz="2600" b="1">
-                <a:solidFill>
-                  <a:srgbClr val="FFFFFF"/>
-                </a:solidFill>
-                <a:latin typeface="Inter"/>
+            <a:pPr algn="l">
+              <a:lnSpc>
+                <a:spcPct val="110000"/>
+              </a:lnSpc>
+            </a:pPr>
+            <a:r>
+              <a:rPr sz="3600" b="1">
+                <a:solidFill>
+                  <a:srgbClr val="141A22"/>
+                </a:solidFill>
+                <a:latin typeface="Lato"/>
               </a:rPr>
-              <a:t>What works — and what does not yet</a:t>
+              <a:t>Decisions in seconds instead of weeks — every one explained, identical on every run.</a:t>
             </a:r>
           </a:p>
         </p:txBody>
@@ -7558,8 +7203,8 @@
         </p:nvSpPr>
         <p:spPr>
           <a:xfrm>
-            <a:off x="548640" y="658368"/>
-            <a:ext cx="8412480" cy="365760"/>
+            <a:off x="1234440" y="4572000"/>
+            <a:ext cx="10058400" cy="457200"/>
           </a:xfrm>
           <a:prstGeom prst="rect">
             <a:avLst/>
@@ -7567,20 +7212,24 @@
           <a:noFill/>
         </p:spPr>
         <p:txBody>
-          <a:bodyPr wrap="square" anchor="t" lIns="45720" rIns="45720">
+          <a:bodyPr wrap="square" anchor="t" lIns="0" rIns="0" tIns="0" bIns="0">
             <a:spAutoFit/>
           </a:bodyPr>
           <a:lstStyle/>
           <a:p>
-            <a:pPr algn="l"/>
-            <a:r>
-              <a:rPr sz="1300" b="0">
-                <a:solidFill>
-                  <a:srgbClr val="DBE6F3"/>
-                </a:solidFill>
-                <a:latin typeface="Inter"/>
+            <a:pPr algn="l">
+              <a:lnSpc>
+                <a:spcPct val="115000"/>
+              </a:lnSpc>
+            </a:pPr>
+            <a:r>
+              <a:rPr sz="1600" b="0">
+                <a:solidFill>
+                  <a:srgbClr val="6B7480"/>
+                </a:solidFill>
+                <a:latin typeface="Lato"/>
               </a:rPr>
-              <a:t>we say both, as asked</a:t>
+              <a:t>Thank you  ·  github.com/MatthiasEbner2002/Track_3-HalfSecuredTeam</a:t>
             </a:r>
           </a:p>
         </p:txBody>
@@ -7593,8 +7242,8 @@
         </p:nvSpPr>
         <p:spPr>
           <a:xfrm>
-            <a:off x="8503920" y="320040"/>
-            <a:ext cx="3200400" cy="457200"/>
+            <a:off x="822960" y="6355080"/>
+            <a:ext cx="7315200" cy="274320"/>
           </a:xfrm>
           <a:prstGeom prst="rect">
             <a:avLst/>
@@ -7602,47 +7251,182 @@
           <a:noFill/>
         </p:spPr>
         <p:txBody>
-          <a:bodyPr wrap="square" anchor="t" lIns="45720" rIns="45720">
+          <a:bodyPr wrap="square" anchor="t" lIns="0" rIns="0" tIns="0" bIns="0">
             <a:spAutoFit/>
           </a:bodyPr>
           <a:lstStyle/>
           <a:p>
-            <a:pPr algn="r"/>
-            <a:r>
-              <a:rPr sz="1200" b="0">
-                <a:solidFill>
-                  <a:srgbClr val="DBE6F3"/>
-                </a:solidFill>
-                <a:latin typeface="Inter"/>
+            <a:pPr algn="l">
+              <a:lnSpc>
+                <a:spcPct val="115000"/>
+              </a:lnSpc>
+            </a:pPr>
+            <a:r>
+              <a:rPr sz="1100" b="0">
+                <a:solidFill>
+                  <a:srgbClr val="6B7480"/>
+                </a:solidFill>
+                <a:latin typeface="Lato"/>
               </a:rPr>
-              <a:t>HalfSecuredTeam · Track 3</a:t>
-            </a:r>
-          </a:p>
-        </p:txBody>
-      </p:sp>
-      <p:sp>
-        <p:nvSpPr>
-          <p:cNvPr id="6" name="Rounded Rectangle 5"/>
+              <a:t>HalfSecuredTeam  ·  EHDS Track 3</a:t>
+            </a:r>
+          </a:p>
+        </p:txBody>
+      </p:sp>
+      <p:sp>
+        <p:nvSpPr>
+          <p:cNvPr id="6" name="TextBox 5"/>
+          <p:cNvSpPr txBox="1"/>
+          <p:nvPr/>
+        </p:nvSpPr>
+        <p:spPr>
+          <a:xfrm>
+            <a:off x="10454335" y="6355080"/>
+            <a:ext cx="914400" cy="274320"/>
+          </a:xfrm>
+          <a:prstGeom prst="rect">
+            <a:avLst/>
+          </a:prstGeom>
+          <a:noFill/>
+        </p:spPr>
+        <p:txBody>
+          <a:bodyPr wrap="square" anchor="t" lIns="0" rIns="0" tIns="0" bIns="0">
+            <a:spAutoFit/>
+          </a:bodyPr>
+          <a:lstStyle/>
+          <a:p>
+            <a:pPr algn="r">
+              <a:lnSpc>
+                <a:spcPct val="115000"/>
+              </a:lnSpc>
+            </a:pPr>
+            <a:r>
+              <a:rPr sz="1100" b="0">
+                <a:solidFill>
+                  <a:srgbClr val="6B7480"/>
+                </a:solidFill>
+                <a:latin typeface="Lato"/>
+              </a:rPr>
+              <a:t>7</a:t>
+            </a:r>
+          </a:p>
+        </p:txBody>
+      </p:sp>
+    </p:spTree>
+  </p:cSld>
+  <p:clrMapOvr>
+    <a:masterClrMapping/>
+  </p:clrMapOvr>
+</p:sld>
+</file>
+
+<file path=ppt/slides/slide8.xml><?xml version="1.0" encoding="utf-8"?>
+<p:sld xmlns:a="http://schemas.openxmlformats.org/drawingml/2006/main" xmlns:p="http://schemas.openxmlformats.org/presentationml/2006/main" xmlns:r="http://schemas.openxmlformats.org/officeDocument/2006/relationships">
+  <p:cSld>
+    <p:spTree>
+      <p:nvGrpSpPr>
+        <p:cNvPr id="1" name=""/>
+        <p:cNvGrpSpPr/>
+        <p:nvPr/>
+      </p:nvGrpSpPr>
+      <p:grpSpPr/>
+      <p:sp>
+        <p:nvSpPr>
+          <p:cNvPr id="2" name="TextBox 1"/>
+          <p:cNvSpPr txBox="1"/>
+          <p:nvPr/>
+        </p:nvSpPr>
+        <p:spPr>
+          <a:xfrm>
+            <a:off x="822960" y="685800"/>
+            <a:ext cx="10545775" cy="274320"/>
+          </a:xfrm>
+          <a:prstGeom prst="rect">
+            <a:avLst/>
+          </a:prstGeom>
+          <a:noFill/>
+        </p:spPr>
+        <p:txBody>
+          <a:bodyPr wrap="square" anchor="t" lIns="0" rIns="0" tIns="0" bIns="0">
+            <a:spAutoFit/>
+          </a:bodyPr>
+          <a:lstStyle/>
+          <a:p>
+            <a:pPr algn="l">
+              <a:lnSpc>
+                <a:spcPct val="115000"/>
+              </a:lnSpc>
+            </a:pPr>
+            <a:r>
+              <a:rPr sz="1200" b="1">
+                <a:solidFill>
+                  <a:srgbClr val="1A5FB4"/>
+                </a:solidFill>
+                <a:latin typeface="Lato"/>
+              </a:rPr>
+              <a:t>KICKER</a:t>
+            </a:r>
+          </a:p>
+        </p:txBody>
+      </p:sp>
+      <p:sp>
+        <p:nvSpPr>
+          <p:cNvPr id="3" name="TextBox 2"/>
+          <p:cNvSpPr txBox="1"/>
+          <p:nvPr/>
+        </p:nvSpPr>
+        <p:spPr>
+          <a:xfrm>
+            <a:off x="822960" y="1005840"/>
+            <a:ext cx="10545775" cy="822960"/>
+          </a:xfrm>
+          <a:prstGeom prst="rect">
+            <a:avLst/>
+          </a:prstGeom>
+          <a:noFill/>
+        </p:spPr>
+        <p:txBody>
+          <a:bodyPr wrap="square" anchor="t" lIns="0" rIns="0" tIns="0" bIns="0">
+            <a:spAutoFit/>
+          </a:bodyPr>
+          <a:lstStyle/>
+          <a:p>
+            <a:pPr algn="l">
+              <a:lnSpc>
+                <a:spcPct val="115000"/>
+              </a:lnSpc>
+            </a:pPr>
+            <a:r>
+              <a:rPr sz="3400" b="1">
+                <a:solidFill>
+                  <a:srgbClr val="141A22"/>
+                </a:solidFill>
+                <a:latin typeface="Lato"/>
+              </a:rPr>
+              <a:t>Content slide title</a:t>
+            </a:r>
+          </a:p>
+        </p:txBody>
+      </p:sp>
+      <p:sp>
+        <p:nvSpPr>
+          <p:cNvPr id="4" name="Rectangle 3"/>
           <p:cNvSpPr/>
           <p:nvPr/>
         </p:nvSpPr>
         <p:spPr>
           <a:xfrm>
-            <a:off x="548640" y="1371600"/>
-            <a:ext cx="5394960" cy="4480560"/>
-          </a:xfrm>
-          <a:prstGeom prst="roundRect">
-            <a:avLst>
-              <a:gd name="adj" fmla="val 8000"/>
-            </a:avLst>
+            <a:off x="822960" y="1874520"/>
+            <a:ext cx="640080" cy="45720"/>
+          </a:xfrm>
+          <a:prstGeom prst="rect">
+            <a:avLst/>
           </a:prstGeom>
           <a:solidFill>
-            <a:srgbClr val="F6F7F9"/>
+            <a:srgbClr val="1A5FB4"/>
           </a:solidFill>
-          <a:ln w="19050">
-            <a:solidFill>
-              <a:srgbClr val="2E7D32"/>
-            </a:solidFill>
+          <a:ln>
+            <a:noFill/>
           </a:ln>
           <a:effectLst/>
         </p:spPr>
@@ -7670,14 +7454,92 @@
       </p:sp>
       <p:sp>
         <p:nvSpPr>
+          <p:cNvPr id="5" name="TextBox 4"/>
+          <p:cNvSpPr txBox="1"/>
+          <p:nvPr/>
+        </p:nvSpPr>
+        <p:spPr>
+          <a:xfrm>
+            <a:off x="822960" y="6355080"/>
+            <a:ext cx="7315200" cy="274320"/>
+          </a:xfrm>
+          <a:prstGeom prst="rect">
+            <a:avLst/>
+          </a:prstGeom>
+          <a:noFill/>
+        </p:spPr>
+        <p:txBody>
+          <a:bodyPr wrap="square" anchor="t" lIns="0" rIns="0" tIns="0" bIns="0">
+            <a:spAutoFit/>
+          </a:bodyPr>
+          <a:lstStyle/>
+          <a:p>
+            <a:pPr algn="l">
+              <a:lnSpc>
+                <a:spcPct val="115000"/>
+              </a:lnSpc>
+            </a:pPr>
+            <a:r>
+              <a:rPr sz="1100" b="0">
+                <a:solidFill>
+                  <a:srgbClr val="6B7480"/>
+                </a:solidFill>
+                <a:latin typeface="Lato"/>
+              </a:rPr>
+              <a:t>HalfSecuredTeam  ·  EHDS Track 3</a:t>
+            </a:r>
+          </a:p>
+        </p:txBody>
+      </p:sp>
+      <p:sp>
+        <p:nvSpPr>
+          <p:cNvPr id="6" name="TextBox 5"/>
+          <p:cNvSpPr txBox="1"/>
+          <p:nvPr/>
+        </p:nvSpPr>
+        <p:spPr>
+          <a:xfrm>
+            <a:off x="10454335" y="6355080"/>
+            <a:ext cx="914400" cy="274320"/>
+          </a:xfrm>
+          <a:prstGeom prst="rect">
+            <a:avLst/>
+          </a:prstGeom>
+          <a:noFill/>
+        </p:spPr>
+        <p:txBody>
+          <a:bodyPr wrap="square" anchor="t" lIns="0" rIns="0" tIns="0" bIns="0">
+            <a:spAutoFit/>
+          </a:bodyPr>
+          <a:lstStyle/>
+          <a:p>
+            <a:pPr algn="r">
+              <a:lnSpc>
+                <a:spcPct val="115000"/>
+              </a:lnSpc>
+            </a:pPr>
+            <a:r>
+              <a:rPr sz="1100" b="0">
+                <a:solidFill>
+                  <a:srgbClr val="6B7480"/>
+                </a:solidFill>
+                <a:latin typeface="Lato"/>
+              </a:rPr>
+              <a:t>8</a:t>
+            </a:r>
+          </a:p>
+        </p:txBody>
+      </p:sp>
+      <p:sp>
+        <p:nvSpPr>
           <p:cNvPr id="7" name="TextBox 6"/>
           <p:cNvSpPr txBox="1"/>
           <p:nvPr/>
         </p:nvSpPr>
         <p:spPr>
           <a:xfrm>
-            <a:off x="777240" y="1508760"/>
-            <a:ext cx="5029200" cy="457200"/>
+            <a:off x="822960" y="2286000"/>
+            <a:ext cx="10545775" cy="2743200"/>
           </a:xfrm>
           <a:prstGeom prst="rect">
             <a:avLst/>
@@ -7685,34 +7547,88 @@
           <a:noFill/>
         </p:spPr>
         <p:txBody>
-          <a:bodyPr wrap="square" anchor="t" lIns="45720" rIns="45720">
+          <a:bodyPr wrap="square" anchor="t" lIns="0" rIns="0" tIns="0" bIns="0">
             <a:spAutoFit/>
           </a:bodyPr>
           <a:lstStyle/>
           <a:p>
-            <a:pPr algn="l"/>
-            <a:r>
-              <a:rPr sz="2000" b="1">
-                <a:solidFill>
-                  <a:srgbClr val="2E7D32"/>
-                </a:solidFill>
-                <a:latin typeface="Inter"/>
+            <a:pPr algn="l">
+              <a:lnSpc>
+                <a:spcPct val="150000"/>
+              </a:lnSpc>
+            </a:pPr>
+            <a:r>
+              <a:rPr sz="2000" b="0">
+                <a:solidFill>
+                  <a:srgbClr val="141A22"/>
+                </a:solidFill>
+                <a:latin typeface="Lato"/>
               </a:rPr>
-              <a:t>Works</a:t>
-            </a:r>
-          </a:p>
-        </p:txBody>
-      </p:sp>
-      <p:sp>
-        <p:nvSpPr>
-          <p:cNvPr id="8" name="TextBox 7"/>
+              <a:t>Body text, 20 pt. One thought per line.</a:t>
+            </a:r>
+          </a:p>
+          <a:p>
+            <a:pPr algn="l">
+              <a:lnSpc>
+                <a:spcPct val="150000"/>
+              </a:lnSpc>
+            </a:pPr>
+            <a:r>
+              <a:rPr sz="2000" b="0">
+                <a:solidFill>
+                  <a:srgbClr val="141A22"/>
+                </a:solidFill>
+                <a:latin typeface="Lato"/>
+              </a:rPr>
+              <a:t>Second line.</a:t>
+            </a:r>
+          </a:p>
+          <a:p>
+            <a:pPr algn="l">
+              <a:lnSpc>
+                <a:spcPct val="150000"/>
+              </a:lnSpc>
+            </a:pPr>
+            <a:r>
+              <a:rPr sz="2000" b="0">
+                <a:solidFill>
+                  <a:srgbClr val="141A22"/>
+                </a:solidFill>
+                <a:latin typeface="Lato"/>
+              </a:rPr>
+              <a:t>Third line.</a:t>
+            </a:r>
+          </a:p>
+        </p:txBody>
+      </p:sp>
+    </p:spTree>
+  </p:cSld>
+  <p:clrMapOvr>
+    <a:masterClrMapping/>
+  </p:clrMapOvr>
+</p:sld>
+</file>
+
+<file path=ppt/slides/slide9.xml><?xml version="1.0" encoding="utf-8"?>
+<p:sld xmlns:a="http://schemas.openxmlformats.org/drawingml/2006/main" xmlns:p="http://schemas.openxmlformats.org/presentationml/2006/main" xmlns:r="http://schemas.openxmlformats.org/officeDocument/2006/relationships">
+  <p:cSld>
+    <p:spTree>
+      <p:nvGrpSpPr>
+        <p:cNvPr id="1" name=""/>
+        <p:cNvGrpSpPr/>
+        <p:nvPr/>
+      </p:nvGrpSpPr>
+      <p:grpSpPr/>
+      <p:sp>
+        <p:nvSpPr>
+          <p:cNvPr id="2" name="TextBox 1"/>
           <p:cNvSpPr txBox="1"/>
           <p:nvPr/>
         </p:nvSpPr>
         <p:spPr>
           <a:xfrm>
-            <a:off x="777240" y="2011680"/>
-            <a:ext cx="5029200" cy="3657600"/>
+            <a:off x="822960" y="685800"/>
+            <a:ext cx="10545775" cy="274320"/>
           </a:xfrm>
           <a:prstGeom prst="rect">
             <a:avLst/>
@@ -7720,160 +7636,86 @@
           <a:noFill/>
         </p:spPr>
         <p:txBody>
-          <a:bodyPr wrap="square">
+          <a:bodyPr wrap="square" anchor="t" lIns="0" rIns="0" tIns="0" bIns="0">
             <a:spAutoFit/>
           </a:bodyPr>
           <a:lstStyle/>
           <a:p>
-            <a:pPr>
-              <a:spcAft>
-                <a:spcPts val="600"/>
-              </a:spcAft>
+            <a:pPr algn="l">
+              <a:lnSpc>
+                <a:spcPct val="115000"/>
+              </a:lnSpc>
             </a:pPr>
             <a:r>
-              <a:rPr sz="1500" b="1">
-                <a:solidFill>
-                  <a:srgbClr val="1F2A37"/>
-                </a:solidFill>
-                <a:latin typeface="Inter"/>
+              <a:rPr sz="1200" b="1">
+                <a:solidFill>
+                  <a:srgbClr val="1A5FB4"/>
+                </a:solidFill>
+                <a:latin typeface="Lato"/>
               </a:rPr>
-              <a:t>•  10 / 10 decisions and articles</a:t>
-            </a:r>
-            <a:r>
-              <a:rPr sz="1500">
-                <a:solidFill>
-                  <a:srgbClr val="5B6472"/>
-                </a:solidFill>
-                <a:latin typeface="Inter"/>
+              <a:t>KICKER</a:t>
+            </a:r>
+          </a:p>
+        </p:txBody>
+      </p:sp>
+      <p:sp>
+        <p:nvSpPr>
+          <p:cNvPr id="3" name="TextBox 2"/>
+          <p:cNvSpPr txBox="1"/>
+          <p:nvPr/>
+        </p:nvSpPr>
+        <p:spPr>
+          <a:xfrm>
+            <a:off x="822960" y="1005840"/>
+            <a:ext cx="10545775" cy="822960"/>
+          </a:xfrm>
+          <a:prstGeom prst="rect">
+            <a:avLst/>
+          </a:prstGeom>
+          <a:noFill/>
+        </p:spPr>
+        <p:txBody>
+          <a:bodyPr wrap="square" anchor="t" lIns="0" rIns="0" tIns="0" bIns="0">
+            <a:spAutoFit/>
+          </a:bodyPr>
+          <a:lstStyle/>
+          <a:p>
+            <a:pPr algn="l">
+              <a:lnSpc>
+                <a:spcPct val="115000"/>
+              </a:lnSpc>
+            </a:pPr>
+            <a:r>
+              <a:rPr sz="3400" b="1">
+                <a:solidFill>
+                  <a:srgbClr val="141A22"/>
+                </a:solidFill>
+                <a:latin typeface="Lato"/>
               </a:rPr>
-              <a:t> on the task requests</a:t>
-            </a:r>
-          </a:p>
-          <a:p>
-            <a:pPr>
-              <a:spcAft>
-                <a:spcPts val="600"/>
-              </a:spcAft>
-            </a:pPr>
-            <a:r>
-              <a:rPr sz="1500" b="1">
-                <a:solidFill>
-                  <a:srgbClr val="1F2A37"/>
-                </a:solidFill>
-                <a:latin typeface="Inter"/>
-              </a:rPr>
-              <a:t>•  6 / 6 numbers, 0 privacy leaks</a:t>
-            </a:r>
-            <a:r>
-              <a:rPr sz="1500">
-                <a:solidFill>
-                  <a:srgbClr val="5B6472"/>
-                </a:solidFill>
-                <a:latin typeface="Inter"/>
-              </a:rPr>
-              <a:t> small-cell rule, opt-outs</a:t>
-            </a:r>
-          </a:p>
-          <a:p>
-            <a:pPr>
-              <a:spcAft>
-                <a:spcPts val="600"/>
-              </a:spcAft>
-            </a:pPr>
-            <a:r>
-              <a:rPr sz="1500" b="1">
-                <a:solidFill>
-                  <a:srgbClr val="1F2A37"/>
-                </a:solidFill>
-                <a:latin typeface="Inter"/>
-              </a:rPr>
-              <a:t>•  10 / 10 consistent</a:t>
-            </a:r>
-            <a:r>
-              <a:rPr sz="1500">
-                <a:solidFill>
-                  <a:srgbClr val="5B6472"/>
-                </a:solidFill>
-                <a:latin typeface="Inter"/>
-              </a:rPr>
-              <a:t> across 3 runs, slowest answer 5.7 s</a:t>
-            </a:r>
-          </a:p>
-          <a:p>
-            <a:pPr>
-              <a:spcAft>
-                <a:spcPts val="600"/>
-              </a:spcAft>
-            </a:pPr>
-            <a:r>
-              <a:rPr sz="1500" b="1">
-                <a:solidFill>
-                  <a:srgbClr val="1F2A37"/>
-                </a:solidFill>
-                <a:latin typeface="Inter"/>
-              </a:rPr>
-              <a:t>•  34 / 36 on unseen requests</a:t>
-            </a:r>
-            <a:r>
-              <a:rPr sz="1500">
-                <a:solidFill>
-                  <a:srgbClr val="5B6472"/>
-                </a:solidFill>
-                <a:latin typeface="Inter"/>
-              </a:rPr>
-              <a:t> incl. 6 in German; every prohibited purpose caught</a:t>
-            </a:r>
-          </a:p>
-          <a:p>
-            <a:pPr>
-              <a:spcAft>
-                <a:spcPts val="600"/>
-              </a:spcAft>
-            </a:pPr>
-            <a:r>
-              <a:rPr sz="1500" b="1">
-                <a:solidFill>
-                  <a:srgbClr val="1F2A37"/>
-                </a:solidFill>
-                <a:latin typeface="Inter"/>
-              </a:rPr>
-              <a:t>•  Secure room</a:t>
-            </a:r>
-            <a:r>
-              <a:rPr sz="1500">
-                <a:solidFill>
-                  <a:srgbClr val="5B6472"/>
-                </a:solidFill>
-                <a:latin typeface="Inter"/>
-              </a:rPr>
-              <a:t> only named records, images only, download 403 + audit log</a:t>
-            </a:r>
-          </a:p>
-        </p:txBody>
-      </p:sp>
-      <p:sp>
-        <p:nvSpPr>
-          <p:cNvPr id="9" name="Rounded Rectangle 8"/>
+              <a:t>Two columns</a:t>
+            </a:r>
+          </a:p>
+        </p:txBody>
+      </p:sp>
+      <p:sp>
+        <p:nvSpPr>
+          <p:cNvPr id="4" name="Rectangle 3"/>
           <p:cNvSpPr/>
           <p:nvPr/>
         </p:nvSpPr>
         <p:spPr>
           <a:xfrm>
-            <a:off x="6263640" y="1371600"/>
-            <a:ext cx="5394960" cy="4480560"/>
-          </a:xfrm>
-          <a:prstGeom prst="roundRect">
-            <a:avLst>
-              <a:gd name="adj" fmla="val 8000"/>
-            </a:avLst>
+            <a:off x="822960" y="1874520"/>
+            <a:ext cx="640080" cy="45720"/>
+          </a:xfrm>
+          <a:prstGeom prst="rect">
+            <a:avLst/>
           </a:prstGeom>
           <a:solidFill>
-            <a:srgbClr val="F6F7F9"/>
+            <a:srgbClr val="1A5FB4"/>
           </a:solidFill>
-          <a:ln w="19050">
-            <a:solidFill>
-              <a:srgbClr val="C62828"/>
-            </a:solidFill>
+          <a:ln>
+            <a:noFill/>
           </a:ln>
           <a:effectLst/>
         </p:spPr>
@@ -7901,14 +7743,14 @@
       </p:sp>
       <p:sp>
         <p:nvSpPr>
-          <p:cNvPr id="10" name="TextBox 9"/>
+          <p:cNvPr id="5" name="TextBox 4"/>
           <p:cNvSpPr txBox="1"/>
           <p:nvPr/>
         </p:nvSpPr>
         <p:spPr>
           <a:xfrm>
-            <a:off x="6492240" y="1508760"/>
-            <a:ext cx="5029200" cy="457200"/>
+            <a:off x="822960" y="6355080"/>
+            <a:ext cx="7315200" cy="274320"/>
           </a:xfrm>
           <a:prstGeom prst="rect">
             <a:avLst/>
@@ -7916,21 +7758,230 @@
           <a:noFill/>
         </p:spPr>
         <p:txBody>
-          <a:bodyPr wrap="square" anchor="t" lIns="45720" rIns="45720">
+          <a:bodyPr wrap="square" anchor="t" lIns="0" rIns="0" tIns="0" bIns="0">
             <a:spAutoFit/>
           </a:bodyPr>
           <a:lstStyle/>
           <a:p>
-            <a:pPr algn="l"/>
-            <a:r>
-              <a:rPr sz="2000" b="1">
-                <a:solidFill>
-                  <a:srgbClr val="C62828"/>
-                </a:solidFill>
-                <a:latin typeface="Inter"/>
+            <a:pPr algn="l">
+              <a:lnSpc>
+                <a:spcPct val="115000"/>
+              </a:lnSpc>
+            </a:pPr>
+            <a:r>
+              <a:rPr sz="1100" b="0">
+                <a:solidFill>
+                  <a:srgbClr val="6B7480"/>
+                </a:solidFill>
+                <a:latin typeface="Lato"/>
               </a:rPr>
-              <a:t>Not yet</a:t>
-            </a:r>
+              <a:t>HalfSecuredTeam  ·  EHDS Track 3</a:t>
+            </a:r>
+          </a:p>
+        </p:txBody>
+      </p:sp>
+      <p:sp>
+        <p:nvSpPr>
+          <p:cNvPr id="6" name="TextBox 5"/>
+          <p:cNvSpPr txBox="1"/>
+          <p:nvPr/>
+        </p:nvSpPr>
+        <p:spPr>
+          <a:xfrm>
+            <a:off x="10454335" y="6355080"/>
+            <a:ext cx="914400" cy="274320"/>
+          </a:xfrm>
+          <a:prstGeom prst="rect">
+            <a:avLst/>
+          </a:prstGeom>
+          <a:noFill/>
+        </p:spPr>
+        <p:txBody>
+          <a:bodyPr wrap="square" anchor="t" lIns="0" rIns="0" tIns="0" bIns="0">
+            <a:spAutoFit/>
+          </a:bodyPr>
+          <a:lstStyle/>
+          <a:p>
+            <a:pPr algn="r">
+              <a:lnSpc>
+                <a:spcPct val="115000"/>
+              </a:lnSpc>
+            </a:pPr>
+            <a:r>
+              <a:rPr sz="1100" b="0">
+                <a:solidFill>
+                  <a:srgbClr val="6B7480"/>
+                </a:solidFill>
+                <a:latin typeface="Lato"/>
+              </a:rPr>
+              <a:t>9</a:t>
+            </a:r>
+          </a:p>
+        </p:txBody>
+      </p:sp>
+      <p:sp>
+        <p:nvSpPr>
+          <p:cNvPr id="7" name="Rectangle 6"/>
+          <p:cNvSpPr/>
+          <p:nvPr/>
+        </p:nvSpPr>
+        <p:spPr>
+          <a:xfrm>
+            <a:off x="822960" y="2834640"/>
+            <a:ext cx="457200" cy="54864"/>
+          </a:xfrm>
+          <a:prstGeom prst="rect">
+            <a:avLst/>
+          </a:prstGeom>
+          <a:solidFill>
+            <a:srgbClr val="1A5FB4"/>
+          </a:solidFill>
+          <a:ln>
+            <a:noFill/>
+          </a:ln>
+          <a:effectLst/>
+        </p:spPr>
+        <p:style>
+          <a:lnRef idx="1">
+            <a:schemeClr val="accent1"/>
+          </a:lnRef>
+          <a:fillRef idx="3">
+            <a:schemeClr val="accent1"/>
+          </a:fillRef>
+          <a:effectRef idx="2">
+            <a:schemeClr val="accent1"/>
+          </a:effectRef>
+          <a:fontRef idx="minor">
+            <a:schemeClr val="lt1"/>
+          </a:fontRef>
+        </p:style>
+        <p:txBody>
+          <a:bodyPr rtlCol="0" anchor="ctr"/>
+          <a:lstStyle/>
+          <a:p>
+            <a:pPr algn="ctr"/>
+          </a:p>
+        </p:txBody>
+      </p:sp>
+      <p:sp>
+        <p:nvSpPr>
+          <p:cNvPr id="8" name="TextBox 7"/>
+          <p:cNvSpPr txBox="1"/>
+          <p:nvPr/>
+        </p:nvSpPr>
+        <p:spPr>
+          <a:xfrm>
+            <a:off x="822960" y="3108960"/>
+            <a:ext cx="5044287" cy="1005840"/>
+          </a:xfrm>
+          <a:prstGeom prst="rect">
+            <a:avLst/>
+          </a:prstGeom>
+          <a:noFill/>
+        </p:spPr>
+        <p:txBody>
+          <a:bodyPr wrap="square" anchor="t" lIns="0" rIns="0" tIns="0" bIns="0">
+            <a:spAutoFit/>
+          </a:bodyPr>
+          <a:lstStyle/>
+          <a:p>
+            <a:pPr algn="l">
+              <a:lnSpc>
+                <a:spcPct val="110000"/>
+              </a:lnSpc>
+            </a:pPr>
+            <a:r>
+              <a:rPr sz="2400" b="1">
+                <a:solidFill>
+                  <a:srgbClr val="141A22"/>
+                </a:solidFill>
+                <a:latin typeface="Lato"/>
+              </a:rPr>
+              <a:t>Left heading</a:t>
+            </a:r>
+          </a:p>
+        </p:txBody>
+      </p:sp>
+      <p:sp>
+        <p:nvSpPr>
+          <p:cNvPr id="9" name="TextBox 8"/>
+          <p:cNvSpPr txBox="1"/>
+          <p:nvPr/>
+        </p:nvSpPr>
+        <p:spPr>
+          <a:xfrm>
+            <a:off x="822960" y="4160520"/>
+            <a:ext cx="5044287" cy="2286000"/>
+          </a:xfrm>
+          <a:prstGeom prst="rect">
+            <a:avLst/>
+          </a:prstGeom>
+          <a:noFill/>
+        </p:spPr>
+        <p:txBody>
+          <a:bodyPr wrap="square" anchor="t" lIns="0" rIns="0" tIns="0" bIns="0">
+            <a:spAutoFit/>
+          </a:bodyPr>
+          <a:lstStyle/>
+          <a:p>
+            <a:pPr algn="l">
+              <a:lnSpc>
+                <a:spcPct val="135000"/>
+              </a:lnSpc>
+            </a:pPr>
+            <a:r>
+              <a:rPr sz="1800" b="0">
+                <a:solidFill>
+                  <a:srgbClr val="6B7480"/>
+                </a:solidFill>
+                <a:latin typeface="Lato"/>
+              </a:rPr>
+              <a:t>one short line</a:t>
+            </a:r>
+          </a:p>
+        </p:txBody>
+      </p:sp>
+      <p:sp>
+        <p:nvSpPr>
+          <p:cNvPr id="10" name="Rectangle 9"/>
+          <p:cNvSpPr/>
+          <p:nvPr/>
+        </p:nvSpPr>
+        <p:spPr>
+          <a:xfrm>
+            <a:off x="6324447" y="2834640"/>
+            <a:ext cx="457200" cy="54864"/>
+          </a:xfrm>
+          <a:prstGeom prst="rect">
+            <a:avLst/>
+          </a:prstGeom>
+          <a:solidFill>
+            <a:srgbClr val="1A5FB4"/>
+          </a:solidFill>
+          <a:ln>
+            <a:noFill/>
+          </a:ln>
+          <a:effectLst/>
+        </p:spPr>
+        <p:style>
+          <a:lnRef idx="1">
+            <a:schemeClr val="accent1"/>
+          </a:lnRef>
+          <a:fillRef idx="3">
+            <a:schemeClr val="accent1"/>
+          </a:fillRef>
+          <a:effectRef idx="2">
+            <a:schemeClr val="accent1"/>
+          </a:effectRef>
+          <a:fontRef idx="minor">
+            <a:schemeClr val="lt1"/>
+          </a:fontRef>
+        </p:style>
+        <p:txBody>
+          <a:bodyPr rtlCol="0" anchor="ctr"/>
+          <a:lstStyle/>
+          <a:p>
+            <a:pPr algn="ctr"/>
           </a:p>
         </p:txBody>
       </p:sp>
@@ -7942,8 +7993,8 @@
         </p:nvSpPr>
         <p:spPr>
           <a:xfrm>
-            <a:off x="6492240" y="2011680"/>
-            <a:ext cx="5029200" cy="3657600"/>
+            <a:off x="6324447" y="3108960"/>
+            <a:ext cx="5044287" cy="1005840"/>
           </a:xfrm>
           <a:prstGeom prst="rect">
             <a:avLst/>
@@ -7951,108 +8002,24 @@
           <a:noFill/>
         </p:spPr>
         <p:txBody>
-          <a:bodyPr wrap="square">
+          <a:bodyPr wrap="square" anchor="t" lIns="0" rIns="0" tIns="0" bIns="0">
             <a:spAutoFit/>
           </a:bodyPr>
           <a:lstStyle/>
           <a:p>
-            <a:pPr>
-              <a:spcAft>
-                <a:spcPts val="600"/>
-              </a:spcAft>
+            <a:pPr algn="l">
+              <a:lnSpc>
+                <a:spcPct val="110000"/>
+              </a:lnSpc>
             </a:pPr>
             <a:r>
-              <a:rPr sz="1500" b="1">
-                <a:solidFill>
-                  <a:srgbClr val="1F2A37"/>
-                </a:solidFill>
-                <a:latin typeface="Inter"/>
+              <a:rPr sz="2400" b="1">
+                <a:solidFill>
+                  <a:srgbClr val="141A22"/>
+                </a:solidFill>
+                <a:latin typeface="Lato"/>
               </a:rPr>
-              <a:t>•  Sometimes too strict:</a:t>
-            </a:r>
-            <a:r>
-              <a:rPr sz="1500">
-                <a:solidFill>
-                  <a:srgbClr val="5B6472"/>
-                </a:solidFill>
-                <a:latin typeface="Inter"/>
-              </a:rPr>
-              <a:t> a study about insurance premiums was rejected for mentioning them</a:t>
-            </a:r>
-          </a:p>
-          <a:p>
-            <a:pPr>
-              <a:spcAft>
-                <a:spcPts val="600"/>
-              </a:spcAft>
-            </a:pPr>
-            <a:r>
-              <a:rPr sz="1500" b="1">
-                <a:solidFill>
-                  <a:srgbClr val="1F2A37"/>
-                </a:solidFill>
-                <a:latin typeface="Inter"/>
-              </a:rPr>
-              <a:t>•  Point within Art. 53 can vary</a:t>
-            </a:r>
-            <a:r>
-              <a:rPr sz="1500">
-                <a:solidFill>
-                  <a:srgbClr val="5B6472"/>
-                </a:solidFill>
-                <a:latin typeface="Inter"/>
-              </a:rPr>
-              <a:t> between runs; decision and articles do not</a:t>
-            </a:r>
-          </a:p>
-          <a:p>
-            <a:pPr>
-              <a:spcAft>
-                <a:spcPts val="600"/>
-              </a:spcAft>
-            </a:pPr>
-            <a:r>
-              <a:rPr sz="1500" b="1">
-                <a:solidFill>
-                  <a:srgbClr val="1F2A37"/>
-                </a:solidFill>
-                <a:latin typeface="Inter"/>
-              </a:rPr>
-              <a:t>•  Staff submission list</a:t>
-            </a:r>
-            <a:r>
-              <a:rPr sz="1500">
-                <a:solidFill>
-                  <a:srgbClr val="5B6472"/>
-                </a:solidFill>
-                <a:latin typeface="Inter"/>
-              </a:rPr>
-              <a:t> is a placeholder, lost on restart</a:t>
-            </a:r>
-          </a:p>
-          <a:p>
-            <a:pPr>
-              <a:spcAft>
-                <a:spcPts val="600"/>
-              </a:spcAft>
-            </a:pPr>
-            <a:r>
-              <a:rPr sz="1500" b="1">
-                <a:solidFill>
-                  <a:srgbClr val="1F2A37"/>
-                </a:solidFill>
-                <a:latin typeface="Inter"/>
-              </a:rPr>
-              <a:t>•  Screens can be photographed</a:t>
-            </a:r>
-            <a:r>
-              <a:rPr sz="1500">
-                <a:solidFill>
-                  <a:srgbClr val="5B6472"/>
-                </a:solidFill>
-                <a:latin typeface="Inter"/>
-              </a:rPr>
-              <a:t> — true of every SPE</a:t>
+              <a:t>Right heading</a:t>
             </a:r>
           </a:p>
         </p:txBody>
@@ -8065,8 +8032,8 @@
         </p:nvSpPr>
         <p:spPr>
           <a:xfrm>
-            <a:off x="548640" y="5989320"/>
-            <a:ext cx="10972800" cy="365760"/>
+            <a:off x="6324447" y="4160520"/>
+            <a:ext cx="5044287" cy="2286000"/>
           </a:xfrm>
           <a:prstGeom prst="rect">
             <a:avLst/>
@@ -8074,55 +8041,24 @@
           <a:noFill/>
         </p:spPr>
         <p:txBody>
-          <a:bodyPr wrap="square" anchor="t" lIns="45720" rIns="45720">
+          <a:bodyPr wrap="square" anchor="t" lIns="0" rIns="0" tIns="0" bIns="0">
             <a:spAutoFit/>
           </a:bodyPr>
           <a:lstStyle/>
           <a:p>
-            <a:pPr algn="l"/>
-            <a:r>
-              <a:rPr sz="1400" b="1">
-                <a:solidFill>
-                  <a:srgbClr val="1F3A5F"/>
-                </a:solidFill>
-                <a:latin typeface="Inter"/>
+            <a:pPr algn="l">
+              <a:lnSpc>
+                <a:spcPct val="135000"/>
+              </a:lnSpc>
+            </a:pPr>
+            <a:r>
+              <a:rPr sz="1800" b="0">
+                <a:solidFill>
+                  <a:srgbClr val="6B7480"/>
+                </a:solidFill>
+                <a:latin typeface="Lato"/>
               </a:rPr>
-              <a:t>github.com/MatthiasEbner2002/Track_3-HalfSecuredTeam</a:t>
-            </a:r>
-          </a:p>
-        </p:txBody>
-      </p:sp>
-      <p:sp>
-        <p:nvSpPr>
-          <p:cNvPr id="13" name="TextBox 12"/>
-          <p:cNvSpPr txBox="1"/>
-          <p:nvPr/>
-        </p:nvSpPr>
-        <p:spPr>
-          <a:xfrm>
-            <a:off x="548640" y="6446520"/>
-            <a:ext cx="10972800" cy="274320"/>
-          </a:xfrm>
-          <a:prstGeom prst="rect">
-            <a:avLst/>
-          </a:prstGeom>
-          <a:noFill/>
-        </p:spPr>
-        <p:txBody>
-          <a:bodyPr wrap="square" anchor="t" lIns="45720" rIns="45720">
-            <a:spAutoFit/>
-          </a:bodyPr>
-          <a:lstStyle/>
-          <a:p>
-            <a:pPr algn="l"/>
-            <a:r>
-              <a:rPr sz="1000" b="0">
-                <a:solidFill>
-                  <a:srgbClr val="5B6472"/>
-                </a:solidFill>
-                <a:latin typeface="Inter"/>
-              </a:rPr>
-              <a:t>EHDS · Regulation (EU) 2025/327 · synthetic data only</a:t>
+              <a:t>one short line</a:t>
             </a:r>
           </a:p>
         </p:txBody>
